--- a/Reading_the_Radar_pre-block_slides.pptx
+++ b/Reading_the_Radar_pre-block_slides.pptx
@@ -5,11 +5,11 @@
     <p:sldMasterId id="2147483648" r:id="rId1"/>
   </p:sldMasterIdLst>
   <p:notesMasterIdLst>
-    <p:notesMasterId r:id="rId28"/>
+    <p:notesMasterId r:id="rId34"/>
   </p:notesMasterIdLst>
   <p:sldIdLst>
     <p:sldId id="256" r:id="rId2"/>
-    <p:sldId id="257" r:id="rId3"/>
+    <p:sldId id="290" r:id="rId3"/>
     <p:sldId id="258" r:id="rId4"/>
     <p:sldId id="259" r:id="rId5"/>
     <p:sldId id="260" r:id="rId6"/>
@@ -34,6 +34,12 @@
     <p:sldId id="276" r:id="rId25"/>
     <p:sldId id="277" r:id="rId26"/>
     <p:sldId id="282" r:id="rId27"/>
+    <p:sldId id="289" r:id="rId28"/>
+    <p:sldId id="284" r:id="rId29"/>
+    <p:sldId id="285" r:id="rId30"/>
+    <p:sldId id="286" r:id="rId31"/>
+    <p:sldId id="287" r:id="rId32"/>
+    <p:sldId id="288" r:id="rId33"/>
   </p:sldIdLst>
   <p:sldSz cx="9144000" cy="5143500" type="screen16x9"/>
   <p:notesSz cx="5143500" cy="9144000"/>
@@ -1265,7 +1271,7 @@
           <a:p>
             <a:r>
               <a:rPr lang="en-US" dirty="0"/>
-              <a:t>The blocks follow the life of one measurement: where the beam goes, how big the sample is, how range and velocity are extracted, and how wavelength and the scan shape the result. Point out that blocks build on each other.</a:t>
+              <a:t>The blocks follow the life of one measurement, end to end. Blocks 1–4 are the live workshop; Block 5 (dual-pol) is the take-home bonus, flagged in amber.</a:t>
             </a:r>
           </a:p>
         </p:txBody>
@@ -1915,6 +1921,327 @@
 </p:notes>
 </file>
 
+<file path=ppt/notesSlides/notesSlide27.xml><?xml version="1.0" encoding="utf-8"?>
+<p:notes xmlns:a="http://schemas.openxmlformats.org/drawingml/2006/main" xmlns:r="http://schemas.openxmlformats.org/officeDocument/2006/relationships" xmlns:p="http://schemas.openxmlformats.org/presentationml/2006/main">
+  <p:cSld>
+    <p:spTree>
+      <p:nvGrpSpPr>
+        <p:cNvPr id="1" name=""/>
+        <p:cNvGrpSpPr/>
+        <p:nvPr/>
+      </p:nvGrpSpPr>
+      <p:grpSpPr>
+        <a:xfrm>
+          <a:off x="0" y="0"/>
+          <a:ext cx="0" cy="0"/>
+          <a:chOff x="0" y="0"/>
+          <a:chExt cx="0" cy="0"/>
+        </a:xfrm>
+      </p:grpSpPr>
+      <p:sp>
+        <p:nvSpPr>
+          <p:cNvPr id="2" name="Slide Image Placeholder 1"/>
+          <p:cNvSpPr>
+            <a:spLocks noGrp="1" noRot="1" noChangeAspect="1"/>
+          </p:cNvSpPr>
+          <p:nvPr>
+            <p:ph type="sldImg"/>
+          </p:nvPr>
+        </p:nvSpPr>
+        <p:spPr/>
+      </p:sp>
+      <p:sp>
+        <p:nvSpPr>
+          <p:cNvPr id="3" name="Notes Placeholder 2"/>
+          <p:cNvSpPr>
+            <a:spLocks noGrp="1"/>
+          </p:cNvSpPr>
+          <p:nvPr>
+            <p:ph type="body" idx="1"/>
+          </p:nvPr>
+        </p:nvSpPr>
+        <p:spPr/>
+        <p:txBody>
+          <a:bodyPr/>
+          <a:lstStyle/>
+          <a:p>
+            <a:r>
+              <a:rPr lang="en-US" dirty="0"/>
+              <a:t>New measurement dimension: polarization. Frame it as the modern capability the first four blocks didn't use, and the one most relevant to a rainfall-focused C-band audience.</a:t>
+            </a:r>
+          </a:p>
+        </p:txBody>
+      </p:sp>
+      <p:sp>
+        <p:nvSpPr>
+          <p:cNvPr id="4" name="Slide Number Placeholder 3"/>
+          <p:cNvSpPr>
+            <a:spLocks noGrp="1"/>
+          </p:cNvSpPr>
+          <p:nvPr>
+            <p:ph type="sldNum" sz="quarter" idx="10"/>
+          </p:nvPr>
+        </p:nvSpPr>
+        <p:spPr/>
+        <p:txBody>
+          <a:bodyPr/>
+          <a:lstStyle/>
+          <a:p>
+            <a:pPr marL="0" marR="0" lvl="0" indent="0" algn="l" defTabSz="914400" rtl="0" eaLnBrk="1" fontAlgn="auto" latinLnBrk="0" hangingPunct="1">
+              <a:lnSpc>
+                <a:spcPct val="100000"/>
+              </a:lnSpc>
+              <a:spcBef>
+                <a:spcPts val="0"/>
+              </a:spcBef>
+              <a:spcAft>
+                <a:spcPts val="0"/>
+              </a:spcAft>
+              <a:buClrTx/>
+              <a:buSzTx/>
+              <a:buFontTx/>
+              <a:buNone/>
+              <a:tabLst/>
+              <a:defRPr/>
+            </a:pPr>
+            <a:fld id="{F7021451-1387-4CA6-816F-3879F97B5CBC}" type="slidenum">
+              <a:rPr kumimoji="0" lang="en-US" sz="1800" b="0" i="0" u="none" strike="noStrike" kern="1200" cap="none" spc="0" normalizeH="0" baseline="0" noProof="0">
+                <a:ln>
+                  <a:noFill/>
+                </a:ln>
+                <a:solidFill>
+                  <a:prstClr val="black"/>
+                </a:solidFill>
+                <a:effectLst/>
+                <a:uLnTx/>
+                <a:uFillTx/>
+                <a:latin typeface="Aptos" panose="02110004020202020204"/>
+                <a:ea typeface="+mn-ea"/>
+                <a:cs typeface="+mn-cs"/>
+              </a:rPr>
+              <a:pPr marL="0" marR="0" lvl="0" indent="0" algn="l" defTabSz="914400" rtl="0" eaLnBrk="1" fontAlgn="auto" latinLnBrk="0" hangingPunct="1">
+                <a:lnSpc>
+                  <a:spcPct val="100000"/>
+                </a:lnSpc>
+                <a:spcBef>
+                  <a:spcPts val="0"/>
+                </a:spcBef>
+                <a:spcAft>
+                  <a:spcPts val="0"/>
+                </a:spcAft>
+                <a:buClrTx/>
+                <a:buSzTx/>
+                <a:buFontTx/>
+                <a:buNone/>
+                <a:tabLst/>
+                <a:defRPr/>
+              </a:pPr>
+              <a:t>27</a:t>
+            </a:fld>
+            <a:endParaRPr kumimoji="0" lang="en-US" sz="1800" b="0" i="0" u="none" strike="noStrike" kern="1200" cap="none" spc="0" normalizeH="0" baseline="0" noProof="0">
+              <a:ln>
+                <a:noFill/>
+              </a:ln>
+              <a:solidFill>
+                <a:prstClr val="black"/>
+              </a:solidFill>
+              <a:effectLst/>
+              <a:uLnTx/>
+              <a:uFillTx/>
+              <a:latin typeface="Aptos" panose="02110004020202020204"/>
+              <a:ea typeface="+mn-ea"/>
+              <a:cs typeface="+mn-cs"/>
+            </a:endParaRPr>
+          </a:p>
+        </p:txBody>
+      </p:sp>
+    </p:spTree>
+    <p:extLst>
+      <p:ext uri="{BB962C8B-B14F-4D97-AF65-F5344CB8AC3E}">
+        <p14:creationId xmlns:p14="http://schemas.microsoft.com/office/powerpoint/2010/main" val="1024086991"/>
+      </p:ext>
+    </p:extLst>
+  </p:cSld>
+  <p:clrMapOvr>
+    <a:masterClrMapping/>
+  </p:clrMapOvr>
+</p:notes>
+</file>
+
+<file path=ppt/notesSlides/notesSlide28.xml><?xml version="1.0" encoding="utf-8"?>
+<p:notes xmlns:a="http://schemas.openxmlformats.org/drawingml/2006/main" xmlns:r="http://schemas.openxmlformats.org/officeDocument/2006/relationships" xmlns:p="http://schemas.openxmlformats.org/presentationml/2006/main">
+  <p:cSld>
+    <p:spTree>
+      <p:nvGrpSpPr>
+        <p:cNvPr id="1" name=""/>
+        <p:cNvGrpSpPr/>
+        <p:nvPr/>
+      </p:nvGrpSpPr>
+      <p:grpSpPr>
+        <a:xfrm>
+          <a:off x="0" y="0"/>
+          <a:ext cx="0" cy="0"/>
+          <a:chOff x="0" y="0"/>
+          <a:chExt cx="0" cy="0"/>
+        </a:xfrm>
+      </p:grpSpPr>
+      <p:sp>
+        <p:nvSpPr>
+          <p:cNvPr id="2" name="Slide Image Placeholder 1"/>
+          <p:cNvSpPr>
+            <a:spLocks noGrp="1" noRot="1" noChangeAspect="1"/>
+          </p:cNvSpPr>
+          <p:nvPr>
+            <p:ph type="sldImg"/>
+          </p:nvPr>
+        </p:nvSpPr>
+        <p:spPr/>
+      </p:sp>
+      <p:sp>
+        <p:nvSpPr>
+          <p:cNvPr id="3" name="Notes Placeholder 2"/>
+          <p:cNvSpPr>
+            <a:spLocks noGrp="1"/>
+          </p:cNvSpPr>
+          <p:nvPr>
+            <p:ph type="body" idx="1"/>
+          </p:nvPr>
+        </p:nvSpPr>
+        <p:spPr/>
+        <p:txBody>
+          <a:bodyPr/>
+          <a:lstStyle/>
+          <a:p>
+            <a:r>
+              <a:rPr lang="en-US" dirty="0"/>
+              <a:t>Key intuition: it's the difference between H and V that's new, not the polarizations themselves. Keep it conceptual.</a:t>
+            </a:r>
+          </a:p>
+        </p:txBody>
+      </p:sp>
+      <p:sp>
+        <p:nvSpPr>
+          <p:cNvPr id="4" name="Slide Number Placeholder 3"/>
+          <p:cNvSpPr>
+            <a:spLocks noGrp="1"/>
+          </p:cNvSpPr>
+          <p:nvPr>
+            <p:ph type="sldNum" sz="quarter" idx="10"/>
+          </p:nvPr>
+        </p:nvSpPr>
+        <p:spPr/>
+        <p:txBody>
+          <a:bodyPr/>
+          <a:lstStyle/>
+          <a:p>
+            <a:fld id="{F7021451-1387-4CA6-816F-3879F97B5CBC}" type="slidenum">
+              <a:rPr lang="en-US"/>
+              <a:t>28</a:t>
+            </a:fld>
+            <a:endParaRPr lang="en-US"/>
+          </a:p>
+        </p:txBody>
+      </p:sp>
+    </p:spTree>
+    <p:extLst>
+      <p:ext uri="{BB962C8B-B14F-4D97-AF65-F5344CB8AC3E}">
+        <p14:creationId xmlns:p14="http://schemas.microsoft.com/office/powerpoint/2010/main" val="1024086991"/>
+      </p:ext>
+    </p:extLst>
+  </p:cSld>
+  <p:clrMapOvr>
+    <a:masterClrMapping/>
+  </p:clrMapOvr>
+</p:notes>
+</file>
+
+<file path=ppt/notesSlides/notesSlide29.xml><?xml version="1.0" encoding="utf-8"?>
+<p:notes xmlns:a="http://schemas.openxmlformats.org/drawingml/2006/main" xmlns:r="http://schemas.openxmlformats.org/officeDocument/2006/relationships" xmlns:p="http://schemas.openxmlformats.org/presentationml/2006/main">
+  <p:cSld>
+    <p:spTree>
+      <p:nvGrpSpPr>
+        <p:cNvPr id="1" name=""/>
+        <p:cNvGrpSpPr/>
+        <p:nvPr/>
+      </p:nvGrpSpPr>
+      <p:grpSpPr>
+        <a:xfrm>
+          <a:off x="0" y="0"/>
+          <a:ext cx="0" cy="0"/>
+          <a:chOff x="0" y="0"/>
+          <a:chExt cx="0" cy="0"/>
+        </a:xfrm>
+      </p:grpSpPr>
+      <p:sp>
+        <p:nvSpPr>
+          <p:cNvPr id="2" name="Slide Image Placeholder 1"/>
+          <p:cNvSpPr>
+            <a:spLocks noGrp="1" noRot="1" noChangeAspect="1"/>
+          </p:cNvSpPr>
+          <p:nvPr>
+            <p:ph type="sldImg"/>
+          </p:nvPr>
+        </p:nvSpPr>
+        <p:spPr/>
+      </p:sp>
+      <p:sp>
+        <p:nvSpPr>
+          <p:cNvPr id="3" name="Notes Placeholder 2"/>
+          <p:cNvSpPr>
+            <a:spLocks noGrp="1"/>
+          </p:cNvSpPr>
+          <p:nvPr>
+            <p:ph type="body" idx="1"/>
+          </p:nvPr>
+        </p:nvSpPr>
+        <p:spPr/>
+        <p:txBody>
+          <a:bodyPr/>
+          <a:lstStyle/>
+          <a:p>
+            <a:r>
+              <a:rPr lang="en-US" dirty="0"/>
+              <a:t>The spine of the block. ZDR is shape, rho-hv is purity, KDP is the phase-based rain rate that pays off Block 4's attenuation.</a:t>
+            </a:r>
+          </a:p>
+        </p:txBody>
+      </p:sp>
+      <p:sp>
+        <p:nvSpPr>
+          <p:cNvPr id="4" name="Slide Number Placeholder 3"/>
+          <p:cNvSpPr>
+            <a:spLocks noGrp="1"/>
+          </p:cNvSpPr>
+          <p:nvPr>
+            <p:ph type="sldNum" sz="quarter" idx="10"/>
+          </p:nvPr>
+        </p:nvSpPr>
+        <p:spPr/>
+        <p:txBody>
+          <a:bodyPr/>
+          <a:lstStyle/>
+          <a:p>
+            <a:fld id="{F7021451-1387-4CA6-816F-3879F97B5CBC}" type="slidenum">
+              <a:rPr lang="en-US"/>
+              <a:t>29</a:t>
+            </a:fld>
+            <a:endParaRPr lang="en-US"/>
+          </a:p>
+        </p:txBody>
+      </p:sp>
+    </p:spTree>
+    <p:extLst>
+      <p:ext uri="{BB962C8B-B14F-4D97-AF65-F5344CB8AC3E}">
+        <p14:creationId xmlns:p14="http://schemas.microsoft.com/office/powerpoint/2010/main" val="1024086991"/>
+      </p:ext>
+    </p:extLst>
+  </p:cSld>
+  <p:clrMapOvr>
+    <a:masterClrMapping/>
+  </p:clrMapOvr>
+</p:notes>
+</file>
+
 <file path=ppt/notesSlides/notesSlide3.xml><?xml version="1.0" encoding="utf-8"?>
 <p:notes xmlns:a="http://schemas.openxmlformats.org/drawingml/2006/main" xmlns:r="http://schemas.openxmlformats.org/officeDocument/2006/relationships" xmlns:p="http://schemas.openxmlformats.org/presentationml/2006/main">
   <p:cSld>
@@ -1993,6 +2320,291 @@
     <p:extLst>
       <p:ext uri="{BB962C8B-B14F-4D97-AF65-F5344CB8AC3E}">
         <p14:creationId xmlns:p14="http://schemas.microsoft.com/office/powerpoint/2010/main" val="1024086991"/>
+      </p:ext>
+    </p:extLst>
+  </p:cSld>
+  <p:clrMapOvr>
+    <a:masterClrMapping/>
+  </p:clrMapOvr>
+</p:notes>
+</file>
+
+<file path=ppt/notesSlides/notesSlide30.xml><?xml version="1.0" encoding="utf-8"?>
+<p:notes xmlns:a="http://schemas.openxmlformats.org/drawingml/2006/main" xmlns:r="http://schemas.openxmlformats.org/officeDocument/2006/relationships" xmlns:p="http://schemas.openxmlformats.org/presentationml/2006/main">
+  <p:cSld>
+    <p:spTree>
+      <p:nvGrpSpPr>
+        <p:cNvPr id="1" name=""/>
+        <p:cNvGrpSpPr/>
+        <p:nvPr/>
+      </p:nvGrpSpPr>
+      <p:grpSpPr>
+        <a:xfrm>
+          <a:off x="0" y="0"/>
+          <a:ext cx="0" cy="0"/>
+          <a:chOff x="0" y="0"/>
+          <a:chExt cx="0" cy="0"/>
+        </a:xfrm>
+      </p:grpSpPr>
+      <p:sp>
+        <p:nvSpPr>
+          <p:cNvPr id="2" name="Slide Image Placeholder 1"/>
+          <p:cNvSpPr>
+            <a:spLocks noGrp="1" noRot="1" noChangeAspect="1"/>
+          </p:cNvSpPr>
+          <p:nvPr>
+            <p:ph type="sldImg"/>
+          </p:nvPr>
+        </p:nvSpPr>
+        <p:spPr/>
+      </p:sp>
+      <p:sp>
+        <p:nvSpPr>
+          <p:cNvPr id="3" name="Notes Placeholder 2"/>
+          <p:cNvSpPr>
+            <a:spLocks noGrp="1"/>
+          </p:cNvSpPr>
+          <p:nvPr>
+            <p:ph type="body" idx="1"/>
+          </p:nvPr>
+        </p:nvSpPr>
+        <p:spPr/>
+        <p:txBody>
+          <a:bodyPr/>
+          <a:lstStyle/>
+          <a:p>
+            <a:r>
+              <a:rPr lang="en-US" dirty="0"/>
+              <a:t>Why it matters, in three payoffs: classification, quality control, and quantitative rainfall. The last one ties straight back to Block 4.</a:t>
+            </a:r>
+          </a:p>
+        </p:txBody>
+      </p:sp>
+      <p:sp>
+        <p:nvSpPr>
+          <p:cNvPr id="4" name="Slide Number Placeholder 3"/>
+          <p:cNvSpPr>
+            <a:spLocks noGrp="1"/>
+          </p:cNvSpPr>
+          <p:nvPr>
+            <p:ph type="sldNum" sz="quarter" idx="10"/>
+          </p:nvPr>
+        </p:nvSpPr>
+        <p:spPr/>
+        <p:txBody>
+          <a:bodyPr/>
+          <a:lstStyle/>
+          <a:p>
+            <a:fld id="{F7021451-1387-4CA6-816F-3879F97B5CBC}" type="slidenum">
+              <a:rPr lang="en-US"/>
+              <a:t>30</a:t>
+            </a:fld>
+            <a:endParaRPr lang="en-US"/>
+          </a:p>
+        </p:txBody>
+      </p:sp>
+    </p:spTree>
+    <p:extLst>
+      <p:ext uri="{BB962C8B-B14F-4D97-AF65-F5344CB8AC3E}">
+        <p14:creationId xmlns:p14="http://schemas.microsoft.com/office/powerpoint/2010/main" val="1024086991"/>
+      </p:ext>
+    </p:extLst>
+  </p:cSld>
+  <p:clrMapOvr>
+    <a:masterClrMapping/>
+  </p:clrMapOvr>
+</p:notes>
+</file>
+
+<file path=ppt/notesSlides/notesSlide31.xml><?xml version="1.0" encoding="utf-8"?>
+<p:notes xmlns:a="http://schemas.openxmlformats.org/drawingml/2006/main" xmlns:r="http://schemas.openxmlformats.org/officeDocument/2006/relationships" xmlns:p="http://schemas.openxmlformats.org/presentationml/2006/main">
+  <p:cSld>
+    <p:spTree>
+      <p:nvGrpSpPr>
+        <p:cNvPr id="1" name=""/>
+        <p:cNvGrpSpPr/>
+        <p:nvPr/>
+      </p:nvGrpSpPr>
+      <p:grpSpPr>
+        <a:xfrm>
+          <a:off x="0" y="0"/>
+          <a:ext cx="0" cy="0"/>
+          <a:chOff x="0" y="0"/>
+          <a:chExt cx="0" cy="0"/>
+        </a:xfrm>
+      </p:grpSpPr>
+      <p:sp>
+        <p:nvSpPr>
+          <p:cNvPr id="2" name="Slide Image Placeholder 1"/>
+          <p:cNvSpPr>
+            <a:spLocks noGrp="1" noRot="1" noChangeAspect="1"/>
+          </p:cNvSpPr>
+          <p:nvPr>
+            <p:ph type="sldImg"/>
+          </p:nvPr>
+        </p:nvSpPr>
+        <p:spPr/>
+      </p:sp>
+      <p:sp>
+        <p:nvSpPr>
+          <p:cNvPr id="3" name="Notes Placeholder 2"/>
+          <p:cNvSpPr>
+            <a:spLocks noGrp="1"/>
+          </p:cNvSpPr>
+          <p:nvPr>
+            <p:ph type="body" idx="1"/>
+          </p:nvPr>
+        </p:nvSpPr>
+        <p:spPr/>
+        <p:txBody>
+          <a:bodyPr/>
+          <a:lstStyle/>
+          <a:p>
+            <a:r>
+              <a:rPr lang="en-US" dirty="0"/>
+              <a:t>Hand off to the notebook. Note this is the take-home bonus block — best worked at your own pace after the live session.</a:t>
+            </a:r>
+          </a:p>
+        </p:txBody>
+      </p:sp>
+      <p:sp>
+        <p:nvSpPr>
+          <p:cNvPr id="4" name="Slide Number Placeholder 3"/>
+          <p:cNvSpPr>
+            <a:spLocks noGrp="1"/>
+          </p:cNvSpPr>
+          <p:nvPr>
+            <p:ph type="sldNum" sz="quarter" idx="10"/>
+          </p:nvPr>
+        </p:nvSpPr>
+        <p:spPr/>
+        <p:txBody>
+          <a:bodyPr/>
+          <a:lstStyle/>
+          <a:p>
+            <a:fld id="{F7021451-1387-4CA6-816F-3879F97B5CBC}" type="slidenum">
+              <a:rPr lang="en-US"/>
+              <a:t>31</a:t>
+            </a:fld>
+            <a:endParaRPr lang="en-US"/>
+          </a:p>
+        </p:txBody>
+      </p:sp>
+    </p:spTree>
+    <p:extLst>
+      <p:ext uri="{BB962C8B-B14F-4D97-AF65-F5344CB8AC3E}">
+        <p14:creationId xmlns:p14="http://schemas.microsoft.com/office/powerpoint/2010/main" val="1024086991"/>
+      </p:ext>
+    </p:extLst>
+  </p:cSld>
+  <p:clrMapOvr>
+    <a:masterClrMapping/>
+  </p:clrMapOvr>
+</p:notes>
+</file>
+
+<file path=ppt/notesSlides/notesSlide32.xml><?xml version="1.0" encoding="utf-8"?>
+<p:notes xmlns:a="http://schemas.openxmlformats.org/drawingml/2006/main" xmlns:r="http://schemas.openxmlformats.org/officeDocument/2006/relationships" xmlns:p="http://schemas.openxmlformats.org/presentationml/2006/main">
+  <p:cSld>
+    <p:spTree>
+      <p:nvGrpSpPr>
+        <p:cNvPr id="1" name="">
+          <a:extLst>
+            <a:ext uri="{FF2B5EF4-FFF2-40B4-BE49-F238E27FC236}">
+              <a16:creationId xmlns:a16="http://schemas.microsoft.com/office/drawing/2014/main" id="{503573E2-4777-D408-0E78-46BBA13D232E}"/>
+            </a:ext>
+          </a:extLst>
+        </p:cNvPr>
+        <p:cNvGrpSpPr/>
+        <p:nvPr/>
+      </p:nvGrpSpPr>
+      <p:grpSpPr>
+        <a:xfrm>
+          <a:off x="0" y="0"/>
+          <a:ext cx="0" cy="0"/>
+          <a:chOff x="0" y="0"/>
+          <a:chExt cx="0" cy="0"/>
+        </a:xfrm>
+      </p:grpSpPr>
+      <p:sp>
+        <p:nvSpPr>
+          <p:cNvPr id="2" name="Slide Image Placeholder 1">
+            <a:extLst>
+              <a:ext uri="{FF2B5EF4-FFF2-40B4-BE49-F238E27FC236}">
+                <a16:creationId xmlns:a16="http://schemas.microsoft.com/office/drawing/2014/main" id="{AFC429D3-05BF-679A-3E5F-602D981851E8}"/>
+              </a:ext>
+            </a:extLst>
+          </p:cNvPr>
+          <p:cNvSpPr>
+            <a:spLocks noGrp="1" noRot="1" noChangeAspect="1"/>
+          </p:cNvSpPr>
+          <p:nvPr>
+            <p:ph type="sldImg"/>
+          </p:nvPr>
+        </p:nvSpPr>
+        <p:spPr/>
+      </p:sp>
+      <p:sp>
+        <p:nvSpPr>
+          <p:cNvPr id="3" name="Notes Placeholder 2">
+            <a:extLst>
+              <a:ext uri="{FF2B5EF4-FFF2-40B4-BE49-F238E27FC236}">
+                <a16:creationId xmlns:a16="http://schemas.microsoft.com/office/drawing/2014/main" id="{705B03DB-28A4-07A8-7987-AB8AE5460A10}"/>
+              </a:ext>
+            </a:extLst>
+          </p:cNvPr>
+          <p:cNvSpPr>
+            <a:spLocks noGrp="1"/>
+          </p:cNvSpPr>
+          <p:nvPr>
+            <p:ph type="body" idx="1"/>
+          </p:nvPr>
+        </p:nvSpPr>
+        <p:spPr/>
+        <p:txBody>
+          <a:bodyPr/>
+          <a:lstStyle/>
+          <a:p>
+            <a:r>
+              <a:rPr lang="en-US" dirty="0"/>
+              <a:t>Hand off to the notebook. Remind them to run the install and setup cells once, then work the widgets in order.</a:t>
+            </a:r>
+          </a:p>
+        </p:txBody>
+      </p:sp>
+      <p:sp>
+        <p:nvSpPr>
+          <p:cNvPr id="4" name="Slide Number Placeholder 3">
+            <a:extLst>
+              <a:ext uri="{FF2B5EF4-FFF2-40B4-BE49-F238E27FC236}">
+                <a16:creationId xmlns:a16="http://schemas.microsoft.com/office/drawing/2014/main" id="{BBEF7B6F-6B16-C8D8-2FC4-22AC27C71B23}"/>
+              </a:ext>
+            </a:extLst>
+          </p:cNvPr>
+          <p:cNvSpPr>
+            <a:spLocks noGrp="1"/>
+          </p:cNvSpPr>
+          <p:nvPr>
+            <p:ph type="sldNum" sz="quarter" idx="10"/>
+          </p:nvPr>
+        </p:nvSpPr>
+        <p:spPr/>
+        <p:txBody>
+          <a:bodyPr/>
+          <a:lstStyle/>
+          <a:p>
+            <a:fld id="{F7021451-1387-4CA6-816F-3879F97B5CBC}" type="slidenum">
+              <a:rPr lang="en-US"/>
+              <a:t>32</a:t>
+            </a:fld>
+            <a:endParaRPr lang="en-US"/>
+          </a:p>
+        </p:txBody>
+      </p:sp>
+    </p:spTree>
+    <p:extLst>
+      <p:ext uri="{BB962C8B-B14F-4D97-AF65-F5344CB8AC3E}">
+        <p14:creationId xmlns:p14="http://schemas.microsoft.com/office/powerpoint/2010/main" val="1886762170"/>
       </p:ext>
     </p:extLst>
   </p:cSld>
@@ -2880,6 +3492,13 @@
           </a:solidFill>
           <a:ln/>
         </p:spPr>
+        <p:txBody>
+          <a:bodyPr/>
+          <a:lstStyle/>
+          <a:p>
+            <a:endParaRPr lang="en-US"/>
+          </a:p>
+        </p:txBody>
       </p:sp>
       <p:pic>
         <p:nvPicPr>
@@ -3113,6 +3732,13 @@
           </a:solidFill>
           <a:ln/>
         </p:spPr>
+        <p:txBody>
+          <a:bodyPr/>
+          <a:lstStyle/>
+          <a:p>
+            <a:endParaRPr lang="en-US"/>
+          </a:p>
+        </p:txBody>
       </p:sp>
       <p:pic>
         <p:nvPicPr>
@@ -3205,6 +3831,13 @@
             </a:outerShdw>
           </a:effectLst>
         </p:spPr>
+        <p:txBody>
+          <a:bodyPr/>
+          <a:lstStyle/>
+          <a:p>
+            <a:endParaRPr lang="en-US"/>
+          </a:p>
+        </p:txBody>
       </p:sp>
       <p:sp>
         <p:nvSpPr>
@@ -3225,6 +3858,13 @@
           </a:solidFill>
           <a:ln/>
         </p:spPr>
+        <p:txBody>
+          <a:bodyPr/>
+          <a:lstStyle/>
+          <a:p>
+            <a:endParaRPr lang="en-US"/>
+          </a:p>
+        </p:txBody>
       </p:sp>
       <p:pic>
         <p:nvPicPr>
@@ -3356,6 +3996,13 @@
             </a:outerShdw>
           </a:effectLst>
         </p:spPr>
+        <p:txBody>
+          <a:bodyPr/>
+          <a:lstStyle/>
+          <a:p>
+            <a:endParaRPr lang="en-US"/>
+          </a:p>
+        </p:txBody>
       </p:sp>
       <p:sp>
         <p:nvSpPr>
@@ -3376,6 +4023,13 @@
           </a:solidFill>
           <a:ln/>
         </p:spPr>
+        <p:txBody>
+          <a:bodyPr/>
+          <a:lstStyle/>
+          <a:p>
+            <a:endParaRPr lang="en-US"/>
+          </a:p>
+        </p:txBody>
       </p:sp>
       <p:pic>
         <p:nvPicPr>
@@ -3507,6 +4161,13 @@
             </a:outerShdw>
           </a:effectLst>
         </p:spPr>
+        <p:txBody>
+          <a:bodyPr/>
+          <a:lstStyle/>
+          <a:p>
+            <a:endParaRPr lang="en-US"/>
+          </a:p>
+        </p:txBody>
       </p:sp>
       <p:sp>
         <p:nvSpPr>
@@ -3684,6 +4345,13 @@
           </a:solidFill>
           <a:ln/>
         </p:spPr>
+        <p:txBody>
+          <a:bodyPr/>
+          <a:lstStyle/>
+          <a:p>
+            <a:endParaRPr lang="en-US"/>
+          </a:p>
+        </p:txBody>
       </p:sp>
       <p:pic>
         <p:nvPicPr>
@@ -3776,6 +4444,13 @@
             </a:outerShdw>
           </a:effectLst>
         </p:spPr>
+        <p:txBody>
+          <a:bodyPr/>
+          <a:lstStyle/>
+          <a:p>
+            <a:endParaRPr lang="en-US"/>
+          </a:p>
+        </p:txBody>
       </p:sp>
       <p:sp>
         <p:nvSpPr>
@@ -3929,6 +4604,13 @@
             </a:outerShdw>
           </a:effectLst>
         </p:spPr>
+        <p:txBody>
+          <a:bodyPr/>
+          <a:lstStyle/>
+          <a:p>
+            <a:endParaRPr lang="en-US"/>
+          </a:p>
+        </p:txBody>
       </p:sp>
       <p:sp>
         <p:nvSpPr>
@@ -4082,6 +4764,13 @@
             </a:outerShdw>
           </a:effectLst>
         </p:spPr>
+        <p:txBody>
+          <a:bodyPr/>
+          <a:lstStyle/>
+          <a:p>
+            <a:endParaRPr lang="en-US"/>
+          </a:p>
+        </p:txBody>
       </p:sp>
       <p:sp>
         <p:nvSpPr>
@@ -4174,6 +4863,13 @@
           </a:solidFill>
           <a:ln/>
         </p:spPr>
+        <p:txBody>
+          <a:bodyPr/>
+          <a:lstStyle/>
+          <a:p>
+            <a:endParaRPr lang="en-US"/>
+          </a:p>
+        </p:txBody>
       </p:sp>
       <p:pic>
         <p:nvPicPr>
@@ -4266,6 +4962,13 @@
             </a:outerShdw>
           </a:effectLst>
         </p:spPr>
+        <p:txBody>
+          <a:bodyPr/>
+          <a:lstStyle/>
+          <a:p>
+            <a:endParaRPr lang="en-US"/>
+          </a:p>
+        </p:txBody>
       </p:sp>
       <p:sp>
         <p:nvSpPr>
@@ -4286,6 +4989,13 @@
           </a:solidFill>
           <a:ln/>
         </p:spPr>
+        <p:txBody>
+          <a:bodyPr/>
+          <a:lstStyle/>
+          <a:p>
+            <a:endParaRPr lang="en-US"/>
+          </a:p>
+        </p:txBody>
       </p:sp>
       <p:pic>
         <p:nvPicPr>
@@ -4417,6 +5127,13 @@
             </a:outerShdw>
           </a:effectLst>
         </p:spPr>
+        <p:txBody>
+          <a:bodyPr/>
+          <a:lstStyle/>
+          <a:p>
+            <a:endParaRPr lang="en-US"/>
+          </a:p>
+        </p:txBody>
       </p:sp>
       <p:sp>
         <p:nvSpPr>
@@ -4437,6 +5154,13 @@
           </a:solidFill>
           <a:ln/>
         </p:spPr>
+        <p:txBody>
+          <a:bodyPr/>
+          <a:lstStyle/>
+          <a:p>
+            <a:endParaRPr lang="en-US"/>
+          </a:p>
+        </p:txBody>
       </p:sp>
       <p:pic>
         <p:nvPicPr>
@@ -4568,6 +5292,13 @@
             </a:outerShdw>
           </a:effectLst>
         </p:spPr>
+        <p:txBody>
+          <a:bodyPr/>
+          <a:lstStyle/>
+          <a:p>
+            <a:endParaRPr lang="en-US"/>
+          </a:p>
+        </p:txBody>
       </p:sp>
       <p:sp>
         <p:nvSpPr>
@@ -4699,6 +5430,13 @@
           </a:solidFill>
           <a:ln/>
         </p:spPr>
+        <p:txBody>
+          <a:bodyPr/>
+          <a:lstStyle/>
+          <a:p>
+            <a:endParaRPr lang="en-US"/>
+          </a:p>
+        </p:txBody>
       </p:sp>
       <p:pic>
         <p:nvPicPr>
@@ -4791,6 +5529,13 @@
             </a:outerShdw>
           </a:effectLst>
         </p:spPr>
+        <p:txBody>
+          <a:bodyPr/>
+          <a:lstStyle/>
+          <a:p>
+            <a:endParaRPr lang="en-US"/>
+          </a:p>
+        </p:txBody>
       </p:sp>
       <p:sp>
         <p:nvSpPr>
@@ -4811,6 +5556,13 @@
           </a:solidFill>
           <a:ln/>
         </p:spPr>
+        <p:txBody>
+          <a:bodyPr/>
+          <a:lstStyle/>
+          <a:p>
+            <a:endParaRPr lang="en-US"/>
+          </a:p>
+        </p:txBody>
       </p:sp>
       <p:pic>
         <p:nvPicPr>
@@ -4942,6 +5694,13 @@
             </a:outerShdw>
           </a:effectLst>
         </p:spPr>
+        <p:txBody>
+          <a:bodyPr/>
+          <a:lstStyle/>
+          <a:p>
+            <a:endParaRPr lang="en-US"/>
+          </a:p>
+        </p:txBody>
       </p:sp>
       <p:sp>
         <p:nvSpPr>
@@ -4962,6 +5721,13 @@
           </a:solidFill>
           <a:ln/>
         </p:spPr>
+        <p:txBody>
+          <a:bodyPr/>
+          <a:lstStyle/>
+          <a:p>
+            <a:endParaRPr lang="en-US"/>
+          </a:p>
+        </p:txBody>
       </p:sp>
       <p:pic>
         <p:nvPicPr>
@@ -5093,6 +5859,13 @@
             </a:outerShdw>
           </a:effectLst>
         </p:spPr>
+        <p:txBody>
+          <a:bodyPr/>
+          <a:lstStyle/>
+          <a:p>
+            <a:endParaRPr lang="en-US"/>
+          </a:p>
+        </p:txBody>
       </p:sp>
       <p:sp>
         <p:nvSpPr>
@@ -5113,6 +5886,13 @@
           </a:solidFill>
           <a:ln/>
         </p:spPr>
+        <p:txBody>
+          <a:bodyPr/>
+          <a:lstStyle/>
+          <a:p>
+            <a:endParaRPr lang="en-US"/>
+          </a:p>
+        </p:txBody>
       </p:sp>
       <p:pic>
         <p:nvPicPr>
@@ -5310,6 +6090,13 @@
             </a:outerShdw>
           </a:effectLst>
         </p:spPr>
+        <p:txBody>
+          <a:bodyPr/>
+          <a:lstStyle/>
+          <a:p>
+            <a:endParaRPr lang="en-US"/>
+          </a:p>
+        </p:txBody>
       </p:sp>
       <p:sp>
         <p:nvSpPr>
@@ -5330,6 +6117,13 @@
           </a:solidFill>
           <a:ln/>
         </p:spPr>
+        <p:txBody>
+          <a:bodyPr/>
+          <a:lstStyle/>
+          <a:p>
+            <a:endParaRPr lang="en-US"/>
+          </a:p>
+        </p:txBody>
       </p:sp>
       <p:pic>
         <p:nvPicPr>
@@ -5428,6 +6222,13 @@
             </a:outerShdw>
           </a:effectLst>
         </p:spPr>
+        <p:txBody>
+          <a:bodyPr/>
+          <a:lstStyle/>
+          <a:p>
+            <a:endParaRPr lang="en-US"/>
+          </a:p>
+        </p:txBody>
       </p:sp>
       <p:sp>
         <p:nvSpPr>
@@ -5454,6 +6255,13 @@
           </a:solidFill>
           <a:ln/>
         </p:spPr>
+        <p:txBody>
+          <a:bodyPr/>
+          <a:lstStyle/>
+          <a:p>
+            <a:endParaRPr lang="en-US"/>
+          </a:p>
+        </p:txBody>
       </p:sp>
       <p:pic>
         <p:nvPicPr>
@@ -5555,6 +6363,13 @@
           </a:solidFill>
           <a:ln/>
         </p:spPr>
+        <p:txBody>
+          <a:bodyPr/>
+          <a:lstStyle/>
+          <a:p>
+            <a:endParaRPr lang="en-US"/>
+          </a:p>
+        </p:txBody>
       </p:sp>
       <p:pic>
         <p:nvPicPr>
@@ -5682,6 +6497,13 @@
           </a:solidFill>
           <a:ln/>
         </p:spPr>
+        <p:txBody>
+          <a:bodyPr/>
+          <a:lstStyle/>
+          <a:p>
+            <a:endParaRPr lang="en-US"/>
+          </a:p>
+        </p:txBody>
       </p:sp>
       <p:pic>
         <p:nvPicPr>
@@ -5915,6 +6737,13 @@
           </a:solidFill>
           <a:ln/>
         </p:spPr>
+        <p:txBody>
+          <a:bodyPr/>
+          <a:lstStyle/>
+          <a:p>
+            <a:endParaRPr lang="en-US"/>
+          </a:p>
+        </p:txBody>
       </p:sp>
       <p:pic>
         <p:nvPicPr>
@@ -6007,6 +6836,13 @@
             </a:outerShdw>
           </a:effectLst>
         </p:spPr>
+        <p:txBody>
+          <a:bodyPr/>
+          <a:lstStyle/>
+          <a:p>
+            <a:endParaRPr lang="en-US"/>
+          </a:p>
+        </p:txBody>
       </p:sp>
       <p:sp>
         <p:nvSpPr>
@@ -6027,6 +6863,13 @@
           </a:solidFill>
           <a:ln/>
         </p:spPr>
+        <p:txBody>
+          <a:bodyPr/>
+          <a:lstStyle/>
+          <a:p>
+            <a:endParaRPr lang="en-US"/>
+          </a:p>
+        </p:txBody>
       </p:sp>
       <p:pic>
         <p:nvPicPr>
@@ -6158,6 +7001,13 @@
             </a:outerShdw>
           </a:effectLst>
         </p:spPr>
+        <p:txBody>
+          <a:bodyPr/>
+          <a:lstStyle/>
+          <a:p>
+            <a:endParaRPr lang="en-US"/>
+          </a:p>
+        </p:txBody>
       </p:sp>
       <p:sp>
         <p:nvSpPr>
@@ -6178,6 +7028,13 @@
           </a:solidFill>
           <a:ln/>
         </p:spPr>
+        <p:txBody>
+          <a:bodyPr/>
+          <a:lstStyle/>
+          <a:p>
+            <a:endParaRPr lang="en-US"/>
+          </a:p>
+        </p:txBody>
       </p:sp>
       <p:pic>
         <p:nvPicPr>
@@ -6309,6 +7166,13 @@
             </a:outerShdw>
           </a:effectLst>
         </p:spPr>
+        <p:txBody>
+          <a:bodyPr/>
+          <a:lstStyle/>
+          <a:p>
+            <a:endParaRPr lang="en-US"/>
+          </a:p>
+        </p:txBody>
       </p:sp>
       <p:sp>
         <p:nvSpPr>
@@ -6401,6 +7265,13 @@
           </a:solidFill>
           <a:ln/>
         </p:spPr>
+        <p:txBody>
+          <a:bodyPr/>
+          <a:lstStyle/>
+          <a:p>
+            <a:endParaRPr lang="en-US"/>
+          </a:p>
+        </p:txBody>
       </p:sp>
       <p:pic>
         <p:nvPicPr>
@@ -6493,6 +7364,13 @@
             </a:outerShdw>
           </a:effectLst>
         </p:spPr>
+        <p:txBody>
+          <a:bodyPr/>
+          <a:lstStyle/>
+          <a:p>
+            <a:endParaRPr lang="en-US"/>
+          </a:p>
+        </p:txBody>
       </p:sp>
       <p:sp>
         <p:nvSpPr>
@@ -6663,6 +7541,13 @@
           </a:solidFill>
           <a:ln/>
         </p:spPr>
+        <p:txBody>
+          <a:bodyPr/>
+          <a:lstStyle/>
+          <a:p>
+            <a:endParaRPr lang="en-US"/>
+          </a:p>
+        </p:txBody>
       </p:sp>
       <p:pic>
         <p:nvPicPr>
@@ -6755,6 +7640,13 @@
             </a:outerShdw>
           </a:effectLst>
         </p:spPr>
+        <p:txBody>
+          <a:bodyPr/>
+          <a:lstStyle/>
+          <a:p>
+            <a:endParaRPr lang="en-US"/>
+          </a:p>
+        </p:txBody>
       </p:sp>
       <p:sp>
         <p:nvSpPr>
@@ -6775,6 +7667,13 @@
           </a:solidFill>
           <a:ln/>
         </p:spPr>
+        <p:txBody>
+          <a:bodyPr/>
+          <a:lstStyle/>
+          <a:p>
+            <a:endParaRPr lang="en-US"/>
+          </a:p>
+        </p:txBody>
       </p:sp>
       <p:pic>
         <p:nvPicPr>
@@ -6906,6 +7805,13 @@
             </a:outerShdw>
           </a:effectLst>
         </p:spPr>
+        <p:txBody>
+          <a:bodyPr/>
+          <a:lstStyle/>
+          <a:p>
+            <a:endParaRPr lang="en-US"/>
+          </a:p>
+        </p:txBody>
       </p:sp>
       <p:sp>
         <p:nvSpPr>
@@ -6926,6 +7832,13 @@
           </a:solidFill>
           <a:ln/>
         </p:spPr>
+        <p:txBody>
+          <a:bodyPr/>
+          <a:lstStyle/>
+          <a:p>
+            <a:endParaRPr lang="en-US"/>
+          </a:p>
+        </p:txBody>
       </p:sp>
       <p:pic>
         <p:nvPicPr>
@@ -7057,6 +7970,13 @@
             </a:outerShdw>
           </a:effectLst>
         </p:spPr>
+        <p:txBody>
+          <a:bodyPr/>
+          <a:lstStyle/>
+          <a:p>
+            <a:endParaRPr lang="en-US"/>
+          </a:p>
+        </p:txBody>
       </p:sp>
       <p:sp>
         <p:nvSpPr>
@@ -7149,6 +8069,13 @@
           </a:solidFill>
           <a:ln/>
         </p:spPr>
+        <p:txBody>
+          <a:bodyPr/>
+          <a:lstStyle/>
+          <a:p>
+            <a:endParaRPr lang="en-US"/>
+          </a:p>
+        </p:txBody>
       </p:sp>
       <p:pic>
         <p:nvPicPr>
@@ -7241,6 +8168,13 @@
             </a:outerShdw>
           </a:effectLst>
         </p:spPr>
+        <p:txBody>
+          <a:bodyPr/>
+          <a:lstStyle/>
+          <a:p>
+            <a:endParaRPr lang="en-US"/>
+          </a:p>
+        </p:txBody>
       </p:sp>
       <p:sp>
         <p:nvSpPr>
@@ -7261,6 +8195,13 @@
           </a:solidFill>
           <a:ln/>
         </p:spPr>
+        <p:txBody>
+          <a:bodyPr/>
+          <a:lstStyle/>
+          <a:p>
+            <a:endParaRPr lang="en-US"/>
+          </a:p>
+        </p:txBody>
       </p:sp>
       <p:pic>
         <p:nvPicPr>
@@ -7392,6 +8333,13 @@
             </a:outerShdw>
           </a:effectLst>
         </p:spPr>
+        <p:txBody>
+          <a:bodyPr/>
+          <a:lstStyle/>
+          <a:p>
+            <a:endParaRPr lang="en-US"/>
+          </a:p>
+        </p:txBody>
       </p:sp>
       <p:sp>
         <p:nvSpPr>
@@ -7412,6 +8360,13 @@
           </a:solidFill>
           <a:ln/>
         </p:spPr>
+        <p:txBody>
+          <a:bodyPr/>
+          <a:lstStyle/>
+          <a:p>
+            <a:endParaRPr lang="en-US"/>
+          </a:p>
+        </p:txBody>
       </p:sp>
       <p:pic>
         <p:nvPicPr>
@@ -7543,6 +8498,13 @@
             </a:outerShdw>
           </a:effectLst>
         </p:spPr>
+        <p:txBody>
+          <a:bodyPr/>
+          <a:lstStyle/>
+          <a:p>
+            <a:endParaRPr lang="en-US"/>
+          </a:p>
+        </p:txBody>
       </p:sp>
       <p:sp>
         <p:nvSpPr>
@@ -7563,6 +8525,13 @@
           </a:solidFill>
           <a:ln/>
         </p:spPr>
+        <p:txBody>
+          <a:bodyPr/>
+          <a:lstStyle/>
+          <a:p>
+            <a:endParaRPr lang="en-US"/>
+          </a:p>
+        </p:txBody>
       </p:sp>
       <p:pic>
         <p:nvPicPr>
@@ -7654,15 +8623,7 @@
 
 <file path=ppt/slides/slide2.xml><?xml version="1.0" encoding="utf-8"?>
 <p:sld xmlns:a="http://schemas.openxmlformats.org/drawingml/2006/main" xmlns:r="http://schemas.openxmlformats.org/officeDocument/2006/relationships" xmlns:p="http://schemas.openxmlformats.org/presentationml/2006/main">
-  <p:cSld name="Slide 2">
-    <p:bg>
-      <p:bgPr>
-        <a:solidFill>
-          <a:srgbClr val="FFFFFF"/>
-        </a:solidFill>
-        <a:effectLst/>
-      </p:bgPr>
-    </p:bg>
+  <p:cSld>
     <p:spTree>
       <p:nvGrpSpPr>
         <p:cNvPr id="1" name=""/>
@@ -7696,6 +8657,13 @@
           </a:solidFill>
           <a:ln/>
         </p:spPr>
+        <p:txBody>
+          <a:bodyPr/>
+          <a:lstStyle/>
+          <a:p>
+            <a:endParaRPr lang="en-US"/>
+          </a:p>
+        </p:txBody>
       </p:sp>
       <p:pic>
         <p:nvPicPr>
@@ -7746,7 +8714,7 @@
               <a:buNone/>
             </a:pPr>
             <a:r>
-              <a:rPr lang="en-US" sz="2700" b="1" dirty="0">
+              <a:rPr lang="en-US" sz="2500" b="1" dirty="0">
                 <a:solidFill>
                   <a:srgbClr val="0E2A47"/>
                 </a:solidFill>
@@ -7754,9 +8722,9 @@
                 <a:ea typeface="Cambria" pitchFamily="34" charset="-122"/>
                 <a:cs typeface="Cambria" pitchFamily="34" charset="-120"/>
               </a:rPr>
-              <a:t>The four blocks: one measurement, end to end</a:t>
-            </a:r>
-            <a:endParaRPr lang="en-US" sz="2700" dirty="0"/>
+              <a:t>The five blocks: one measurement, end to end</a:t>
+            </a:r>
+            <a:endParaRPr lang="en-US" sz="2500" dirty="0"/>
           </a:p>
         </p:txBody>
       </p:sp>
@@ -7768,12 +8736,12 @@
         </p:nvSpPr>
         <p:spPr>
           <a:xfrm>
-            <a:off x="548640" y="1371600"/>
-            <a:ext cx="4023360" cy="1371600"/>
+            <a:off x="548640" y="1298448"/>
+            <a:ext cx="8046720" cy="530352"/>
           </a:xfrm>
           <a:prstGeom prst="roundRect">
             <a:avLst>
-              <a:gd name="adj" fmla="val 5333"/>
+              <a:gd name="adj" fmla="val 13793"/>
             </a:avLst>
           </a:prstGeom>
           <a:solidFill>
@@ -7788,6 +8756,13 @@
             </a:outerShdw>
           </a:effectLst>
         </p:spPr>
+        <p:txBody>
+          <a:bodyPr/>
+          <a:lstStyle/>
+          <a:p>
+            <a:endParaRPr lang="en-US"/>
+          </a:p>
+        </p:txBody>
       </p:sp>
       <p:sp>
         <p:nvSpPr>
@@ -7797,8 +8772,8 @@
         </p:nvSpPr>
         <p:spPr>
           <a:xfrm>
-            <a:off x="786384" y="1609344"/>
-            <a:ext cx="502920" cy="502920"/>
+            <a:off x="731520" y="1371600"/>
+            <a:ext cx="384048" cy="384048"/>
           </a:xfrm>
           <a:prstGeom prst="ellipse">
             <a:avLst/>
@@ -7808,6 +8783,13 @@
           </a:solidFill>
           <a:ln/>
         </p:spPr>
+        <p:txBody>
+          <a:bodyPr/>
+          <a:lstStyle/>
+          <a:p>
+            <a:endParaRPr lang="en-US"/>
+          </a:p>
+        </p:txBody>
       </p:sp>
       <p:pic>
         <p:nvPicPr>
@@ -7825,8 +8807,8 @@
         </p:blipFill>
         <p:spPr>
           <a:xfrm>
-            <a:off x="912114" y="1735074"/>
-            <a:ext cx="251460" cy="251460"/>
+            <a:off x="827532" y="1467612"/>
+            <a:ext cx="192024" cy="192024"/>
           </a:xfrm>
           <a:prstGeom prst="rect">
             <a:avLst/>
@@ -7841,8 +8823,8 @@
         </p:nvSpPr>
         <p:spPr>
           <a:xfrm>
-            <a:off x="1444752" y="1609344"/>
-            <a:ext cx="2926080" cy="502920"/>
+            <a:off x="1335024" y="1298448"/>
+            <a:ext cx="7132320" cy="530352"/>
           </a:xfrm>
           <a:prstGeom prst="rect">
             <a:avLst/>
@@ -7858,7 +8840,7 @@
               <a:buNone/>
             </a:pPr>
             <a:r>
-              <a:rPr lang="en-US" sz="1650" b="1" dirty="0">
+              <a:rPr lang="en-US" sz="1450" b="1" dirty="0">
                 <a:solidFill>
                   <a:srgbClr val="0E2A47"/>
                 </a:solidFill>
@@ -7866,36 +8848,8 @@
                 <a:ea typeface="Calibri" pitchFamily="34" charset="-122"/>
                 <a:cs typeface="Calibri" pitchFamily="34" charset="-120"/>
               </a:rPr>
-              <a:t>1 · The beam in space</a:t>
-            </a:r>
-            <a:endParaRPr lang="en-US" sz="1650" dirty="0"/>
-          </a:p>
-        </p:txBody>
-      </p:sp>
-      <p:sp>
-        <p:nvSpPr>
-          <p:cNvPr id="9" name="Text 5"/>
-          <p:cNvSpPr/>
-          <p:nvPr/>
-        </p:nvSpPr>
-        <p:spPr>
-          <a:xfrm>
-            <a:off x="804672" y="2212848"/>
-            <a:ext cx="3511296" cy="402336"/>
-          </a:xfrm>
-          <a:prstGeom prst="rect">
-            <a:avLst/>
-          </a:prstGeom>
-          <a:noFill/>
-          <a:ln/>
-        </p:spPr>
-        <p:txBody>
-          <a:bodyPr wrap="square" lIns="0" tIns="0" rIns="0" bIns="0" rtlCol="0" anchor="t"/>
-          <a:lstStyle/>
-          <a:p>
-            <a:pPr marL="0" indent="0">
-              <a:buNone/>
-            </a:pPr>
+              <a:t>1 · The beam in space    </a:t>
+            </a:r>
             <a:r>
               <a:rPr lang="en-US" sz="1250" dirty="0">
                 <a:solidFill>
@@ -7905,26 +8859,26 @@
                 <a:ea typeface="Calibri" pitchFamily="34" charset="-122"/>
                 <a:cs typeface="Calibri" pitchFamily="34" charset="-120"/>
               </a:rPr>
-              <a:t>Where the echo actually comes from — spread, height, bending, blockage.</a:t>
-            </a:r>
-            <a:endParaRPr lang="en-US" sz="1250" dirty="0"/>
-          </a:p>
-        </p:txBody>
-      </p:sp>
-      <p:sp>
-        <p:nvSpPr>
-          <p:cNvPr id="10" name="Shape 6"/>
-          <p:cNvSpPr/>
-          <p:nvPr/>
-        </p:nvSpPr>
-        <p:spPr>
-          <a:xfrm>
-            <a:off x="4572000" y="1371600"/>
-            <a:ext cx="4023360" cy="1371600"/>
+              <a:t>where the echo comes from — spread, height, bending, blockage</a:t>
+            </a:r>
+            <a:endParaRPr lang="en-US" sz="1450" dirty="0"/>
+          </a:p>
+        </p:txBody>
+      </p:sp>
+      <p:sp>
+        <p:nvSpPr>
+          <p:cNvPr id="9" name="Shape 5"/>
+          <p:cNvSpPr/>
+          <p:nvPr/>
+        </p:nvSpPr>
+        <p:spPr>
+          <a:xfrm>
+            <a:off x="548640" y="1901952"/>
+            <a:ext cx="8046720" cy="530352"/>
           </a:xfrm>
           <a:prstGeom prst="roundRect">
             <a:avLst>
-              <a:gd name="adj" fmla="val 5333"/>
+              <a:gd name="adj" fmla="val 13793"/>
             </a:avLst>
           </a:prstGeom>
           <a:solidFill>
@@ -7939,17 +8893,24 @@
             </a:outerShdw>
           </a:effectLst>
         </p:spPr>
-      </p:sp>
-      <p:sp>
-        <p:nvSpPr>
-          <p:cNvPr id="11" name="Shape 7"/>
-          <p:cNvSpPr/>
-          <p:nvPr/>
-        </p:nvSpPr>
-        <p:spPr>
-          <a:xfrm>
-            <a:off x="4809744" y="1609344"/>
-            <a:ext cx="502920" cy="502920"/>
+        <p:txBody>
+          <a:bodyPr/>
+          <a:lstStyle/>
+          <a:p>
+            <a:endParaRPr lang="en-US"/>
+          </a:p>
+        </p:txBody>
+      </p:sp>
+      <p:sp>
+        <p:nvSpPr>
+          <p:cNvPr id="10" name="Shape 6"/>
+          <p:cNvSpPr/>
+          <p:nvPr/>
+        </p:nvSpPr>
+        <p:spPr>
+          <a:xfrm>
+            <a:off x="731520" y="1975104"/>
+            <a:ext cx="384048" cy="384048"/>
           </a:xfrm>
           <a:prstGeom prst="ellipse">
             <a:avLst/>
@@ -7959,10 +8920,17 @@
           </a:solidFill>
           <a:ln/>
         </p:spPr>
+        <p:txBody>
+          <a:bodyPr/>
+          <a:lstStyle/>
+          <a:p>
+            <a:endParaRPr lang="en-US"/>
+          </a:p>
+        </p:txBody>
       </p:sp>
       <p:pic>
         <p:nvPicPr>
-          <p:cNvPr id="12" name="Image 2" descr="preencoded.png"/>
+          <p:cNvPr id="11" name="Image 2" descr="preencoded.png"/>
           <p:cNvPicPr>
             <a:picLocks noChangeAspect="1"/>
           </p:cNvPicPr>
@@ -7976,8 +8944,8 @@
         </p:blipFill>
         <p:spPr>
           <a:xfrm>
-            <a:off x="4935474" y="1735074"/>
-            <a:ext cx="251460" cy="251460"/>
+            <a:off x="827532" y="2071116"/>
+            <a:ext cx="192024" cy="192024"/>
           </a:xfrm>
           <a:prstGeom prst="rect">
             <a:avLst/>
@@ -7986,14 +8954,14 @@
       </p:pic>
       <p:sp>
         <p:nvSpPr>
-          <p:cNvPr id="13" name="Text 8"/>
-          <p:cNvSpPr/>
-          <p:nvPr/>
-        </p:nvSpPr>
-        <p:spPr>
-          <a:xfrm>
-            <a:off x="5468112" y="1609344"/>
-            <a:ext cx="2926080" cy="502920"/>
+          <p:cNvPr id="12" name="Text 7"/>
+          <p:cNvSpPr/>
+          <p:nvPr/>
+        </p:nvSpPr>
+        <p:spPr>
+          <a:xfrm>
+            <a:off x="1335024" y="1901952"/>
+            <a:ext cx="7132320" cy="530352"/>
           </a:xfrm>
           <a:prstGeom prst="rect">
             <a:avLst/>
@@ -8009,7 +8977,7 @@
               <a:buNone/>
             </a:pPr>
             <a:r>
-              <a:rPr lang="en-US" sz="1650" b="1" dirty="0">
+              <a:rPr lang="en-US" sz="1450" b="1" dirty="0">
                 <a:solidFill>
                   <a:srgbClr val="0E2A47"/>
                 </a:solidFill>
@@ -8017,36 +8985,8 @@
                 <a:ea typeface="Calibri" pitchFamily="34" charset="-122"/>
                 <a:cs typeface="Calibri" pitchFamily="34" charset="-120"/>
               </a:rPr>
-              <a:t>2 · One measurement</a:t>
-            </a:r>
-            <a:endParaRPr lang="en-US" sz="1650" dirty="0"/>
-          </a:p>
-        </p:txBody>
-      </p:sp>
-      <p:sp>
-        <p:nvSpPr>
-          <p:cNvPr id="14" name="Text 9"/>
-          <p:cNvSpPr/>
-          <p:nvPr/>
-        </p:nvSpPr>
-        <p:spPr>
-          <a:xfrm>
-            <a:off x="4828032" y="2212848"/>
-            <a:ext cx="3511296" cy="402336"/>
-          </a:xfrm>
-          <a:prstGeom prst="rect">
-            <a:avLst/>
-          </a:prstGeom>
-          <a:noFill/>
-          <a:ln/>
-        </p:spPr>
-        <p:txBody>
-          <a:bodyPr wrap="square" lIns="0" tIns="0" rIns="0" bIns="0" rtlCol="0" anchor="t"/>
-          <a:lstStyle/>
-          <a:p>
-            <a:pPr marL="0" indent="0">
-              <a:buNone/>
-            </a:pPr>
+              <a:t>2 · One measurement    </a:t>
+            </a:r>
             <a:r>
               <a:rPr lang="en-US" sz="1250" dirty="0">
                 <a:solidFill>
@@ -8056,26 +8996,26 @@
                 <a:ea typeface="Calibri" pitchFamily="34" charset="-122"/>
                 <a:cs typeface="Calibri" pitchFamily="34" charset="-120"/>
               </a:rPr>
-              <a:t>How big a single value is, and whether the radar can even detect it.</a:t>
-            </a:r>
-            <a:endParaRPr lang="en-US" sz="1250" dirty="0"/>
-          </a:p>
-        </p:txBody>
-      </p:sp>
-      <p:sp>
-        <p:nvSpPr>
-          <p:cNvPr id="15" name="Shape 10"/>
-          <p:cNvSpPr/>
-          <p:nvPr/>
-        </p:nvSpPr>
-        <p:spPr>
-          <a:xfrm>
-            <a:off x="548640" y="2907792"/>
-            <a:ext cx="4023360" cy="1371600"/>
+              <a:t>how big a value is, and whether it can be detected</a:t>
+            </a:r>
+            <a:endParaRPr lang="en-US" sz="1450" dirty="0"/>
+          </a:p>
+        </p:txBody>
+      </p:sp>
+      <p:sp>
+        <p:nvSpPr>
+          <p:cNvPr id="13" name="Shape 8"/>
+          <p:cNvSpPr/>
+          <p:nvPr/>
+        </p:nvSpPr>
+        <p:spPr>
+          <a:xfrm>
+            <a:off x="548640" y="2505456"/>
+            <a:ext cx="8046720" cy="530352"/>
           </a:xfrm>
           <a:prstGeom prst="roundRect">
             <a:avLst>
-              <a:gd name="adj" fmla="val 5333"/>
+              <a:gd name="adj" fmla="val 13793"/>
             </a:avLst>
           </a:prstGeom>
           <a:solidFill>
@@ -8090,17 +9030,24 @@
             </a:outerShdw>
           </a:effectLst>
         </p:spPr>
-      </p:sp>
-      <p:sp>
-        <p:nvSpPr>
-          <p:cNvPr id="16" name="Shape 11"/>
-          <p:cNvSpPr/>
-          <p:nvPr/>
-        </p:nvSpPr>
-        <p:spPr>
-          <a:xfrm>
-            <a:off x="786384" y="3145536"/>
-            <a:ext cx="502920" cy="502920"/>
+        <p:txBody>
+          <a:bodyPr/>
+          <a:lstStyle/>
+          <a:p>
+            <a:endParaRPr lang="en-US"/>
+          </a:p>
+        </p:txBody>
+      </p:sp>
+      <p:sp>
+        <p:nvSpPr>
+          <p:cNvPr id="14" name="Shape 9"/>
+          <p:cNvSpPr/>
+          <p:nvPr/>
+        </p:nvSpPr>
+        <p:spPr>
+          <a:xfrm>
+            <a:off x="731520" y="2578608"/>
+            <a:ext cx="384048" cy="384048"/>
           </a:xfrm>
           <a:prstGeom prst="ellipse">
             <a:avLst/>
@@ -8110,10 +9057,17 @@
           </a:solidFill>
           <a:ln/>
         </p:spPr>
+        <p:txBody>
+          <a:bodyPr/>
+          <a:lstStyle/>
+          <a:p>
+            <a:endParaRPr lang="en-US"/>
+          </a:p>
+        </p:txBody>
       </p:sp>
       <p:pic>
         <p:nvPicPr>
-          <p:cNvPr id="17" name="Image 3" descr="preencoded.png"/>
+          <p:cNvPr id="15" name="Image 3" descr="preencoded.png"/>
           <p:cNvPicPr>
             <a:picLocks noChangeAspect="1"/>
           </p:cNvPicPr>
@@ -8127,8 +9081,8 @@
         </p:blipFill>
         <p:spPr>
           <a:xfrm>
-            <a:off x="912114" y="3271266"/>
-            <a:ext cx="251460" cy="251460"/>
+            <a:off x="827532" y="2674620"/>
+            <a:ext cx="192024" cy="192024"/>
           </a:xfrm>
           <a:prstGeom prst="rect">
             <a:avLst/>
@@ -8137,14 +9091,14 @@
       </p:pic>
       <p:sp>
         <p:nvSpPr>
-          <p:cNvPr id="18" name="Text 12"/>
-          <p:cNvSpPr/>
-          <p:nvPr/>
-        </p:nvSpPr>
-        <p:spPr>
-          <a:xfrm>
-            <a:off x="1444752" y="3145536"/>
-            <a:ext cx="2926080" cy="502920"/>
+          <p:cNvPr id="16" name="Text 10"/>
+          <p:cNvSpPr/>
+          <p:nvPr/>
+        </p:nvSpPr>
+        <p:spPr>
+          <a:xfrm>
+            <a:off x="1335024" y="2505456"/>
+            <a:ext cx="7132320" cy="530352"/>
           </a:xfrm>
           <a:prstGeom prst="rect">
             <a:avLst/>
@@ -8160,7 +9114,7 @@
               <a:buNone/>
             </a:pPr>
             <a:r>
-              <a:rPr lang="en-US" sz="1650" b="1" dirty="0">
+              <a:rPr lang="en-US" sz="1450" b="1" dirty="0">
                 <a:solidFill>
                   <a:srgbClr val="0E2A47"/>
                 </a:solidFill>
@@ -8168,36 +9122,8 @@
                 <a:ea typeface="Calibri" pitchFamily="34" charset="-122"/>
                 <a:cs typeface="Calibri" pitchFamily="34" charset="-120"/>
               </a:rPr>
-              <a:t>3 · Range, velocity &amp; ambiguity</a:t>
-            </a:r>
-            <a:endParaRPr lang="en-US" sz="1650" dirty="0"/>
-          </a:p>
-        </p:txBody>
-      </p:sp>
-      <p:sp>
-        <p:nvSpPr>
-          <p:cNvPr id="19" name="Text 13"/>
-          <p:cNvSpPr/>
-          <p:nvPr/>
-        </p:nvSpPr>
-        <p:spPr>
-          <a:xfrm>
-            <a:off x="804672" y="3749040"/>
-            <a:ext cx="3511296" cy="402336"/>
-          </a:xfrm>
-          <a:prstGeom prst="rect">
-            <a:avLst/>
-          </a:prstGeom>
-          <a:noFill/>
-          <a:ln/>
-        </p:spPr>
-        <p:txBody>
-          <a:bodyPr wrap="square" lIns="0" tIns="0" rIns="0" bIns="0" rtlCol="0" anchor="t"/>
-          <a:lstStyle/>
-          <a:p>
-            <a:pPr marL="0" indent="0">
-              <a:buNone/>
-            </a:pPr>
+              <a:t>3 · Range, velocity &amp; ambiguity    </a:t>
+            </a:r>
             <a:r>
               <a:rPr lang="en-US" sz="1250" dirty="0">
                 <a:solidFill>
@@ -8207,26 +9133,26 @@
                 <a:ea typeface="Calibri" pitchFamily="34" charset="-122"/>
                 <a:cs typeface="Calibri" pitchFamily="34" charset="-120"/>
               </a:rPr>
-              <a:t>How far and how fast — and where the sampling breaks down.</a:t>
-            </a:r>
-            <a:endParaRPr lang="en-US" sz="1250" dirty="0"/>
-          </a:p>
-        </p:txBody>
-      </p:sp>
-      <p:sp>
-        <p:nvSpPr>
-          <p:cNvPr id="20" name="Shape 14"/>
-          <p:cNvSpPr/>
-          <p:nvPr/>
-        </p:nvSpPr>
-        <p:spPr>
-          <a:xfrm>
-            <a:off x="4572000" y="2907792"/>
-            <a:ext cx="4023360" cy="1371600"/>
+              <a:t>how far and how fast — and where the sampling breaks</a:t>
+            </a:r>
+            <a:endParaRPr lang="en-US" sz="1450" dirty="0"/>
+          </a:p>
+        </p:txBody>
+      </p:sp>
+      <p:sp>
+        <p:nvSpPr>
+          <p:cNvPr id="17" name="Shape 11"/>
+          <p:cNvSpPr/>
+          <p:nvPr/>
+        </p:nvSpPr>
+        <p:spPr>
+          <a:xfrm>
+            <a:off x="548640" y="3108960"/>
+            <a:ext cx="8046720" cy="530352"/>
           </a:xfrm>
           <a:prstGeom prst="roundRect">
             <a:avLst>
-              <a:gd name="adj" fmla="val 5333"/>
+              <a:gd name="adj" fmla="val 13793"/>
             </a:avLst>
           </a:prstGeom>
           <a:solidFill>
@@ -8241,17 +9167,24 @@
             </a:outerShdw>
           </a:effectLst>
         </p:spPr>
-      </p:sp>
-      <p:sp>
-        <p:nvSpPr>
-          <p:cNvPr id="21" name="Shape 15"/>
-          <p:cNvSpPr/>
-          <p:nvPr/>
-        </p:nvSpPr>
-        <p:spPr>
-          <a:xfrm>
-            <a:off x="4809744" y="3145536"/>
-            <a:ext cx="502920" cy="502920"/>
+        <p:txBody>
+          <a:bodyPr/>
+          <a:lstStyle/>
+          <a:p>
+            <a:endParaRPr lang="en-US"/>
+          </a:p>
+        </p:txBody>
+      </p:sp>
+      <p:sp>
+        <p:nvSpPr>
+          <p:cNvPr id="18" name="Shape 12"/>
+          <p:cNvSpPr/>
+          <p:nvPr/>
+        </p:nvSpPr>
+        <p:spPr>
+          <a:xfrm>
+            <a:off x="731520" y="3182112"/>
+            <a:ext cx="384048" cy="384048"/>
           </a:xfrm>
           <a:prstGeom prst="ellipse">
             <a:avLst/>
@@ -8261,10 +9194,17 @@
           </a:solidFill>
           <a:ln/>
         </p:spPr>
+        <p:txBody>
+          <a:bodyPr/>
+          <a:lstStyle/>
+          <a:p>
+            <a:endParaRPr lang="en-US"/>
+          </a:p>
+        </p:txBody>
       </p:sp>
       <p:pic>
         <p:nvPicPr>
-          <p:cNvPr id="22" name="Image 4" descr="preencoded.png"/>
+          <p:cNvPr id="19" name="Image 4" descr="preencoded.png"/>
           <p:cNvPicPr>
             <a:picLocks noChangeAspect="1"/>
           </p:cNvPicPr>
@@ -8278,8 +9218,8 @@
         </p:blipFill>
         <p:spPr>
           <a:xfrm>
-            <a:off x="4935474" y="3271266"/>
-            <a:ext cx="251460" cy="251460"/>
+            <a:off x="827532" y="3278124"/>
+            <a:ext cx="192024" cy="192024"/>
           </a:xfrm>
           <a:prstGeom prst="rect">
             <a:avLst/>
@@ -8288,14 +9228,14 @@
       </p:pic>
       <p:sp>
         <p:nvSpPr>
-          <p:cNvPr id="23" name="Text 16"/>
-          <p:cNvSpPr/>
-          <p:nvPr/>
-        </p:nvSpPr>
-        <p:spPr>
-          <a:xfrm>
-            <a:off x="5468112" y="3145536"/>
-            <a:ext cx="2926080" cy="502920"/>
+          <p:cNvPr id="20" name="Text 13"/>
+          <p:cNvSpPr/>
+          <p:nvPr/>
+        </p:nvSpPr>
+        <p:spPr>
+          <a:xfrm>
+            <a:off x="1335024" y="3108960"/>
+            <a:ext cx="7132320" cy="530352"/>
           </a:xfrm>
           <a:prstGeom prst="rect">
             <a:avLst/>
@@ -8311,7 +9251,7 @@
               <a:buNone/>
             </a:pPr>
             <a:r>
-              <a:rPr lang="en-US" sz="1650" b="1" dirty="0">
+              <a:rPr lang="en-US" sz="1450" b="1" dirty="0">
                 <a:solidFill>
                   <a:srgbClr val="0E2A47"/>
                 </a:solidFill>
@@ -8319,36 +9259,8 @@
                 <a:ea typeface="Calibri" pitchFamily="34" charset="-122"/>
                 <a:cs typeface="Calibri" pitchFamily="34" charset="-120"/>
               </a:rPr>
-              <a:t>4 · Wavelength, weather &amp; the scan</a:t>
-            </a:r>
-            <a:endParaRPr lang="en-US" sz="1650" dirty="0"/>
-          </a:p>
-        </p:txBody>
-      </p:sp>
-      <p:sp>
-        <p:nvSpPr>
-          <p:cNvPr id="24" name="Text 17"/>
-          <p:cNvSpPr/>
-          <p:nvPr/>
-        </p:nvSpPr>
-        <p:spPr>
-          <a:xfrm>
-            <a:off x="4828032" y="3749040"/>
-            <a:ext cx="3511296" cy="402336"/>
-          </a:xfrm>
-          <a:prstGeom prst="rect">
-            <a:avLst/>
-          </a:prstGeom>
-          <a:noFill/>
-          <a:ln/>
-        </p:spPr>
-        <p:txBody>
-          <a:bodyPr wrap="square" lIns="0" tIns="0" rIns="0" bIns="0" rtlCol="0" anchor="t"/>
-          <a:lstStyle/>
-          <a:p>
-            <a:pPr marL="0" indent="0">
-              <a:buNone/>
-            </a:pPr>
+              <a:t>4 · Wavelength, weather &amp; the scan    </a:t>
+            </a:r>
             <a:r>
               <a:rPr lang="en-US" sz="1250" dirty="0">
                 <a:solidFill>
@@ -8358,22 +9270,109 @@
                 <a:ea typeface="Calibri" pitchFamily="34" charset="-122"/>
                 <a:cs typeface="Calibri" pitchFamily="34" charset="-120"/>
               </a:rPr>
-              <a:t>What the wavelength decides, and how a volume is assembled.</a:t>
-            </a:r>
-            <a:endParaRPr lang="en-US" sz="1250" dirty="0"/>
-          </a:p>
-        </p:txBody>
-      </p:sp>
-      <p:sp>
-        <p:nvSpPr>
-          <p:cNvPr id="25" name="Text 18"/>
-          <p:cNvSpPr/>
-          <p:nvPr/>
-        </p:nvSpPr>
-        <p:spPr>
-          <a:xfrm>
-            <a:off x="548640" y="4480560"/>
-            <a:ext cx="8046720" cy="365760"/>
+              <a:t>what the wavelength decides; building a volume scan</a:t>
+            </a:r>
+            <a:endParaRPr lang="en-US" sz="1450" dirty="0"/>
+          </a:p>
+        </p:txBody>
+      </p:sp>
+      <p:sp>
+        <p:nvSpPr>
+          <p:cNvPr id="21" name="Shape 14"/>
+          <p:cNvSpPr/>
+          <p:nvPr/>
+        </p:nvSpPr>
+        <p:spPr>
+          <a:xfrm>
+            <a:off x="548640" y="3712464"/>
+            <a:ext cx="8046720" cy="530352"/>
+          </a:xfrm>
+          <a:prstGeom prst="roundRect">
+            <a:avLst>
+              <a:gd name="adj" fmla="val 13793"/>
+            </a:avLst>
+          </a:prstGeom>
+          <a:solidFill>
+            <a:srgbClr val="F2F7F9"/>
+          </a:solidFill>
+          <a:ln/>
+          <a:effectLst>
+            <a:outerShdw blurRad="88900" dist="38100" dir="5400000" algn="bl" rotWithShape="0">
+              <a:srgbClr val="1A2433">
+                <a:alpha val="16000"/>
+              </a:srgbClr>
+            </a:outerShdw>
+          </a:effectLst>
+        </p:spPr>
+        <p:txBody>
+          <a:bodyPr/>
+          <a:lstStyle/>
+          <a:p>
+            <a:endParaRPr lang="en-US"/>
+          </a:p>
+        </p:txBody>
+      </p:sp>
+      <p:sp>
+        <p:nvSpPr>
+          <p:cNvPr id="22" name="Shape 15"/>
+          <p:cNvSpPr/>
+          <p:nvPr/>
+        </p:nvSpPr>
+        <p:spPr>
+          <a:xfrm>
+            <a:off x="731520" y="3785616"/>
+            <a:ext cx="384048" cy="384048"/>
+          </a:xfrm>
+          <a:prstGeom prst="ellipse">
+            <a:avLst/>
+          </a:prstGeom>
+          <a:solidFill>
+            <a:srgbClr val="1D7293"/>
+          </a:solidFill>
+          <a:ln/>
+        </p:spPr>
+        <p:txBody>
+          <a:bodyPr/>
+          <a:lstStyle/>
+          <a:p>
+            <a:endParaRPr lang="en-US"/>
+          </a:p>
+        </p:txBody>
+      </p:sp>
+      <p:pic>
+        <p:nvPicPr>
+          <p:cNvPr id="23" name="Image 5" descr="preencoded.png"/>
+          <p:cNvPicPr>
+            <a:picLocks noChangeAspect="1"/>
+          </p:cNvPicPr>
+          <p:nvPr/>
+        </p:nvPicPr>
+        <p:blipFill>
+          <a:blip r:embed="rId7"/>
+          <a:stretch>
+            <a:fillRect/>
+          </a:stretch>
+        </p:blipFill>
+        <p:spPr>
+          <a:xfrm>
+            <a:off x="827532" y="3881628"/>
+            <a:ext cx="192024" cy="192024"/>
+          </a:xfrm>
+          <a:prstGeom prst="rect">
+            <a:avLst/>
+          </a:prstGeom>
+        </p:spPr>
+      </p:pic>
+      <p:sp>
+        <p:nvSpPr>
+          <p:cNvPr id="24" name="Text 16"/>
+          <p:cNvSpPr/>
+          <p:nvPr/>
+        </p:nvSpPr>
+        <p:spPr>
+          <a:xfrm>
+            <a:off x="1335024" y="3712464"/>
+            <a:ext cx="7132320" cy="530352"/>
           </a:xfrm>
           <a:prstGeom prst="rect">
             <a:avLst/>
@@ -8385,19 +9384,73 @@
           <a:bodyPr wrap="square" lIns="0" tIns="0" rIns="0" bIns="0" rtlCol="0" anchor="ctr"/>
           <a:lstStyle/>
           <a:p>
-            <a:pPr marL="0" indent="0" algn="ctr">
+            <a:pPr marL="0" indent="0">
               <a:buNone/>
             </a:pPr>
             <a:r>
-              <a:rPr lang="en-US" sz="1250" i="1" dirty="0">
-                <a:solidFill>
-                  <a:srgbClr val="5C6B7A"/>
+              <a:rPr lang="en-US" sz="1450" b="1" dirty="0">
+                <a:solidFill>
+                  <a:srgbClr val="0E2A47"/>
                 </a:solidFill>
                 <a:latin typeface="Calibri" pitchFamily="34" charset="0"/>
                 <a:ea typeface="Calibri" pitchFamily="34" charset="-122"/>
                 <a:cs typeface="Calibri" pitchFamily="34" charset="-120"/>
               </a:rPr>
-              <a:t>Each block: 3–4 slider widgets + a real-data case · questions at three levels (Basic · A little further · Going deeper).</a:t>
+              <a:t>5 · Two polarizations    </a:t>
+            </a:r>
+            <a:r>
+              <a:rPr lang="en-US" sz="1250" dirty="0">
+                <a:solidFill>
+                  <a:srgbClr val="5C6B7A"/>
+                </a:solidFill>
+                <a:latin typeface="Calibri" pitchFamily="34" charset="0"/>
+                <a:ea typeface="Calibri" pitchFamily="34" charset="-122"/>
+                <a:cs typeface="Calibri" pitchFamily="34" charset="-120"/>
+              </a:rPr>
+              <a:t>what the echo is made of — rain, hail, melting layer</a:t>
+            </a:r>
+            <a:endParaRPr lang="en-US" sz="1450" dirty="0">
+              <a:solidFill>
+                <a:srgbClr val="5C6B7A"/>
+              </a:solidFill>
+            </a:endParaRPr>
+          </a:p>
+        </p:txBody>
+      </p:sp>
+      <p:sp>
+        <p:nvSpPr>
+          <p:cNvPr id="25" name="Text 17"/>
+          <p:cNvSpPr/>
+          <p:nvPr/>
+        </p:nvSpPr>
+        <p:spPr>
+          <a:xfrm>
+            <a:off x="548640" y="4498848"/>
+            <a:ext cx="8046720" cy="365760"/>
+          </a:xfrm>
+          <a:prstGeom prst="rect">
+            <a:avLst/>
+          </a:prstGeom>
+          <a:noFill/>
+          <a:ln/>
+        </p:spPr>
+        <p:txBody>
+          <a:bodyPr wrap="square" lIns="0" tIns="0" rIns="0" bIns="0" rtlCol="0" anchor="ctr"/>
+          <a:lstStyle/>
+          <a:p>
+            <a:pPr marL="0" indent="0" algn="ctr">
+              <a:buNone/>
+            </a:pPr>
+            <a:r>
+              <a:rPr lang="en-US" sz="1250" i="1" dirty="0">
+                <a:solidFill>
+                  <a:srgbClr val="5C6B7A"/>
+                </a:solidFill>
+                <a:latin typeface="Calibri" pitchFamily="34" charset="0"/>
+                <a:ea typeface="Calibri" pitchFamily="34" charset="-122"/>
+                <a:cs typeface="Calibri" pitchFamily="34" charset="-120"/>
+              </a:rPr>
+              <a:t>Each block: 3–4 slider widgets + a real-data case · three depth levels (Basic · A little further · Going deeper).</a:t>
             </a:r>
             <a:endParaRPr lang="en-US" sz="1250" dirty="0"/>
           </a:p>
@@ -8519,6 +9572,13 @@
             </a:outerShdw>
           </a:effectLst>
         </p:spPr>
+        <p:txBody>
+          <a:bodyPr/>
+          <a:lstStyle/>
+          <a:p>
+            <a:endParaRPr lang="en-US"/>
+          </a:p>
+        </p:txBody>
       </p:sp>
       <p:sp>
         <p:nvSpPr>
@@ -8539,6 +9599,13 @@
           </a:solidFill>
           <a:ln/>
         </p:spPr>
+        <p:txBody>
+          <a:bodyPr/>
+          <a:lstStyle/>
+          <a:p>
+            <a:endParaRPr lang="en-US"/>
+          </a:p>
+        </p:txBody>
       </p:sp>
       <p:pic>
         <p:nvPicPr>
@@ -8637,6 +9704,13 @@
             </a:outerShdw>
           </a:effectLst>
         </p:spPr>
+        <p:txBody>
+          <a:bodyPr/>
+          <a:lstStyle/>
+          <a:p>
+            <a:endParaRPr lang="en-US"/>
+          </a:p>
+        </p:txBody>
       </p:sp>
       <p:sp>
         <p:nvSpPr>
@@ -8663,6 +9737,13 @@
           </a:solidFill>
           <a:ln/>
         </p:spPr>
+        <p:txBody>
+          <a:bodyPr/>
+          <a:lstStyle/>
+          <a:p>
+            <a:endParaRPr lang="en-US"/>
+          </a:p>
+        </p:txBody>
       </p:sp>
       <p:pic>
         <p:nvPicPr>
@@ -8764,6 +9845,13 @@
           </a:solidFill>
           <a:ln/>
         </p:spPr>
+        <p:txBody>
+          <a:bodyPr/>
+          <a:lstStyle/>
+          <a:p>
+            <a:endParaRPr lang="en-US"/>
+          </a:p>
+        </p:txBody>
       </p:sp>
       <p:pic>
         <p:nvPicPr>
@@ -8891,6 +9979,13 @@
           </a:solidFill>
           <a:ln/>
         </p:spPr>
+        <p:txBody>
+          <a:bodyPr/>
+          <a:lstStyle/>
+          <a:p>
+            <a:endParaRPr lang="en-US"/>
+          </a:p>
+        </p:txBody>
       </p:sp>
       <p:pic>
         <p:nvPicPr>
@@ -9124,6 +10219,13 @@
           </a:solidFill>
           <a:ln/>
         </p:spPr>
+        <p:txBody>
+          <a:bodyPr/>
+          <a:lstStyle/>
+          <a:p>
+            <a:endParaRPr lang="en-US"/>
+          </a:p>
+        </p:txBody>
       </p:sp>
       <p:pic>
         <p:nvPicPr>
@@ -9216,6 +10318,13 @@
             </a:outerShdw>
           </a:effectLst>
         </p:spPr>
+        <p:txBody>
+          <a:bodyPr/>
+          <a:lstStyle/>
+          <a:p>
+            <a:endParaRPr lang="en-US"/>
+          </a:p>
+        </p:txBody>
       </p:sp>
       <p:sp>
         <p:nvSpPr>
@@ -9369,6 +10478,13 @@
             </a:outerShdw>
           </a:effectLst>
         </p:spPr>
+        <p:txBody>
+          <a:bodyPr/>
+          <a:lstStyle/>
+          <a:p>
+            <a:endParaRPr lang="en-US"/>
+          </a:p>
+        </p:txBody>
       </p:sp>
       <p:sp>
         <p:nvSpPr>
@@ -9522,6 +10638,13 @@
             </a:outerShdw>
           </a:effectLst>
         </p:spPr>
+        <p:txBody>
+          <a:bodyPr/>
+          <a:lstStyle/>
+          <a:p>
+            <a:endParaRPr lang="en-US"/>
+          </a:p>
+        </p:txBody>
       </p:sp>
       <p:sp>
         <p:nvSpPr>
@@ -9738,6 +10861,13 @@
           </a:solidFill>
           <a:ln/>
         </p:spPr>
+        <p:txBody>
+          <a:bodyPr/>
+          <a:lstStyle/>
+          <a:p>
+            <a:endParaRPr lang="en-US"/>
+          </a:p>
+        </p:txBody>
       </p:sp>
       <p:pic>
         <p:nvPicPr>
@@ -9830,6 +10960,13 @@
             </a:outerShdw>
           </a:effectLst>
         </p:spPr>
+        <p:txBody>
+          <a:bodyPr/>
+          <a:lstStyle/>
+          <a:p>
+            <a:endParaRPr lang="en-US"/>
+          </a:p>
+        </p:txBody>
       </p:sp>
       <p:sp>
         <p:nvSpPr>
@@ -9850,6 +10987,13 @@
           </a:solidFill>
           <a:ln/>
         </p:spPr>
+        <p:txBody>
+          <a:bodyPr/>
+          <a:lstStyle/>
+          <a:p>
+            <a:endParaRPr lang="en-US"/>
+          </a:p>
+        </p:txBody>
       </p:sp>
       <p:pic>
         <p:nvPicPr>
@@ -9981,6 +11125,13 @@
             </a:outerShdw>
           </a:effectLst>
         </p:spPr>
+        <p:txBody>
+          <a:bodyPr/>
+          <a:lstStyle/>
+          <a:p>
+            <a:endParaRPr lang="en-US"/>
+          </a:p>
+        </p:txBody>
       </p:sp>
       <p:sp>
         <p:nvSpPr>
@@ -10001,6 +11152,13 @@
           </a:solidFill>
           <a:ln/>
         </p:spPr>
+        <p:txBody>
+          <a:bodyPr/>
+          <a:lstStyle/>
+          <a:p>
+            <a:endParaRPr lang="en-US"/>
+          </a:p>
+        </p:txBody>
       </p:sp>
       <p:pic>
         <p:nvPicPr>
@@ -10132,6 +11290,13 @@
             </a:outerShdw>
           </a:effectLst>
         </p:spPr>
+        <p:txBody>
+          <a:bodyPr/>
+          <a:lstStyle/>
+          <a:p>
+            <a:endParaRPr lang="en-US"/>
+          </a:p>
+        </p:txBody>
       </p:sp>
       <p:sp>
         <p:nvSpPr>
@@ -10224,6 +11389,13 @@
           </a:solidFill>
           <a:ln/>
         </p:spPr>
+        <p:txBody>
+          <a:bodyPr/>
+          <a:lstStyle/>
+          <a:p>
+            <a:endParaRPr lang="en-US"/>
+          </a:p>
+        </p:txBody>
       </p:sp>
       <p:pic>
         <p:nvPicPr>
@@ -10316,6 +11488,13 @@
             </a:outerShdw>
           </a:effectLst>
         </p:spPr>
+        <p:txBody>
+          <a:bodyPr/>
+          <a:lstStyle/>
+          <a:p>
+            <a:endParaRPr lang="en-US"/>
+          </a:p>
+        </p:txBody>
       </p:sp>
       <p:sp>
         <p:nvSpPr>
@@ -10336,6 +11515,13 @@
           </a:solidFill>
           <a:ln/>
         </p:spPr>
+        <p:txBody>
+          <a:bodyPr/>
+          <a:lstStyle/>
+          <a:p>
+            <a:endParaRPr lang="en-US"/>
+          </a:p>
+        </p:txBody>
       </p:sp>
       <p:pic>
         <p:nvPicPr>
@@ -10467,6 +11653,13 @@
             </a:outerShdw>
           </a:effectLst>
         </p:spPr>
+        <p:txBody>
+          <a:bodyPr/>
+          <a:lstStyle/>
+          <a:p>
+            <a:endParaRPr lang="en-US"/>
+          </a:p>
+        </p:txBody>
       </p:sp>
       <p:sp>
         <p:nvSpPr>
@@ -10487,6 +11680,13 @@
           </a:solidFill>
           <a:ln/>
         </p:spPr>
+        <p:txBody>
+          <a:bodyPr/>
+          <a:lstStyle/>
+          <a:p>
+            <a:endParaRPr lang="en-US"/>
+          </a:p>
+        </p:txBody>
       </p:sp>
       <p:pic>
         <p:nvPicPr>
@@ -10618,6 +11818,13 @@
             </a:outerShdw>
           </a:effectLst>
         </p:spPr>
+        <p:txBody>
+          <a:bodyPr/>
+          <a:lstStyle/>
+          <a:p>
+            <a:endParaRPr lang="en-US"/>
+          </a:p>
+        </p:txBody>
       </p:sp>
       <p:sp>
         <p:nvSpPr>
@@ -10638,6 +11845,13 @@
           </a:solidFill>
           <a:ln/>
         </p:spPr>
+        <p:txBody>
+          <a:bodyPr/>
+          <a:lstStyle/>
+          <a:p>
+            <a:endParaRPr lang="en-US"/>
+          </a:p>
+        </p:txBody>
       </p:sp>
       <p:pic>
         <p:nvPicPr>
@@ -10793,6 +12007,13 @@
           </a:solidFill>
           <a:ln/>
         </p:spPr>
+        <p:txBody>
+          <a:bodyPr/>
+          <a:lstStyle/>
+          <a:p>
+            <a:endParaRPr lang="en-US"/>
+          </a:p>
+        </p:txBody>
       </p:sp>
       <p:pic>
         <p:nvPicPr>
@@ -10885,6 +12106,13 @@
             </a:outerShdw>
           </a:effectLst>
         </p:spPr>
+        <p:txBody>
+          <a:bodyPr/>
+          <a:lstStyle/>
+          <a:p>
+            <a:endParaRPr lang="en-US"/>
+          </a:p>
+        </p:txBody>
       </p:sp>
       <p:sp>
         <p:nvSpPr>
@@ -10905,6 +12133,13 @@
           </a:solidFill>
           <a:ln/>
         </p:spPr>
+        <p:txBody>
+          <a:bodyPr/>
+          <a:lstStyle/>
+          <a:p>
+            <a:endParaRPr lang="en-US"/>
+          </a:p>
+        </p:txBody>
       </p:sp>
       <p:pic>
         <p:nvPicPr>
@@ -11036,6 +12271,13 @@
             </a:outerShdw>
           </a:effectLst>
         </p:spPr>
+        <p:txBody>
+          <a:bodyPr/>
+          <a:lstStyle/>
+          <a:p>
+            <a:endParaRPr lang="en-US"/>
+          </a:p>
+        </p:txBody>
       </p:sp>
       <p:sp>
         <p:nvSpPr>
@@ -11056,6 +12298,13 @@
           </a:solidFill>
           <a:ln/>
         </p:spPr>
+        <p:txBody>
+          <a:bodyPr/>
+          <a:lstStyle/>
+          <a:p>
+            <a:endParaRPr lang="en-US"/>
+          </a:p>
+        </p:txBody>
       </p:sp>
       <p:pic>
         <p:nvPicPr>
@@ -11187,6 +12436,13 @@
             </a:outerShdw>
           </a:effectLst>
         </p:spPr>
+        <p:txBody>
+          <a:bodyPr/>
+          <a:lstStyle/>
+          <a:p>
+            <a:endParaRPr lang="en-US"/>
+          </a:p>
+        </p:txBody>
       </p:sp>
       <p:sp>
         <p:nvSpPr>
@@ -11207,6 +12463,13 @@
           </a:solidFill>
           <a:ln/>
         </p:spPr>
+        <p:txBody>
+          <a:bodyPr/>
+          <a:lstStyle/>
+          <a:p>
+            <a:endParaRPr lang="en-US"/>
+          </a:p>
+        </p:txBody>
       </p:sp>
       <p:pic>
         <p:nvPicPr>
@@ -11321,7 +12584,7 @@
                 <a:ea typeface="Calibri" pitchFamily="34" charset="-122"/>
                 <a:cs typeface="Calibri" pitchFamily="34" charset="-120"/>
               </a:rPr>
-              <a:t>Note: operational C-band radars recover much of the attenuated signal with dual-pol (KDP) — the practical fix, beyond this course.</a:t>
+              <a:t>Note: operational C-band radars recover much of the attenuated signal with dual-pol (KDP) — the practical fix, coming in Block 5.</a:t>
             </a:r>
             <a:endParaRPr lang="en-US" sz="1150" dirty="0"/>
           </a:p>
@@ -11470,6 +12733,13 @@
           </a:solidFill>
           <a:ln/>
         </p:spPr>
+        <p:txBody>
+          <a:bodyPr/>
+          <a:lstStyle/>
+          <a:p>
+            <a:endParaRPr lang="en-US"/>
+          </a:p>
+        </p:txBody>
       </p:sp>
       <p:pic>
         <p:nvPicPr>
@@ -11568,6 +12838,13 @@
             </a:outerShdw>
           </a:effectLst>
         </p:spPr>
+        <p:txBody>
+          <a:bodyPr/>
+          <a:lstStyle/>
+          <a:p>
+            <a:endParaRPr lang="en-US"/>
+          </a:p>
+        </p:txBody>
       </p:sp>
       <p:sp>
         <p:nvSpPr>
@@ -11594,6 +12871,13 @@
           </a:solidFill>
           <a:ln/>
         </p:spPr>
+        <p:txBody>
+          <a:bodyPr/>
+          <a:lstStyle/>
+          <a:p>
+            <a:endParaRPr lang="en-US"/>
+          </a:p>
+        </p:txBody>
       </p:sp>
       <p:pic>
         <p:nvPicPr>
@@ -11695,6 +12979,13 @@
           </a:solidFill>
           <a:ln/>
         </p:spPr>
+        <p:txBody>
+          <a:bodyPr/>
+          <a:lstStyle/>
+          <a:p>
+            <a:endParaRPr lang="en-US"/>
+          </a:p>
+        </p:txBody>
       </p:sp>
       <p:pic>
         <p:nvPicPr>
@@ -11732,6 +13023,1724 @@
         <p14:creationId xmlns:p14="http://schemas.microsoft.com/office/powerpoint/2010/main" val="1594288846"/>
       </p:ext>
     </p:extLst>
+  </p:cSld>
+  <p:clrMapOvr>
+    <a:masterClrMapping/>
+  </p:clrMapOvr>
+</p:sld>
+</file>
+
+<file path=ppt/slides/slide27.xml><?xml version="1.0" encoding="utf-8"?>
+<p:sld xmlns:a="http://schemas.openxmlformats.org/drawingml/2006/main" xmlns:r="http://schemas.openxmlformats.org/officeDocument/2006/relationships" xmlns:p="http://schemas.openxmlformats.org/presentationml/2006/main">
+  <p:cSld>
+    <p:bg>
+      <p:bgPr>
+        <a:solidFill>
+          <a:srgbClr val="0E2A47"/>
+        </a:solidFill>
+        <a:effectLst/>
+      </p:bgPr>
+    </p:bg>
+    <p:spTree>
+      <p:nvGrpSpPr>
+        <p:cNvPr id="1" name=""/>
+        <p:cNvGrpSpPr/>
+        <p:nvPr/>
+      </p:nvGrpSpPr>
+      <p:grpSpPr>
+        <a:xfrm>
+          <a:off x="0" y="0"/>
+          <a:ext cx="0" cy="0"/>
+          <a:chOff x="0" y="0"/>
+          <a:chExt cx="0" cy="0"/>
+        </a:xfrm>
+      </p:grpSpPr>
+      <p:sp>
+        <p:nvSpPr>
+          <p:cNvPr id="2" name="Text 0"/>
+          <p:cNvSpPr/>
+          <p:nvPr/>
+        </p:nvSpPr>
+        <p:spPr>
+          <a:xfrm>
+            <a:off x="5486400" y="-320040"/>
+            <a:ext cx="3566160" cy="3108960"/>
+          </a:xfrm>
+          <a:prstGeom prst="rect">
+            <a:avLst/>
+          </a:prstGeom>
+          <a:noFill/>
+          <a:ln/>
+        </p:spPr>
+        <p:txBody>
+          <a:bodyPr wrap="square" lIns="0" tIns="0" rIns="0" bIns="0" rtlCol="0" anchor="t"/>
+          <a:lstStyle/>
+          <a:p>
+            <a:pPr marL="0" marR="0" lvl="0" indent="0" algn="r" defTabSz="914400" rtl="0" eaLnBrk="1" fontAlgn="auto" latinLnBrk="0" hangingPunct="1">
+              <a:lnSpc>
+                <a:spcPct val="100000"/>
+              </a:lnSpc>
+              <a:spcBef>
+                <a:spcPts val="0"/>
+              </a:spcBef>
+              <a:spcAft>
+                <a:spcPts val="0"/>
+              </a:spcAft>
+              <a:buClrTx/>
+              <a:buSzTx/>
+              <a:buFontTx/>
+              <a:buNone/>
+              <a:tabLst/>
+              <a:defRPr/>
+            </a:pPr>
+            <a:r>
+              <a:rPr kumimoji="0" lang="en-US" sz="20000" b="1" i="0" u="none" strike="noStrike" kern="1200" cap="none" spc="0" normalizeH="0" baseline="0" noProof="0" dirty="0">
+                <a:ln>
+                  <a:noFill/>
+                </a:ln>
+                <a:solidFill>
+                  <a:srgbClr val="183B5E"/>
+                </a:solidFill>
+                <a:effectLst/>
+                <a:uLnTx/>
+                <a:uFillTx/>
+                <a:latin typeface="Cambria" pitchFamily="34" charset="0"/>
+                <a:ea typeface="Cambria" pitchFamily="34" charset="-122"/>
+                <a:cs typeface="Cambria" pitchFamily="34" charset="-120"/>
+              </a:rPr>
+              <a:t>05</a:t>
+            </a:r>
+            <a:endParaRPr kumimoji="0" lang="en-US" sz="20000" b="0" i="0" u="none" strike="noStrike" kern="1200" cap="none" spc="0" normalizeH="0" baseline="0" noProof="0" dirty="0">
+              <a:ln>
+                <a:noFill/>
+              </a:ln>
+              <a:solidFill>
+                <a:prstClr val="black"/>
+              </a:solidFill>
+              <a:effectLst/>
+              <a:uLnTx/>
+              <a:uFillTx/>
+              <a:latin typeface="Calibri" panose="020F0502020204030204"/>
+              <a:ea typeface="+mn-ea"/>
+              <a:cs typeface="+mn-cs"/>
+            </a:endParaRPr>
+          </a:p>
+        </p:txBody>
+      </p:sp>
+      <p:sp>
+        <p:nvSpPr>
+          <p:cNvPr id="3" name="Shape 1"/>
+          <p:cNvSpPr/>
+          <p:nvPr/>
+        </p:nvSpPr>
+        <p:spPr>
+          <a:xfrm>
+            <a:off x="640080" y="731520"/>
+            <a:ext cx="914400" cy="914400"/>
+          </a:xfrm>
+          <a:prstGeom prst="ellipse">
+            <a:avLst/>
+          </a:prstGeom>
+          <a:solidFill>
+            <a:srgbClr val="E0A33E"/>
+          </a:solidFill>
+          <a:ln/>
+        </p:spPr>
+        <p:txBody>
+          <a:bodyPr/>
+          <a:lstStyle/>
+          <a:p>
+            <a:pPr marL="0" marR="0" lvl="0" indent="0" algn="l" defTabSz="914400" rtl="0" eaLnBrk="1" fontAlgn="auto" latinLnBrk="0" hangingPunct="1">
+              <a:lnSpc>
+                <a:spcPct val="100000"/>
+              </a:lnSpc>
+              <a:spcBef>
+                <a:spcPts val="0"/>
+              </a:spcBef>
+              <a:spcAft>
+                <a:spcPts val="0"/>
+              </a:spcAft>
+              <a:buClrTx/>
+              <a:buSzTx/>
+              <a:buFontTx/>
+              <a:buNone/>
+              <a:tabLst/>
+              <a:defRPr/>
+            </a:pPr>
+            <a:endParaRPr kumimoji="0" lang="en-US" sz="1800" b="0" i="0" u="none" strike="noStrike" kern="1200" cap="none" spc="0" normalizeH="0" baseline="0" noProof="0">
+              <a:ln>
+                <a:noFill/>
+              </a:ln>
+              <a:solidFill>
+                <a:prstClr val="black"/>
+              </a:solidFill>
+              <a:effectLst/>
+              <a:uLnTx/>
+              <a:uFillTx/>
+              <a:latin typeface="Calibri" panose="020F0502020204030204"/>
+              <a:ea typeface="+mn-ea"/>
+              <a:cs typeface="+mn-cs"/>
+            </a:endParaRPr>
+          </a:p>
+        </p:txBody>
+      </p:sp>
+      <p:pic>
+        <p:nvPicPr>
+          <p:cNvPr id="4" name="Image 0" descr="preencoded.png"/>
+          <p:cNvPicPr>
+            <a:picLocks noChangeAspect="1"/>
+          </p:cNvPicPr>
+          <p:nvPr/>
+        </p:nvPicPr>
+        <p:blipFill>
+          <a:blip r:embed="rId3"/>
+          <a:stretch>
+            <a:fillRect/>
+          </a:stretch>
+        </p:blipFill>
+        <p:spPr>
+          <a:xfrm>
+            <a:off x="868680" y="960120"/>
+            <a:ext cx="457200" cy="457200"/>
+          </a:xfrm>
+          <a:prstGeom prst="rect">
+            <a:avLst/>
+          </a:prstGeom>
+        </p:spPr>
+      </p:pic>
+      <p:sp>
+        <p:nvSpPr>
+          <p:cNvPr id="5" name="Text 2"/>
+          <p:cNvSpPr/>
+          <p:nvPr/>
+        </p:nvSpPr>
+        <p:spPr>
+          <a:xfrm>
+            <a:off x="676656" y="1810512"/>
+            <a:ext cx="4572000" cy="365760"/>
+          </a:xfrm>
+          <a:prstGeom prst="rect">
+            <a:avLst/>
+          </a:prstGeom>
+          <a:noFill/>
+          <a:ln/>
+        </p:spPr>
+        <p:txBody>
+          <a:bodyPr wrap="square" lIns="0" tIns="0" rIns="0" bIns="0" rtlCol="0" anchor="ctr"/>
+          <a:lstStyle/>
+          <a:p>
+            <a:pPr marL="0" marR="0" lvl="0" indent="0" algn="l" defTabSz="914400" rtl="0" eaLnBrk="1" fontAlgn="auto" latinLnBrk="0" hangingPunct="1">
+              <a:lnSpc>
+                <a:spcPct val="100000"/>
+              </a:lnSpc>
+              <a:spcBef>
+                <a:spcPts val="0"/>
+              </a:spcBef>
+              <a:spcAft>
+                <a:spcPts val="0"/>
+              </a:spcAft>
+              <a:buClrTx/>
+              <a:buSzTx/>
+              <a:buFontTx/>
+              <a:buNone/>
+              <a:tabLst/>
+              <a:defRPr/>
+            </a:pPr>
+            <a:r>
+              <a:rPr kumimoji="0" lang="en-US" sz="1400" b="1" i="0" u="none" strike="noStrike" kern="0" cap="none" spc="300" normalizeH="0" baseline="0" noProof="0" dirty="0">
+                <a:ln>
+                  <a:noFill/>
+                </a:ln>
+                <a:solidFill>
+                  <a:srgbClr val="E0A33E"/>
+                </a:solidFill>
+                <a:effectLst/>
+                <a:uLnTx/>
+                <a:uFillTx/>
+                <a:latin typeface="Calibri" pitchFamily="34" charset="0"/>
+                <a:ea typeface="Calibri" pitchFamily="34" charset="-122"/>
+                <a:cs typeface="Calibri" pitchFamily="34" charset="-120"/>
+              </a:rPr>
+              <a:t>BLOCK 05</a:t>
+            </a:r>
+            <a:endParaRPr kumimoji="0" lang="en-US" sz="1400" b="0" i="0" u="none" strike="noStrike" kern="1200" cap="none" spc="0" normalizeH="0" baseline="0" noProof="0" dirty="0">
+              <a:ln>
+                <a:noFill/>
+              </a:ln>
+              <a:solidFill>
+                <a:prstClr val="black"/>
+              </a:solidFill>
+              <a:effectLst/>
+              <a:uLnTx/>
+              <a:uFillTx/>
+              <a:latin typeface="Calibri" panose="020F0502020204030204"/>
+              <a:ea typeface="+mn-ea"/>
+              <a:cs typeface="+mn-cs"/>
+            </a:endParaRPr>
+          </a:p>
+        </p:txBody>
+      </p:sp>
+      <p:sp>
+        <p:nvSpPr>
+          <p:cNvPr id="6" name="Text 3"/>
+          <p:cNvSpPr/>
+          <p:nvPr/>
+        </p:nvSpPr>
+        <p:spPr>
+          <a:xfrm>
+            <a:off x="621792" y="2121408"/>
+            <a:ext cx="7955280" cy="914400"/>
+          </a:xfrm>
+          <a:prstGeom prst="rect">
+            <a:avLst/>
+          </a:prstGeom>
+          <a:noFill/>
+          <a:ln/>
+        </p:spPr>
+        <p:txBody>
+          <a:bodyPr wrap="square" lIns="0" tIns="0" rIns="0" bIns="0" rtlCol="0" anchor="t"/>
+          <a:lstStyle/>
+          <a:p>
+            <a:pPr marL="0" marR="0" lvl="0" indent="0" algn="l" defTabSz="914400" rtl="0" eaLnBrk="1" fontAlgn="auto" latinLnBrk="0" hangingPunct="1">
+              <a:lnSpc>
+                <a:spcPct val="100000"/>
+              </a:lnSpc>
+              <a:spcBef>
+                <a:spcPts val="0"/>
+              </a:spcBef>
+              <a:spcAft>
+                <a:spcPts val="0"/>
+              </a:spcAft>
+              <a:buClrTx/>
+              <a:buSzTx/>
+              <a:buFontTx/>
+              <a:buNone/>
+              <a:tabLst/>
+              <a:defRPr/>
+            </a:pPr>
+            <a:r>
+              <a:rPr kumimoji="0" lang="en-US" sz="4000" b="1" i="0" u="none" strike="noStrike" kern="1200" cap="none" spc="0" normalizeH="0" baseline="0" noProof="0" dirty="0">
+                <a:ln>
+                  <a:noFill/>
+                </a:ln>
+                <a:solidFill>
+                  <a:srgbClr val="FFFFFF"/>
+                </a:solidFill>
+                <a:effectLst/>
+                <a:uLnTx/>
+                <a:uFillTx/>
+                <a:latin typeface="Cambria" pitchFamily="34" charset="0"/>
+                <a:ea typeface="Cambria" pitchFamily="34" charset="-122"/>
+                <a:cs typeface="Cambria" pitchFamily="34" charset="-120"/>
+              </a:rPr>
+              <a:t>Two polarizations</a:t>
+            </a:r>
+            <a:endParaRPr kumimoji="0" lang="en-US" sz="4000" b="0" i="0" u="none" strike="noStrike" kern="1200" cap="none" spc="0" normalizeH="0" baseline="0" noProof="0" dirty="0">
+              <a:ln>
+                <a:noFill/>
+              </a:ln>
+              <a:solidFill>
+                <a:prstClr val="black"/>
+              </a:solidFill>
+              <a:effectLst/>
+              <a:uLnTx/>
+              <a:uFillTx/>
+              <a:latin typeface="Calibri" panose="020F0502020204030204"/>
+              <a:ea typeface="+mn-ea"/>
+              <a:cs typeface="+mn-cs"/>
+            </a:endParaRPr>
+          </a:p>
+        </p:txBody>
+      </p:sp>
+      <p:sp>
+        <p:nvSpPr>
+          <p:cNvPr id="7" name="Text 4"/>
+          <p:cNvSpPr/>
+          <p:nvPr/>
+        </p:nvSpPr>
+        <p:spPr>
+          <a:xfrm>
+            <a:off x="658368" y="3127248"/>
+            <a:ext cx="7955280" cy="502920"/>
+          </a:xfrm>
+          <a:prstGeom prst="rect">
+            <a:avLst/>
+          </a:prstGeom>
+          <a:noFill/>
+          <a:ln/>
+        </p:spPr>
+        <p:txBody>
+          <a:bodyPr wrap="square" lIns="0" tIns="0" rIns="0" bIns="0" rtlCol="0" anchor="ctr"/>
+          <a:lstStyle/>
+          <a:p>
+            <a:pPr marL="0" marR="0" lvl="0" indent="0" algn="l" defTabSz="914400" rtl="0" eaLnBrk="1" fontAlgn="auto" latinLnBrk="0" hangingPunct="1">
+              <a:lnSpc>
+                <a:spcPct val="100000"/>
+              </a:lnSpc>
+              <a:spcBef>
+                <a:spcPts val="0"/>
+              </a:spcBef>
+              <a:spcAft>
+                <a:spcPts val="0"/>
+              </a:spcAft>
+              <a:buClrTx/>
+              <a:buSzTx/>
+              <a:buFontTx/>
+              <a:buNone/>
+              <a:tabLst/>
+              <a:defRPr/>
+            </a:pPr>
+            <a:r>
+              <a:rPr kumimoji="0" lang="en-US" sz="1800" b="0" i="1" u="none" strike="noStrike" kern="1200" cap="none" spc="0" normalizeH="0" baseline="0" noProof="0" dirty="0">
+                <a:ln>
+                  <a:noFill/>
+                </a:ln>
+                <a:solidFill>
+                  <a:srgbClr val="A9CBD8"/>
+                </a:solidFill>
+                <a:effectLst/>
+                <a:uLnTx/>
+                <a:uFillTx/>
+                <a:latin typeface="Cambria" pitchFamily="34" charset="0"/>
+                <a:ea typeface="Cambria" pitchFamily="34" charset="-122"/>
+                <a:cs typeface="Cambria" pitchFamily="34" charset="-120"/>
+              </a:rPr>
+              <a:t>What is the echo made of — not just how much?</a:t>
+            </a:r>
+            <a:endParaRPr kumimoji="0" lang="en-US" sz="1800" b="0" i="0" u="none" strike="noStrike" kern="1200" cap="none" spc="0" normalizeH="0" baseline="0" noProof="0" dirty="0">
+              <a:ln>
+                <a:noFill/>
+              </a:ln>
+              <a:solidFill>
+                <a:prstClr val="black"/>
+              </a:solidFill>
+              <a:effectLst/>
+              <a:uLnTx/>
+              <a:uFillTx/>
+              <a:latin typeface="Calibri" panose="020F0502020204030204"/>
+              <a:ea typeface="+mn-ea"/>
+              <a:cs typeface="+mn-cs"/>
+            </a:endParaRPr>
+          </a:p>
+        </p:txBody>
+      </p:sp>
+      <p:sp>
+        <p:nvSpPr>
+          <p:cNvPr id="8" name="Text 5"/>
+          <p:cNvSpPr/>
+          <p:nvPr/>
+        </p:nvSpPr>
+        <p:spPr>
+          <a:xfrm>
+            <a:off x="658368" y="3822192"/>
+            <a:ext cx="7955280" cy="822960"/>
+          </a:xfrm>
+          <a:prstGeom prst="rect">
+            <a:avLst/>
+          </a:prstGeom>
+          <a:noFill/>
+          <a:ln/>
+        </p:spPr>
+        <p:txBody>
+          <a:bodyPr wrap="square" lIns="0" tIns="0" rIns="0" bIns="0" rtlCol="0" anchor="t"/>
+          <a:lstStyle/>
+          <a:p>
+            <a:pPr marL="0" marR="0" lvl="0" indent="0" algn="l" defTabSz="914400" rtl="0" eaLnBrk="1" fontAlgn="auto" latinLnBrk="0" hangingPunct="1">
+              <a:lnSpc>
+                <a:spcPct val="100000"/>
+              </a:lnSpc>
+              <a:spcBef>
+                <a:spcPts val="0"/>
+              </a:spcBef>
+              <a:spcAft>
+                <a:spcPts val="0"/>
+              </a:spcAft>
+              <a:buClrTx/>
+              <a:buSzTx/>
+              <a:buFontTx/>
+              <a:buNone/>
+              <a:tabLst/>
+              <a:defRPr/>
+            </a:pPr>
+            <a:r>
+              <a:rPr kumimoji="0" lang="en-US" sz="1500" b="0" i="0" u="none" strike="noStrike" kern="1200" cap="none" spc="0" normalizeH="0" baseline="0" noProof="0" dirty="0">
+                <a:ln>
+                  <a:noFill/>
+                </a:ln>
+                <a:solidFill>
+                  <a:srgbClr val="DCE7EE"/>
+                </a:solidFill>
+                <a:effectLst/>
+                <a:uLnTx/>
+                <a:uFillTx/>
+                <a:latin typeface="Calibri" pitchFamily="34" charset="0"/>
+                <a:ea typeface="Calibri" pitchFamily="34" charset="-122"/>
+                <a:cs typeface="Calibri" pitchFamily="34" charset="-120"/>
+              </a:rPr>
+              <a:t>A single polarization tells you how much is there. Two — horizontal and vertical — tell you what it is.</a:t>
+            </a:r>
+            <a:endParaRPr kumimoji="0" lang="en-US" sz="1500" b="0" i="0" u="none" strike="noStrike" kern="1200" cap="none" spc="0" normalizeH="0" baseline="0" noProof="0" dirty="0">
+              <a:ln>
+                <a:noFill/>
+              </a:ln>
+              <a:solidFill>
+                <a:prstClr val="black"/>
+              </a:solidFill>
+              <a:effectLst/>
+              <a:uLnTx/>
+              <a:uFillTx/>
+              <a:latin typeface="Calibri" panose="020F0502020204030204"/>
+              <a:ea typeface="+mn-ea"/>
+              <a:cs typeface="+mn-cs"/>
+            </a:endParaRPr>
+          </a:p>
+        </p:txBody>
+      </p:sp>
+    </p:spTree>
+  </p:cSld>
+  <p:clrMapOvr>
+    <a:masterClrMapping/>
+  </p:clrMapOvr>
+</p:sld>
+</file>
+
+<file path=ppt/slides/slide28.xml><?xml version="1.0" encoding="utf-8"?>
+<p:sld xmlns:a="http://schemas.openxmlformats.org/drawingml/2006/main" xmlns:r="http://schemas.openxmlformats.org/officeDocument/2006/relationships" xmlns:p="http://schemas.openxmlformats.org/presentationml/2006/main">
+  <p:cSld>
+    <p:spTree>
+      <p:nvGrpSpPr>
+        <p:cNvPr id="1" name=""/>
+        <p:cNvGrpSpPr/>
+        <p:nvPr/>
+      </p:nvGrpSpPr>
+      <p:grpSpPr>
+        <a:xfrm>
+          <a:off x="0" y="0"/>
+          <a:ext cx="0" cy="0"/>
+          <a:chOff x="0" y="0"/>
+          <a:chExt cx="0" cy="0"/>
+        </a:xfrm>
+      </p:grpSpPr>
+      <p:sp>
+        <p:nvSpPr>
+          <p:cNvPr id="2" name="Shape 0"/>
+          <p:cNvSpPr/>
+          <p:nvPr/>
+        </p:nvSpPr>
+        <p:spPr>
+          <a:xfrm>
+            <a:off x="548640" y="384048"/>
+            <a:ext cx="566928" cy="566928"/>
+          </a:xfrm>
+          <a:prstGeom prst="ellipse">
+            <a:avLst/>
+          </a:prstGeom>
+          <a:solidFill>
+            <a:srgbClr val="1C7293"/>
+          </a:solidFill>
+          <a:ln/>
+        </p:spPr>
+        <p:txBody>
+          <a:bodyPr/>
+          <a:lstStyle/>
+          <a:p>
+            <a:endParaRPr lang="en-US"/>
+          </a:p>
+        </p:txBody>
+      </p:sp>
+      <p:pic>
+        <p:nvPicPr>
+          <p:cNvPr id="3" name="Image 0" descr="preencoded.png"/>
+          <p:cNvPicPr>
+            <a:picLocks noChangeAspect="1"/>
+          </p:cNvPicPr>
+          <p:nvPr/>
+        </p:nvPicPr>
+        <p:blipFill>
+          <a:blip r:embed="rId3"/>
+          <a:stretch>
+            <a:fillRect/>
+          </a:stretch>
+        </p:blipFill>
+        <p:spPr>
+          <a:xfrm>
+            <a:off x="690372" y="525780"/>
+            <a:ext cx="283464" cy="283464"/>
+          </a:xfrm>
+          <a:prstGeom prst="rect">
+            <a:avLst/>
+          </a:prstGeom>
+        </p:spPr>
+      </p:pic>
+      <p:sp>
+        <p:nvSpPr>
+          <p:cNvPr id="4" name="Text 1"/>
+          <p:cNvSpPr/>
+          <p:nvPr/>
+        </p:nvSpPr>
+        <p:spPr>
+          <a:xfrm>
+            <a:off x="1298448" y="384048"/>
+            <a:ext cx="7315200" cy="566928"/>
+          </a:xfrm>
+          <a:prstGeom prst="rect">
+            <a:avLst/>
+          </a:prstGeom>
+          <a:noFill/>
+          <a:ln/>
+        </p:spPr>
+        <p:txBody>
+          <a:bodyPr wrap="square" lIns="0" tIns="0" rIns="0" bIns="0" rtlCol="0" anchor="ctr"/>
+          <a:lstStyle/>
+          <a:p>
+            <a:pPr marL="0" indent="0">
+              <a:buNone/>
+            </a:pPr>
+            <a:r>
+              <a:rPr lang="en-US" sz="2700" b="1" dirty="0">
+                <a:solidFill>
+                  <a:srgbClr val="0E2A47"/>
+                </a:solidFill>
+                <a:latin typeface="Cambria" pitchFamily="34" charset="0"/>
+                <a:ea typeface="Cambria" pitchFamily="34" charset="-122"/>
+                <a:cs typeface="Cambria" pitchFamily="34" charset="-120"/>
+              </a:rPr>
+              <a:t>Two polarizations, one volume</a:t>
+            </a:r>
+            <a:endParaRPr lang="en-US" sz="2700" dirty="0"/>
+          </a:p>
+        </p:txBody>
+      </p:sp>
+      <p:sp>
+        <p:nvSpPr>
+          <p:cNvPr id="5" name="Shape 2"/>
+          <p:cNvSpPr/>
+          <p:nvPr/>
+        </p:nvSpPr>
+        <p:spPr>
+          <a:xfrm>
+            <a:off x="548640" y="1417320"/>
+            <a:ext cx="8046720" cy="960120"/>
+          </a:xfrm>
+          <a:prstGeom prst="roundRect">
+            <a:avLst>
+              <a:gd name="adj" fmla="val 7619"/>
+            </a:avLst>
+          </a:prstGeom>
+          <a:solidFill>
+            <a:srgbClr val="F1F6F8"/>
+          </a:solidFill>
+          <a:ln/>
+          <a:effectLst>
+            <a:outerShdw blurRad="88900" dist="38100" dir="5400000" algn="bl" rotWithShape="0">
+              <a:srgbClr val="1A2433">
+                <a:alpha val="16000"/>
+              </a:srgbClr>
+            </a:outerShdw>
+          </a:effectLst>
+        </p:spPr>
+        <p:txBody>
+          <a:bodyPr/>
+          <a:lstStyle/>
+          <a:p>
+            <a:endParaRPr lang="en-US"/>
+          </a:p>
+        </p:txBody>
+      </p:sp>
+      <p:sp>
+        <p:nvSpPr>
+          <p:cNvPr id="6" name="Shape 3"/>
+          <p:cNvSpPr/>
+          <p:nvPr/>
+        </p:nvSpPr>
+        <p:spPr>
+          <a:xfrm>
+            <a:off x="786384" y="1645920"/>
+            <a:ext cx="502920" cy="502920"/>
+          </a:xfrm>
+          <a:prstGeom prst="ellipse">
+            <a:avLst/>
+          </a:prstGeom>
+          <a:solidFill>
+            <a:srgbClr val="1C7293"/>
+          </a:solidFill>
+          <a:ln/>
+        </p:spPr>
+        <p:txBody>
+          <a:bodyPr/>
+          <a:lstStyle/>
+          <a:p>
+            <a:endParaRPr lang="en-US"/>
+          </a:p>
+        </p:txBody>
+      </p:sp>
+      <p:pic>
+        <p:nvPicPr>
+          <p:cNvPr id="7" name="Image 1" descr="preencoded.png"/>
+          <p:cNvPicPr>
+            <a:picLocks noChangeAspect="1"/>
+          </p:cNvPicPr>
+          <p:nvPr/>
+        </p:nvPicPr>
+        <p:blipFill>
+          <a:blip r:embed="rId4"/>
+          <a:stretch>
+            <a:fillRect/>
+          </a:stretch>
+        </p:blipFill>
+        <p:spPr>
+          <a:xfrm>
+            <a:off x="912114" y="1771650"/>
+            <a:ext cx="251460" cy="251460"/>
+          </a:xfrm>
+          <a:prstGeom prst="rect">
+            <a:avLst/>
+          </a:prstGeom>
+        </p:spPr>
+      </p:pic>
+      <p:sp>
+        <p:nvSpPr>
+          <p:cNvPr id="8" name="Text 4"/>
+          <p:cNvSpPr/>
+          <p:nvPr/>
+        </p:nvSpPr>
+        <p:spPr>
+          <a:xfrm>
+            <a:off x="1481328" y="1545336"/>
+            <a:ext cx="6876288" cy="310896"/>
+          </a:xfrm>
+          <a:prstGeom prst="rect">
+            <a:avLst/>
+          </a:prstGeom>
+          <a:noFill/>
+          <a:ln/>
+        </p:spPr>
+        <p:txBody>
+          <a:bodyPr wrap="square" lIns="0" tIns="0" rIns="0" bIns="0" rtlCol="0" anchor="ctr"/>
+          <a:lstStyle/>
+          <a:p>
+            <a:pPr marL="0" indent="0">
+              <a:buNone/>
+            </a:pPr>
+            <a:r>
+              <a:rPr lang="en-US" sz="1600" b="1" dirty="0">
+                <a:solidFill>
+                  <a:srgbClr val="0E2A47"/>
+                </a:solidFill>
+                <a:latin typeface="Calibri" pitchFamily="34" charset="0"/>
+                <a:ea typeface="Calibri" pitchFamily="34" charset="-122"/>
+                <a:cs typeface="Calibri" pitchFamily="34" charset="-120"/>
+              </a:rPr>
+              <a:t>Horizontal and vertical</a:t>
+            </a:r>
+            <a:endParaRPr lang="en-US" sz="1600" dirty="0"/>
+          </a:p>
+        </p:txBody>
+      </p:sp>
+      <p:sp>
+        <p:nvSpPr>
+          <p:cNvPr id="9" name="Text 5"/>
+          <p:cNvSpPr/>
+          <p:nvPr/>
+        </p:nvSpPr>
+        <p:spPr>
+          <a:xfrm>
+            <a:off x="1481328" y="1847088"/>
+            <a:ext cx="6876288" cy="411480"/>
+          </a:xfrm>
+          <a:prstGeom prst="rect">
+            <a:avLst/>
+          </a:prstGeom>
+          <a:noFill/>
+          <a:ln/>
+        </p:spPr>
+        <p:txBody>
+          <a:bodyPr wrap="square" lIns="0" tIns="0" rIns="0" bIns="0" rtlCol="0" anchor="t"/>
+          <a:lstStyle/>
+          <a:p>
+            <a:pPr marL="0" indent="0">
+              <a:buNone/>
+            </a:pPr>
+            <a:r>
+              <a:rPr lang="en-US" sz="1250" dirty="0">
+                <a:solidFill>
+                  <a:srgbClr val="5C6B7A"/>
+                </a:solidFill>
+                <a:latin typeface="Calibri" pitchFamily="34" charset="0"/>
+                <a:ea typeface="Calibri" pitchFamily="34" charset="-122"/>
+                <a:cs typeface="Calibri" pitchFamily="34" charset="-120"/>
+              </a:rPr>
+              <a:t>The radar sends and receives at both polarizations. On its own, each one is just reflectivity.</a:t>
+            </a:r>
+            <a:endParaRPr lang="en-US" sz="1250" dirty="0"/>
+          </a:p>
+        </p:txBody>
+      </p:sp>
+      <p:sp>
+        <p:nvSpPr>
+          <p:cNvPr id="10" name="Shape 6"/>
+          <p:cNvSpPr/>
+          <p:nvPr/>
+        </p:nvSpPr>
+        <p:spPr>
+          <a:xfrm>
+            <a:off x="548640" y="2496312"/>
+            <a:ext cx="8046720" cy="960120"/>
+          </a:xfrm>
+          <a:prstGeom prst="roundRect">
+            <a:avLst>
+              <a:gd name="adj" fmla="val 7619"/>
+            </a:avLst>
+          </a:prstGeom>
+          <a:solidFill>
+            <a:srgbClr val="F1F6F8"/>
+          </a:solidFill>
+          <a:ln/>
+          <a:effectLst>
+            <a:outerShdw blurRad="88900" dist="38100" dir="5400000" algn="bl" rotWithShape="0">
+              <a:srgbClr val="1A2433">
+                <a:alpha val="16000"/>
+              </a:srgbClr>
+            </a:outerShdw>
+          </a:effectLst>
+        </p:spPr>
+        <p:txBody>
+          <a:bodyPr/>
+          <a:lstStyle/>
+          <a:p>
+            <a:endParaRPr lang="en-US"/>
+          </a:p>
+        </p:txBody>
+      </p:sp>
+      <p:sp>
+        <p:nvSpPr>
+          <p:cNvPr id="11" name="Shape 7"/>
+          <p:cNvSpPr/>
+          <p:nvPr/>
+        </p:nvSpPr>
+        <p:spPr>
+          <a:xfrm>
+            <a:off x="786384" y="2724912"/>
+            <a:ext cx="502920" cy="502920"/>
+          </a:xfrm>
+          <a:prstGeom prst="ellipse">
+            <a:avLst/>
+          </a:prstGeom>
+          <a:solidFill>
+            <a:srgbClr val="1C7293"/>
+          </a:solidFill>
+          <a:ln/>
+        </p:spPr>
+        <p:txBody>
+          <a:bodyPr/>
+          <a:lstStyle/>
+          <a:p>
+            <a:endParaRPr lang="en-US"/>
+          </a:p>
+        </p:txBody>
+      </p:sp>
+      <p:pic>
+        <p:nvPicPr>
+          <p:cNvPr id="12" name="Image 2" descr="preencoded.png"/>
+          <p:cNvPicPr>
+            <a:picLocks noChangeAspect="1"/>
+          </p:cNvPicPr>
+          <p:nvPr/>
+        </p:nvPicPr>
+        <p:blipFill>
+          <a:blip r:embed="rId3"/>
+          <a:stretch>
+            <a:fillRect/>
+          </a:stretch>
+        </p:blipFill>
+        <p:spPr>
+          <a:xfrm>
+            <a:off x="912114" y="2850642"/>
+            <a:ext cx="251460" cy="251460"/>
+          </a:xfrm>
+          <a:prstGeom prst="rect">
+            <a:avLst/>
+          </a:prstGeom>
+        </p:spPr>
+      </p:pic>
+      <p:sp>
+        <p:nvSpPr>
+          <p:cNvPr id="13" name="Text 8"/>
+          <p:cNvSpPr/>
+          <p:nvPr/>
+        </p:nvSpPr>
+        <p:spPr>
+          <a:xfrm>
+            <a:off x="1481328" y="2624328"/>
+            <a:ext cx="6876288" cy="310896"/>
+          </a:xfrm>
+          <a:prstGeom prst="rect">
+            <a:avLst/>
+          </a:prstGeom>
+          <a:noFill/>
+          <a:ln/>
+        </p:spPr>
+        <p:txBody>
+          <a:bodyPr wrap="square" lIns="0" tIns="0" rIns="0" bIns="0" rtlCol="0" anchor="ctr"/>
+          <a:lstStyle/>
+          <a:p>
+            <a:pPr marL="0" indent="0">
+              <a:buNone/>
+            </a:pPr>
+            <a:r>
+              <a:rPr lang="en-US" sz="1600" b="1" dirty="0">
+                <a:solidFill>
+                  <a:srgbClr val="0E2A47"/>
+                </a:solidFill>
+                <a:latin typeface="Calibri" pitchFamily="34" charset="0"/>
+                <a:ea typeface="Calibri" pitchFamily="34" charset="-122"/>
+                <a:cs typeface="Calibri" pitchFamily="34" charset="-120"/>
+              </a:rPr>
+              <a:t>The comparison carries the information</a:t>
+            </a:r>
+            <a:endParaRPr lang="en-US" sz="1600" dirty="0"/>
+          </a:p>
+        </p:txBody>
+      </p:sp>
+      <p:sp>
+        <p:nvSpPr>
+          <p:cNvPr id="14" name="Text 9"/>
+          <p:cNvSpPr/>
+          <p:nvPr/>
+        </p:nvSpPr>
+        <p:spPr>
+          <a:xfrm>
+            <a:off x="1481328" y="2926080"/>
+            <a:ext cx="6876288" cy="411480"/>
+          </a:xfrm>
+          <a:prstGeom prst="rect">
+            <a:avLst/>
+          </a:prstGeom>
+          <a:noFill/>
+          <a:ln/>
+        </p:spPr>
+        <p:txBody>
+          <a:bodyPr wrap="square" lIns="0" tIns="0" rIns="0" bIns="0" rtlCol="0" anchor="t"/>
+          <a:lstStyle/>
+          <a:p>
+            <a:pPr marL="0" indent="0">
+              <a:buNone/>
+            </a:pPr>
+            <a:r>
+              <a:rPr lang="en-US" sz="1250" dirty="0">
+                <a:solidFill>
+                  <a:srgbClr val="5C6B7A"/>
+                </a:solidFill>
+                <a:latin typeface="Calibri" pitchFamily="34" charset="0"/>
+                <a:ea typeface="Calibri" pitchFamily="34" charset="-122"/>
+                <a:cs typeface="Calibri" pitchFamily="34" charset="-120"/>
+              </a:rPr>
+              <a:t>How the H and V returns differ — in strength, uniformity, and phase — reveals shape, variety, and rain.</a:t>
+            </a:r>
+            <a:endParaRPr lang="en-US" sz="1250" dirty="0"/>
+          </a:p>
+        </p:txBody>
+      </p:sp>
+      <p:sp>
+        <p:nvSpPr>
+          <p:cNvPr id="15" name="Shape 10"/>
+          <p:cNvSpPr/>
+          <p:nvPr/>
+        </p:nvSpPr>
+        <p:spPr>
+          <a:xfrm>
+            <a:off x="548640" y="3575304"/>
+            <a:ext cx="8046720" cy="960120"/>
+          </a:xfrm>
+          <a:prstGeom prst="roundRect">
+            <a:avLst>
+              <a:gd name="adj" fmla="val 7619"/>
+            </a:avLst>
+          </a:prstGeom>
+          <a:solidFill>
+            <a:srgbClr val="F1F6F8"/>
+          </a:solidFill>
+          <a:ln/>
+          <a:effectLst>
+            <a:outerShdw blurRad="88900" dist="38100" dir="5400000" algn="bl" rotWithShape="0">
+              <a:srgbClr val="1A2433">
+                <a:alpha val="16000"/>
+              </a:srgbClr>
+            </a:outerShdw>
+          </a:effectLst>
+        </p:spPr>
+        <p:txBody>
+          <a:bodyPr/>
+          <a:lstStyle/>
+          <a:p>
+            <a:endParaRPr lang="en-US"/>
+          </a:p>
+        </p:txBody>
+      </p:sp>
+      <p:sp>
+        <p:nvSpPr>
+          <p:cNvPr id="16" name="Shape 11"/>
+          <p:cNvSpPr/>
+          <p:nvPr/>
+        </p:nvSpPr>
+        <p:spPr>
+          <a:xfrm>
+            <a:off x="786384" y="3803904"/>
+            <a:ext cx="502920" cy="502920"/>
+          </a:xfrm>
+          <a:prstGeom prst="ellipse">
+            <a:avLst/>
+          </a:prstGeom>
+          <a:solidFill>
+            <a:srgbClr val="1C7293"/>
+          </a:solidFill>
+          <a:ln/>
+        </p:spPr>
+        <p:txBody>
+          <a:bodyPr/>
+          <a:lstStyle/>
+          <a:p>
+            <a:endParaRPr lang="en-US"/>
+          </a:p>
+        </p:txBody>
+      </p:sp>
+      <p:pic>
+        <p:nvPicPr>
+          <p:cNvPr id="17" name="Image 3" descr="preencoded.png"/>
+          <p:cNvPicPr>
+            <a:picLocks noChangeAspect="1"/>
+          </p:cNvPicPr>
+          <p:nvPr/>
+        </p:nvPicPr>
+        <p:blipFill>
+          <a:blip r:embed="rId5"/>
+          <a:stretch>
+            <a:fillRect/>
+          </a:stretch>
+        </p:blipFill>
+        <p:spPr>
+          <a:xfrm>
+            <a:off x="912114" y="3929634"/>
+            <a:ext cx="251460" cy="251460"/>
+          </a:xfrm>
+          <a:prstGeom prst="rect">
+            <a:avLst/>
+          </a:prstGeom>
+        </p:spPr>
+      </p:pic>
+      <p:sp>
+        <p:nvSpPr>
+          <p:cNvPr id="18" name="Text 12"/>
+          <p:cNvSpPr/>
+          <p:nvPr/>
+        </p:nvSpPr>
+        <p:spPr>
+          <a:xfrm>
+            <a:off x="1481328" y="3703320"/>
+            <a:ext cx="6876288" cy="310896"/>
+          </a:xfrm>
+          <a:prstGeom prst="rect">
+            <a:avLst/>
+          </a:prstGeom>
+          <a:noFill/>
+          <a:ln/>
+        </p:spPr>
+        <p:txBody>
+          <a:bodyPr wrap="square" lIns="0" tIns="0" rIns="0" bIns="0" rtlCol="0" anchor="ctr"/>
+          <a:lstStyle/>
+          <a:p>
+            <a:pPr marL="0" indent="0">
+              <a:buNone/>
+            </a:pPr>
+            <a:r>
+              <a:rPr lang="en-US" sz="1600" b="1" dirty="0">
+                <a:solidFill>
+                  <a:srgbClr val="0E2A47"/>
+                </a:solidFill>
+                <a:latin typeface="Calibri" pitchFamily="34" charset="0"/>
+                <a:ea typeface="Calibri" pitchFamily="34" charset="-122"/>
+                <a:cs typeface="Calibri" pitchFamily="34" charset="-120"/>
+              </a:rPr>
+              <a:t>Particles have shape</a:t>
+            </a:r>
+            <a:endParaRPr lang="en-US" sz="1600" dirty="0"/>
+          </a:p>
+        </p:txBody>
+      </p:sp>
+      <p:sp>
+        <p:nvSpPr>
+          <p:cNvPr id="19" name="Text 13"/>
+          <p:cNvSpPr/>
+          <p:nvPr/>
+        </p:nvSpPr>
+        <p:spPr>
+          <a:xfrm>
+            <a:off x="1481328" y="4005072"/>
+            <a:ext cx="6876288" cy="411480"/>
+          </a:xfrm>
+          <a:prstGeom prst="rect">
+            <a:avLst/>
+          </a:prstGeom>
+          <a:noFill/>
+          <a:ln/>
+        </p:spPr>
+        <p:txBody>
+          <a:bodyPr wrap="square" lIns="0" tIns="0" rIns="0" bIns="0" rtlCol="0" anchor="t"/>
+          <a:lstStyle/>
+          <a:p>
+            <a:pPr marL="0" indent="0">
+              <a:buNone/>
+            </a:pPr>
+            <a:r>
+              <a:rPr lang="en-US" sz="1250" dirty="0">
+                <a:solidFill>
+                  <a:srgbClr val="5C6B7A"/>
+                </a:solidFill>
+                <a:latin typeface="Calibri" pitchFamily="34" charset="0"/>
+                <a:ea typeface="Calibri" pitchFamily="34" charset="-122"/>
+                <a:cs typeface="Calibri" pitchFamily="34" charset="-120"/>
+              </a:rPr>
+              <a:t>Raindrops flatten as they fall; hail tumbles; snow is irregular — two polarizations finally tell them apart.</a:t>
+            </a:r>
+            <a:endParaRPr lang="en-US" sz="1250" dirty="0"/>
+          </a:p>
+        </p:txBody>
+      </p:sp>
+    </p:spTree>
+  </p:cSld>
+  <p:clrMapOvr>
+    <a:masterClrMapping/>
+  </p:clrMapOvr>
+</p:sld>
+</file>
+
+<file path=ppt/slides/slide29.xml><?xml version="1.0" encoding="utf-8"?>
+<p:sld xmlns:a="http://schemas.openxmlformats.org/drawingml/2006/main" xmlns:r="http://schemas.openxmlformats.org/officeDocument/2006/relationships" xmlns:p="http://schemas.openxmlformats.org/presentationml/2006/main">
+  <p:cSld>
+    <p:spTree>
+      <p:nvGrpSpPr>
+        <p:cNvPr id="1" name=""/>
+        <p:cNvGrpSpPr/>
+        <p:nvPr/>
+      </p:nvGrpSpPr>
+      <p:grpSpPr>
+        <a:xfrm>
+          <a:off x="0" y="0"/>
+          <a:ext cx="0" cy="0"/>
+          <a:chOff x="0" y="0"/>
+          <a:chExt cx="0" cy="0"/>
+        </a:xfrm>
+      </p:grpSpPr>
+      <p:sp>
+        <p:nvSpPr>
+          <p:cNvPr id="2" name="Shape 0"/>
+          <p:cNvSpPr/>
+          <p:nvPr/>
+        </p:nvSpPr>
+        <p:spPr>
+          <a:xfrm>
+            <a:off x="548640" y="384048"/>
+            <a:ext cx="566928" cy="566928"/>
+          </a:xfrm>
+          <a:prstGeom prst="ellipse">
+            <a:avLst/>
+          </a:prstGeom>
+          <a:solidFill>
+            <a:srgbClr val="1C7293"/>
+          </a:solidFill>
+          <a:ln/>
+        </p:spPr>
+        <p:txBody>
+          <a:bodyPr/>
+          <a:lstStyle/>
+          <a:p>
+            <a:endParaRPr lang="en-US"/>
+          </a:p>
+        </p:txBody>
+      </p:sp>
+      <p:pic>
+        <p:nvPicPr>
+          <p:cNvPr id="3" name="Image 0" descr="preencoded.png"/>
+          <p:cNvPicPr>
+            <a:picLocks noChangeAspect="1"/>
+          </p:cNvPicPr>
+          <p:nvPr/>
+        </p:nvPicPr>
+        <p:blipFill>
+          <a:blip r:embed="rId3"/>
+          <a:stretch>
+            <a:fillRect/>
+          </a:stretch>
+        </p:blipFill>
+        <p:spPr>
+          <a:xfrm>
+            <a:off x="690372" y="525780"/>
+            <a:ext cx="283464" cy="283464"/>
+          </a:xfrm>
+          <a:prstGeom prst="rect">
+            <a:avLst/>
+          </a:prstGeom>
+        </p:spPr>
+      </p:pic>
+      <p:sp>
+        <p:nvSpPr>
+          <p:cNvPr id="4" name="Text 1"/>
+          <p:cNvSpPr/>
+          <p:nvPr/>
+        </p:nvSpPr>
+        <p:spPr>
+          <a:xfrm>
+            <a:off x="1298448" y="384048"/>
+            <a:ext cx="7315200" cy="566928"/>
+          </a:xfrm>
+          <a:prstGeom prst="rect">
+            <a:avLst/>
+          </a:prstGeom>
+          <a:noFill/>
+          <a:ln/>
+        </p:spPr>
+        <p:txBody>
+          <a:bodyPr wrap="square" lIns="0" tIns="0" rIns="0" bIns="0" rtlCol="0" anchor="ctr"/>
+          <a:lstStyle/>
+          <a:p>
+            <a:pPr marL="0" indent="0">
+              <a:buNone/>
+            </a:pPr>
+            <a:r>
+              <a:rPr lang="en-US" sz="2700" b="1" dirty="0">
+                <a:solidFill>
+                  <a:srgbClr val="0E2A47"/>
+                </a:solidFill>
+                <a:latin typeface="Cambria" pitchFamily="34" charset="0"/>
+                <a:ea typeface="Cambria" pitchFamily="34" charset="-122"/>
+                <a:cs typeface="Cambria" pitchFamily="34" charset="-120"/>
+              </a:rPr>
+              <a:t>The one idea: three new variables</a:t>
+            </a:r>
+            <a:endParaRPr lang="en-US" sz="2700" dirty="0"/>
+          </a:p>
+        </p:txBody>
+      </p:sp>
+      <p:sp>
+        <p:nvSpPr>
+          <p:cNvPr id="5" name="Shape 2"/>
+          <p:cNvSpPr/>
+          <p:nvPr/>
+        </p:nvSpPr>
+        <p:spPr>
+          <a:xfrm>
+            <a:off x="502920" y="1554480"/>
+            <a:ext cx="2606040" cy="2377440"/>
+          </a:xfrm>
+          <a:prstGeom prst="roundRect">
+            <a:avLst>
+              <a:gd name="adj" fmla="val 3077"/>
+            </a:avLst>
+          </a:prstGeom>
+          <a:solidFill>
+            <a:srgbClr val="F1F6F8"/>
+          </a:solidFill>
+          <a:ln/>
+          <a:effectLst>
+            <a:outerShdw blurRad="88900" dist="38100" dir="5400000" algn="bl" rotWithShape="0">
+              <a:srgbClr val="1A2433">
+                <a:alpha val="16000"/>
+              </a:srgbClr>
+            </a:outerShdw>
+          </a:effectLst>
+        </p:spPr>
+        <p:txBody>
+          <a:bodyPr/>
+          <a:lstStyle/>
+          <a:p>
+            <a:endParaRPr lang="en-US"/>
+          </a:p>
+        </p:txBody>
+      </p:sp>
+      <p:sp>
+        <p:nvSpPr>
+          <p:cNvPr id="6" name="Text 3"/>
+          <p:cNvSpPr/>
+          <p:nvPr/>
+        </p:nvSpPr>
+        <p:spPr>
+          <a:xfrm>
+            <a:off x="777240" y="1737360"/>
+            <a:ext cx="2057400" cy="365760"/>
+          </a:xfrm>
+          <a:prstGeom prst="rect">
+            <a:avLst/>
+          </a:prstGeom>
+          <a:noFill/>
+          <a:ln/>
+        </p:spPr>
+        <p:txBody>
+          <a:bodyPr wrap="square" lIns="0" tIns="0" rIns="0" bIns="0" rtlCol="0" anchor="ctr"/>
+          <a:lstStyle/>
+          <a:p>
+            <a:pPr marL="0" indent="0">
+              <a:buNone/>
+            </a:pPr>
+            <a:r>
+              <a:rPr lang="en-US" sz="1600" b="1" dirty="0">
+                <a:solidFill>
+                  <a:srgbClr val="1C7293"/>
+                </a:solidFill>
+                <a:latin typeface="Calibri" pitchFamily="34" charset="0"/>
+                <a:ea typeface="Calibri" pitchFamily="34" charset="-122"/>
+                <a:cs typeface="Calibri" pitchFamily="34" charset="-120"/>
+              </a:rPr>
+              <a:t>ZDR — shape &amp; size</a:t>
+            </a:r>
+            <a:endParaRPr lang="en-US" sz="1600" dirty="0"/>
+          </a:p>
+        </p:txBody>
+      </p:sp>
+      <p:sp>
+        <p:nvSpPr>
+          <p:cNvPr id="7" name="Text 4"/>
+          <p:cNvSpPr/>
+          <p:nvPr/>
+        </p:nvSpPr>
+        <p:spPr>
+          <a:xfrm>
+            <a:off x="813816" y="2176272"/>
+            <a:ext cx="2039112" cy="1591056"/>
+          </a:xfrm>
+          <a:prstGeom prst="rect">
+            <a:avLst/>
+          </a:prstGeom>
+          <a:noFill/>
+          <a:ln/>
+        </p:spPr>
+        <p:txBody>
+          <a:bodyPr wrap="square" lIns="0" tIns="0" rIns="0" bIns="0" rtlCol="0" anchor="t"/>
+          <a:lstStyle/>
+          <a:p>
+            <a:pPr marL="342900" indent="-342900">
+              <a:spcAft>
+                <a:spcPts val="700"/>
+              </a:spcAft>
+              <a:buSzPct val="100000"/>
+              <a:buChar char="•"/>
+            </a:pPr>
+            <a:r>
+              <a:rPr lang="en-US" sz="1300" dirty="0">
+                <a:solidFill>
+                  <a:srgbClr val="0E2A47"/>
+                </a:solidFill>
+                <a:latin typeface="Calibri" pitchFamily="34" charset="0"/>
+                <a:ea typeface="Calibri" pitchFamily="34" charset="-122"/>
+                <a:cs typeface="Calibri" pitchFamily="34" charset="-120"/>
+              </a:rPr>
+              <a:t>How flattened the drops are</a:t>
+            </a:r>
+            <a:endParaRPr lang="en-US" sz="1300" dirty="0"/>
+          </a:p>
+          <a:p>
+            <a:pPr marL="342900" indent="-342900">
+              <a:spcAft>
+                <a:spcPts val="700"/>
+              </a:spcAft>
+              <a:buSzPct val="100000"/>
+              <a:buChar char="•"/>
+            </a:pPr>
+            <a:r>
+              <a:rPr lang="en-US" sz="1300" dirty="0">
+                <a:solidFill>
+                  <a:srgbClr val="0E2A47"/>
+                </a:solidFill>
+                <a:latin typeface="Calibri" pitchFamily="34" charset="0"/>
+                <a:ea typeface="Calibri" pitchFamily="34" charset="-122"/>
+                <a:cs typeface="Calibri" pitchFamily="34" charset="-120"/>
+              </a:rPr>
+              <a:t>Big drops → high ZDR</a:t>
+            </a:r>
+            <a:endParaRPr lang="en-US" sz="1300" dirty="0"/>
+          </a:p>
+          <a:p>
+            <a:pPr marL="342900" indent="-342900">
+              <a:spcAft>
+                <a:spcPts val="700"/>
+              </a:spcAft>
+              <a:buSzPct val="100000"/>
+              <a:buChar char="•"/>
+            </a:pPr>
+            <a:r>
+              <a:rPr lang="en-US" sz="1300" dirty="0">
+                <a:solidFill>
+                  <a:srgbClr val="0E2A47"/>
+                </a:solidFill>
+                <a:latin typeface="Calibri" pitchFamily="34" charset="0"/>
+                <a:ea typeface="Calibri" pitchFamily="34" charset="-122"/>
+                <a:cs typeface="Calibri" pitchFamily="34" charset="-120"/>
+              </a:rPr>
+              <a:t>Tumbling hail → near zero</a:t>
+            </a:r>
+            <a:endParaRPr lang="en-US" sz="1300" dirty="0"/>
+          </a:p>
+        </p:txBody>
+      </p:sp>
+      <p:sp>
+        <p:nvSpPr>
+          <p:cNvPr id="8" name="Shape 5"/>
+          <p:cNvSpPr/>
+          <p:nvPr/>
+        </p:nvSpPr>
+        <p:spPr>
+          <a:xfrm>
+            <a:off x="3273552" y="1554480"/>
+            <a:ext cx="2606040" cy="2377440"/>
+          </a:xfrm>
+          <a:prstGeom prst="roundRect">
+            <a:avLst>
+              <a:gd name="adj" fmla="val 3077"/>
+            </a:avLst>
+          </a:prstGeom>
+          <a:solidFill>
+            <a:srgbClr val="F1F6F8"/>
+          </a:solidFill>
+          <a:ln/>
+          <a:effectLst>
+            <a:outerShdw blurRad="88900" dist="38100" dir="5400000" algn="bl" rotWithShape="0">
+              <a:srgbClr val="1A2433">
+                <a:alpha val="16000"/>
+              </a:srgbClr>
+            </a:outerShdw>
+          </a:effectLst>
+        </p:spPr>
+        <p:txBody>
+          <a:bodyPr/>
+          <a:lstStyle/>
+          <a:p>
+            <a:endParaRPr lang="en-US"/>
+          </a:p>
+        </p:txBody>
+      </p:sp>
+      <p:sp>
+        <p:nvSpPr>
+          <p:cNvPr id="9" name="Text 6"/>
+          <p:cNvSpPr/>
+          <p:nvPr/>
+        </p:nvSpPr>
+        <p:spPr>
+          <a:xfrm>
+            <a:off x="3547872" y="1737360"/>
+            <a:ext cx="2057400" cy="365760"/>
+          </a:xfrm>
+          <a:prstGeom prst="rect">
+            <a:avLst/>
+          </a:prstGeom>
+          <a:noFill/>
+          <a:ln/>
+        </p:spPr>
+        <p:txBody>
+          <a:bodyPr wrap="square" lIns="0" tIns="0" rIns="0" bIns="0" rtlCol="0" anchor="ctr"/>
+          <a:lstStyle/>
+          <a:p>
+            <a:pPr marL="0" indent="0">
+              <a:buNone/>
+            </a:pPr>
+            <a:r>
+              <a:rPr lang="en-US" sz="1600" b="1" dirty="0">
+                <a:solidFill>
+                  <a:srgbClr val="1C7293"/>
+                </a:solidFill>
+                <a:latin typeface="Calibri" pitchFamily="34" charset="0"/>
+                <a:ea typeface="Calibri" pitchFamily="34" charset="-122"/>
+                <a:cs typeface="Calibri" pitchFamily="34" charset="-120"/>
+              </a:rPr>
+              <a:t>ρhv — variety</a:t>
+            </a:r>
+            <a:endParaRPr lang="en-US" sz="1600" dirty="0"/>
+          </a:p>
+        </p:txBody>
+      </p:sp>
+      <p:sp>
+        <p:nvSpPr>
+          <p:cNvPr id="10" name="Text 7"/>
+          <p:cNvSpPr/>
+          <p:nvPr/>
+        </p:nvSpPr>
+        <p:spPr>
+          <a:xfrm>
+            <a:off x="3584448" y="2176272"/>
+            <a:ext cx="2039112" cy="1591056"/>
+          </a:xfrm>
+          <a:prstGeom prst="rect">
+            <a:avLst/>
+          </a:prstGeom>
+          <a:noFill/>
+          <a:ln/>
+        </p:spPr>
+        <p:txBody>
+          <a:bodyPr wrap="square" lIns="0" tIns="0" rIns="0" bIns="0" rtlCol="0" anchor="t"/>
+          <a:lstStyle/>
+          <a:p>
+            <a:pPr marL="342900" indent="-342900">
+              <a:spcAft>
+                <a:spcPts val="700"/>
+              </a:spcAft>
+              <a:buSzPct val="100000"/>
+              <a:buChar char="•"/>
+            </a:pPr>
+            <a:r>
+              <a:rPr lang="en-US" sz="1300" dirty="0">
+                <a:solidFill>
+                  <a:srgbClr val="0E2A47"/>
+                </a:solidFill>
+                <a:latin typeface="Calibri" pitchFamily="34" charset="0"/>
+                <a:ea typeface="Calibri" pitchFamily="34" charset="-122"/>
+                <a:cs typeface="Calibri" pitchFamily="34" charset="-120"/>
+              </a:rPr>
+              <a:t>How uniform the mix is</a:t>
+            </a:r>
+            <a:endParaRPr lang="en-US" sz="1300" dirty="0"/>
+          </a:p>
+          <a:p>
+            <a:pPr marL="342900" indent="-342900">
+              <a:spcAft>
+                <a:spcPts val="700"/>
+              </a:spcAft>
+              <a:buSzPct val="100000"/>
+              <a:buChar char="•"/>
+            </a:pPr>
+            <a:r>
+              <a:rPr lang="en-US" sz="1300" dirty="0">
+                <a:solidFill>
+                  <a:srgbClr val="0E2A47"/>
+                </a:solidFill>
+                <a:latin typeface="Calibri" pitchFamily="34" charset="0"/>
+                <a:ea typeface="Calibri" pitchFamily="34" charset="-122"/>
+                <a:cs typeface="Calibri" pitchFamily="34" charset="-120"/>
+              </a:rPr>
+              <a:t>≈ 1 for pure rain</a:t>
+            </a:r>
+            <a:endParaRPr lang="en-US" sz="1300" dirty="0"/>
+          </a:p>
+          <a:p>
+            <a:pPr marL="342900" indent="-342900">
+              <a:spcAft>
+                <a:spcPts val="700"/>
+              </a:spcAft>
+              <a:buSzPct val="100000"/>
+              <a:buChar char="•"/>
+            </a:pPr>
+            <a:r>
+              <a:rPr lang="en-US" sz="1300" dirty="0">
+                <a:solidFill>
+                  <a:srgbClr val="0E2A47"/>
+                </a:solidFill>
+                <a:latin typeface="Calibri" pitchFamily="34" charset="0"/>
+                <a:ea typeface="Calibri" pitchFamily="34" charset="-122"/>
+                <a:cs typeface="Calibri" pitchFamily="34" charset="-120"/>
+              </a:rPr>
+              <a:t>Low for hail, melt, non-weather</a:t>
+            </a:r>
+            <a:endParaRPr lang="en-US" sz="1300" dirty="0"/>
+          </a:p>
+        </p:txBody>
+      </p:sp>
+      <p:sp>
+        <p:nvSpPr>
+          <p:cNvPr id="11" name="Shape 8"/>
+          <p:cNvSpPr/>
+          <p:nvPr/>
+        </p:nvSpPr>
+        <p:spPr>
+          <a:xfrm>
+            <a:off x="6035040" y="1554480"/>
+            <a:ext cx="2606040" cy="2377440"/>
+          </a:xfrm>
+          <a:prstGeom prst="roundRect">
+            <a:avLst>
+              <a:gd name="adj" fmla="val 3077"/>
+            </a:avLst>
+          </a:prstGeom>
+          <a:solidFill>
+            <a:srgbClr val="F1F6F8"/>
+          </a:solidFill>
+          <a:ln/>
+          <a:effectLst>
+            <a:outerShdw blurRad="88900" dist="38100" dir="5400000" algn="bl" rotWithShape="0">
+              <a:srgbClr val="1A2433">
+                <a:alpha val="16000"/>
+              </a:srgbClr>
+            </a:outerShdw>
+          </a:effectLst>
+        </p:spPr>
+        <p:txBody>
+          <a:bodyPr/>
+          <a:lstStyle/>
+          <a:p>
+            <a:endParaRPr lang="en-US"/>
+          </a:p>
+        </p:txBody>
+      </p:sp>
+      <p:sp>
+        <p:nvSpPr>
+          <p:cNvPr id="12" name="Text 9"/>
+          <p:cNvSpPr/>
+          <p:nvPr/>
+        </p:nvSpPr>
+        <p:spPr>
+          <a:xfrm>
+            <a:off x="6309360" y="1737360"/>
+            <a:ext cx="2057400" cy="365760"/>
+          </a:xfrm>
+          <a:prstGeom prst="rect">
+            <a:avLst/>
+          </a:prstGeom>
+          <a:noFill/>
+          <a:ln/>
+        </p:spPr>
+        <p:txBody>
+          <a:bodyPr wrap="square" lIns="0" tIns="0" rIns="0" bIns="0" rtlCol="0" anchor="ctr"/>
+          <a:lstStyle/>
+          <a:p>
+            <a:pPr marL="0" indent="0">
+              <a:buNone/>
+            </a:pPr>
+            <a:r>
+              <a:rPr lang="en-US" sz="1600" b="1" dirty="0">
+                <a:solidFill>
+                  <a:srgbClr val="E0A33E"/>
+                </a:solidFill>
+                <a:latin typeface="Calibri" pitchFamily="34" charset="0"/>
+                <a:ea typeface="Calibri" pitchFamily="34" charset="-122"/>
+                <a:cs typeface="Calibri" pitchFamily="34" charset="-120"/>
+              </a:rPr>
+              <a:t>KDP — phase rain</a:t>
+            </a:r>
+            <a:endParaRPr lang="en-US" sz="1600" dirty="0"/>
+          </a:p>
+        </p:txBody>
+      </p:sp>
+      <p:sp>
+        <p:nvSpPr>
+          <p:cNvPr id="13" name="Text 10"/>
+          <p:cNvSpPr/>
+          <p:nvPr/>
+        </p:nvSpPr>
+        <p:spPr>
+          <a:xfrm>
+            <a:off x="6345936" y="2176272"/>
+            <a:ext cx="2039112" cy="1591056"/>
+          </a:xfrm>
+          <a:prstGeom prst="rect">
+            <a:avLst/>
+          </a:prstGeom>
+          <a:noFill/>
+          <a:ln/>
+        </p:spPr>
+        <p:txBody>
+          <a:bodyPr wrap="square" lIns="0" tIns="0" rIns="0" bIns="0" rtlCol="0" anchor="t"/>
+          <a:lstStyle/>
+          <a:p>
+            <a:pPr marL="342900" indent="-342900">
+              <a:spcAft>
+                <a:spcPts val="700"/>
+              </a:spcAft>
+              <a:buSzPct val="100000"/>
+              <a:buChar char="•"/>
+            </a:pPr>
+            <a:r>
+              <a:rPr lang="en-US" sz="1300" dirty="0">
+                <a:solidFill>
+                  <a:srgbClr val="0E2A47"/>
+                </a:solidFill>
+                <a:latin typeface="Calibri" pitchFamily="34" charset="0"/>
+                <a:ea typeface="Calibri" pitchFamily="34" charset="-122"/>
+                <a:cs typeface="Calibri" pitchFamily="34" charset="-120"/>
+              </a:rPr>
+              <a:t>A phase-based rain rate</a:t>
+            </a:r>
+            <a:endParaRPr lang="en-US" sz="1300" dirty="0"/>
+          </a:p>
+          <a:p>
+            <a:pPr marL="342900" indent="-342900">
+              <a:spcAft>
+                <a:spcPts val="700"/>
+              </a:spcAft>
+              <a:buSzPct val="100000"/>
+              <a:buChar char="•"/>
+            </a:pPr>
+            <a:r>
+              <a:rPr lang="en-US" sz="1300" dirty="0">
+                <a:solidFill>
+                  <a:srgbClr val="0E2A47"/>
+                </a:solidFill>
+                <a:latin typeface="Calibri" pitchFamily="34" charset="0"/>
+                <a:ea typeface="Calibri" pitchFamily="34" charset="-122"/>
+                <a:cs typeface="Calibri" pitchFamily="34" charset="-120"/>
+              </a:rPr>
+              <a:t>Immune to attenuation</a:t>
+            </a:r>
+            <a:endParaRPr lang="en-US" sz="1300" dirty="0"/>
+          </a:p>
+          <a:p>
+            <a:pPr marL="342900" indent="-342900">
+              <a:spcAft>
+                <a:spcPts val="700"/>
+              </a:spcAft>
+              <a:buSzPct val="100000"/>
+              <a:buChar char="•"/>
+            </a:pPr>
+            <a:r>
+              <a:rPr lang="en-US" sz="1300" dirty="0">
+                <a:solidFill>
+                  <a:srgbClr val="0E2A47"/>
+                </a:solidFill>
+                <a:latin typeface="Calibri" pitchFamily="34" charset="0"/>
+                <a:ea typeface="Calibri" pitchFamily="34" charset="-122"/>
+                <a:cs typeface="Calibri" pitchFamily="34" charset="-120"/>
+              </a:rPr>
+              <a:t>Fixes Block 4's shadow</a:t>
+            </a:r>
+            <a:endParaRPr lang="en-US" sz="1300" dirty="0"/>
+          </a:p>
+        </p:txBody>
+      </p:sp>
+      <p:sp>
+        <p:nvSpPr>
+          <p:cNvPr id="14" name="Text 11"/>
+          <p:cNvSpPr/>
+          <p:nvPr/>
+        </p:nvSpPr>
+        <p:spPr>
+          <a:xfrm>
+            <a:off x="502920" y="4160520"/>
+            <a:ext cx="8138160" cy="365760"/>
+          </a:xfrm>
+          <a:prstGeom prst="rect">
+            <a:avLst/>
+          </a:prstGeom>
+          <a:noFill/>
+          <a:ln/>
+        </p:spPr>
+        <p:txBody>
+          <a:bodyPr wrap="square" lIns="0" tIns="0" rIns="0" bIns="0" rtlCol="0" anchor="ctr"/>
+          <a:lstStyle/>
+          <a:p>
+            <a:pPr marL="0" indent="0" algn="ctr">
+              <a:buNone/>
+            </a:pPr>
+            <a:r>
+              <a:rPr lang="en-US" sz="1250" i="1" dirty="0">
+                <a:solidFill>
+                  <a:srgbClr val="5C6B7A"/>
+                </a:solidFill>
+                <a:latin typeface="Calibri" pitchFamily="34" charset="0"/>
+                <a:ea typeface="Calibri" pitchFamily="34" charset="-122"/>
+                <a:cs typeface="Calibri" pitchFamily="34" charset="-120"/>
+              </a:rPr>
+              <a:t>Each maps to a widget: ZDR → drop shape · ρhv → particle variety · KDP → attenuation-proof rainfall.</a:t>
+            </a:r>
+            <a:endParaRPr lang="en-US" sz="1250" dirty="0"/>
+          </a:p>
+        </p:txBody>
+      </p:sp>
+    </p:spTree>
   </p:cSld>
   <p:clrMapOvr>
     <a:masterClrMapping/>
@@ -11822,6 +14831,13 @@
           </a:solidFill>
           <a:ln/>
         </p:spPr>
+        <p:txBody>
+          <a:bodyPr/>
+          <a:lstStyle/>
+          <a:p>
+            <a:endParaRPr lang="en-US"/>
+          </a:p>
+        </p:txBody>
       </p:sp>
       <p:pic>
         <p:nvPicPr>
@@ -12004,6 +15020,1775 @@
         </p:txBody>
       </p:sp>
     </p:spTree>
+  </p:cSld>
+  <p:clrMapOvr>
+    <a:masterClrMapping/>
+  </p:clrMapOvr>
+</p:sld>
+</file>
+
+<file path=ppt/slides/slide30.xml><?xml version="1.0" encoding="utf-8"?>
+<p:sld xmlns:a="http://schemas.openxmlformats.org/drawingml/2006/main" xmlns:r="http://schemas.openxmlformats.org/officeDocument/2006/relationships" xmlns:p="http://schemas.openxmlformats.org/presentationml/2006/main">
+  <p:cSld>
+    <p:spTree>
+      <p:nvGrpSpPr>
+        <p:cNvPr id="1" name=""/>
+        <p:cNvGrpSpPr/>
+        <p:nvPr/>
+      </p:nvGrpSpPr>
+      <p:grpSpPr>
+        <a:xfrm>
+          <a:off x="0" y="0"/>
+          <a:ext cx="0" cy="0"/>
+          <a:chOff x="0" y="0"/>
+          <a:chExt cx="0" cy="0"/>
+        </a:xfrm>
+      </p:grpSpPr>
+      <p:sp>
+        <p:nvSpPr>
+          <p:cNvPr id="2" name="Shape 0"/>
+          <p:cNvSpPr/>
+          <p:nvPr/>
+        </p:nvSpPr>
+        <p:spPr>
+          <a:xfrm>
+            <a:off x="548640" y="384048"/>
+            <a:ext cx="566928" cy="566928"/>
+          </a:xfrm>
+          <a:prstGeom prst="ellipse">
+            <a:avLst/>
+          </a:prstGeom>
+          <a:solidFill>
+            <a:srgbClr val="1C7293"/>
+          </a:solidFill>
+          <a:ln/>
+        </p:spPr>
+        <p:txBody>
+          <a:bodyPr/>
+          <a:lstStyle/>
+          <a:p>
+            <a:endParaRPr lang="en-US"/>
+          </a:p>
+        </p:txBody>
+      </p:sp>
+      <p:pic>
+        <p:nvPicPr>
+          <p:cNvPr id="3" name="Image 0" descr="preencoded.png"/>
+          <p:cNvPicPr>
+            <a:picLocks noChangeAspect="1"/>
+          </p:cNvPicPr>
+          <p:nvPr/>
+        </p:nvPicPr>
+        <p:blipFill>
+          <a:blip r:embed="rId3"/>
+          <a:stretch>
+            <a:fillRect/>
+          </a:stretch>
+        </p:blipFill>
+        <p:spPr>
+          <a:xfrm>
+            <a:off x="690372" y="525780"/>
+            <a:ext cx="283464" cy="283464"/>
+          </a:xfrm>
+          <a:prstGeom prst="rect">
+            <a:avLst/>
+          </a:prstGeom>
+        </p:spPr>
+      </p:pic>
+      <p:sp>
+        <p:nvSpPr>
+          <p:cNvPr id="4" name="Text 1"/>
+          <p:cNvSpPr/>
+          <p:nvPr/>
+        </p:nvSpPr>
+        <p:spPr>
+          <a:xfrm>
+            <a:off x="1298448" y="384048"/>
+            <a:ext cx="7315200" cy="566928"/>
+          </a:xfrm>
+          <a:prstGeom prst="rect">
+            <a:avLst/>
+          </a:prstGeom>
+          <a:noFill/>
+          <a:ln/>
+        </p:spPr>
+        <p:txBody>
+          <a:bodyPr wrap="square" lIns="0" tIns="0" rIns="0" bIns="0" rtlCol="0" anchor="ctr"/>
+          <a:lstStyle/>
+          <a:p>
+            <a:pPr marL="0" indent="0">
+              <a:buNone/>
+            </a:pPr>
+            <a:r>
+              <a:rPr lang="en-US" sz="2700" b="1" dirty="0">
+                <a:solidFill>
+                  <a:srgbClr val="0E2A47"/>
+                </a:solidFill>
+                <a:latin typeface="Cambria" pitchFamily="34" charset="0"/>
+                <a:ea typeface="Cambria" pitchFamily="34" charset="-122"/>
+                <a:cs typeface="Cambria" pitchFamily="34" charset="-120"/>
+              </a:rPr>
+              <a:t>From “how much” to “what is it”</a:t>
+            </a:r>
+            <a:endParaRPr lang="en-US" sz="2700" dirty="0"/>
+          </a:p>
+        </p:txBody>
+      </p:sp>
+      <p:sp>
+        <p:nvSpPr>
+          <p:cNvPr id="5" name="Shape 2"/>
+          <p:cNvSpPr/>
+          <p:nvPr/>
+        </p:nvSpPr>
+        <p:spPr>
+          <a:xfrm>
+            <a:off x="548640" y="1371600"/>
+            <a:ext cx="8046720" cy="914400"/>
+          </a:xfrm>
+          <a:prstGeom prst="roundRect">
+            <a:avLst>
+              <a:gd name="adj" fmla="val 8000"/>
+            </a:avLst>
+          </a:prstGeom>
+          <a:solidFill>
+            <a:srgbClr val="F1F6F8"/>
+          </a:solidFill>
+          <a:ln/>
+          <a:effectLst>
+            <a:outerShdw blurRad="88900" dist="38100" dir="5400000" algn="bl" rotWithShape="0">
+              <a:srgbClr val="1A2433">
+                <a:alpha val="16000"/>
+              </a:srgbClr>
+            </a:outerShdw>
+          </a:effectLst>
+        </p:spPr>
+        <p:txBody>
+          <a:bodyPr/>
+          <a:lstStyle/>
+          <a:p>
+            <a:endParaRPr lang="en-US"/>
+          </a:p>
+        </p:txBody>
+      </p:sp>
+      <p:sp>
+        <p:nvSpPr>
+          <p:cNvPr id="6" name="Shape 3"/>
+          <p:cNvSpPr/>
+          <p:nvPr/>
+        </p:nvSpPr>
+        <p:spPr>
+          <a:xfrm>
+            <a:off x="786384" y="1577340"/>
+            <a:ext cx="502920" cy="502920"/>
+          </a:xfrm>
+          <a:prstGeom prst="ellipse">
+            <a:avLst/>
+          </a:prstGeom>
+          <a:solidFill>
+            <a:srgbClr val="1C7293"/>
+          </a:solidFill>
+          <a:ln/>
+        </p:spPr>
+        <p:txBody>
+          <a:bodyPr/>
+          <a:lstStyle/>
+          <a:p>
+            <a:endParaRPr lang="en-US"/>
+          </a:p>
+        </p:txBody>
+      </p:sp>
+      <p:pic>
+        <p:nvPicPr>
+          <p:cNvPr id="7" name="Image 1" descr="preencoded.png"/>
+          <p:cNvPicPr>
+            <a:picLocks noChangeAspect="1"/>
+          </p:cNvPicPr>
+          <p:nvPr/>
+        </p:nvPicPr>
+        <p:blipFill>
+          <a:blip r:embed="rId3"/>
+          <a:stretch>
+            <a:fillRect/>
+          </a:stretch>
+        </p:blipFill>
+        <p:spPr>
+          <a:xfrm>
+            <a:off x="912114" y="1703070"/>
+            <a:ext cx="251460" cy="251460"/>
+          </a:xfrm>
+          <a:prstGeom prst="rect">
+            <a:avLst/>
+          </a:prstGeom>
+        </p:spPr>
+      </p:pic>
+      <p:sp>
+        <p:nvSpPr>
+          <p:cNvPr id="8" name="Text 4"/>
+          <p:cNvSpPr/>
+          <p:nvPr/>
+        </p:nvSpPr>
+        <p:spPr>
+          <a:xfrm>
+            <a:off x="1481328" y="1499616"/>
+            <a:ext cx="6876288" cy="310896"/>
+          </a:xfrm>
+          <a:prstGeom prst="rect">
+            <a:avLst/>
+          </a:prstGeom>
+          <a:noFill/>
+          <a:ln/>
+        </p:spPr>
+        <p:txBody>
+          <a:bodyPr wrap="square" lIns="0" tIns="0" rIns="0" bIns="0" rtlCol="0" anchor="ctr"/>
+          <a:lstStyle/>
+          <a:p>
+            <a:pPr marL="0" indent="0">
+              <a:buNone/>
+            </a:pPr>
+            <a:r>
+              <a:rPr lang="en-US" sz="1600" b="1" dirty="0">
+                <a:solidFill>
+                  <a:srgbClr val="0E2A47"/>
+                </a:solidFill>
+                <a:latin typeface="Calibri" pitchFamily="34" charset="0"/>
+                <a:ea typeface="Calibri" pitchFamily="34" charset="-122"/>
+                <a:cs typeface="Calibri" pitchFamily="34" charset="-120"/>
+              </a:rPr>
+              <a:t>Tell things apart</a:t>
+            </a:r>
+            <a:endParaRPr lang="en-US" sz="1600" dirty="0"/>
+          </a:p>
+        </p:txBody>
+      </p:sp>
+      <p:sp>
+        <p:nvSpPr>
+          <p:cNvPr id="9" name="Text 5"/>
+          <p:cNvSpPr/>
+          <p:nvPr/>
+        </p:nvSpPr>
+        <p:spPr>
+          <a:xfrm>
+            <a:off x="1481328" y="1801368"/>
+            <a:ext cx="6876288" cy="365760"/>
+          </a:xfrm>
+          <a:prstGeom prst="rect">
+            <a:avLst/>
+          </a:prstGeom>
+          <a:noFill/>
+          <a:ln/>
+        </p:spPr>
+        <p:txBody>
+          <a:bodyPr wrap="square" lIns="0" tIns="0" rIns="0" bIns="0" rtlCol="0" anchor="t"/>
+          <a:lstStyle/>
+          <a:p>
+            <a:pPr marL="0" indent="0">
+              <a:buNone/>
+            </a:pPr>
+            <a:r>
+              <a:rPr lang="en-US" sz="1250" dirty="0">
+                <a:solidFill>
+                  <a:srgbClr val="5C6B7A"/>
+                </a:solidFill>
+                <a:latin typeface="Calibri" pitchFamily="34" charset="0"/>
+                <a:ea typeface="Calibri" pitchFamily="34" charset="-122"/>
+                <a:cs typeface="Calibri" pitchFamily="34" charset="-120"/>
+              </a:rPr>
+              <a:t>Hail vs heavy rain, the melting layer, big drops — single-pol Z can't separate them; dual-pol can.</a:t>
+            </a:r>
+            <a:endParaRPr lang="en-US" sz="1250" dirty="0"/>
+          </a:p>
+        </p:txBody>
+      </p:sp>
+      <p:sp>
+        <p:nvSpPr>
+          <p:cNvPr id="10" name="Shape 6"/>
+          <p:cNvSpPr/>
+          <p:nvPr/>
+        </p:nvSpPr>
+        <p:spPr>
+          <a:xfrm>
+            <a:off x="548640" y="2395728"/>
+            <a:ext cx="8046720" cy="914400"/>
+          </a:xfrm>
+          <a:prstGeom prst="roundRect">
+            <a:avLst>
+              <a:gd name="adj" fmla="val 8000"/>
+            </a:avLst>
+          </a:prstGeom>
+          <a:solidFill>
+            <a:srgbClr val="F1F6F8"/>
+          </a:solidFill>
+          <a:ln/>
+          <a:effectLst>
+            <a:outerShdw blurRad="88900" dist="38100" dir="5400000" algn="bl" rotWithShape="0">
+              <a:srgbClr val="1A2433">
+                <a:alpha val="16000"/>
+              </a:srgbClr>
+            </a:outerShdw>
+          </a:effectLst>
+        </p:spPr>
+        <p:txBody>
+          <a:bodyPr/>
+          <a:lstStyle/>
+          <a:p>
+            <a:endParaRPr lang="en-US"/>
+          </a:p>
+        </p:txBody>
+      </p:sp>
+      <p:sp>
+        <p:nvSpPr>
+          <p:cNvPr id="11" name="Shape 7"/>
+          <p:cNvSpPr/>
+          <p:nvPr/>
+        </p:nvSpPr>
+        <p:spPr>
+          <a:xfrm>
+            <a:off x="786384" y="2601468"/>
+            <a:ext cx="502920" cy="502920"/>
+          </a:xfrm>
+          <a:prstGeom prst="ellipse">
+            <a:avLst/>
+          </a:prstGeom>
+          <a:solidFill>
+            <a:srgbClr val="1C7293"/>
+          </a:solidFill>
+          <a:ln/>
+        </p:spPr>
+        <p:txBody>
+          <a:bodyPr/>
+          <a:lstStyle/>
+          <a:p>
+            <a:endParaRPr lang="en-US"/>
+          </a:p>
+        </p:txBody>
+      </p:sp>
+      <p:pic>
+        <p:nvPicPr>
+          <p:cNvPr id="12" name="Image 2" descr="preencoded.png"/>
+          <p:cNvPicPr>
+            <a:picLocks noChangeAspect="1"/>
+          </p:cNvPicPr>
+          <p:nvPr/>
+        </p:nvPicPr>
+        <p:blipFill>
+          <a:blip r:embed="rId4"/>
+          <a:stretch>
+            <a:fillRect/>
+          </a:stretch>
+        </p:blipFill>
+        <p:spPr>
+          <a:xfrm>
+            <a:off x="912114" y="2727198"/>
+            <a:ext cx="251460" cy="251460"/>
+          </a:xfrm>
+          <a:prstGeom prst="rect">
+            <a:avLst/>
+          </a:prstGeom>
+        </p:spPr>
+      </p:pic>
+      <p:sp>
+        <p:nvSpPr>
+          <p:cNvPr id="13" name="Text 8"/>
+          <p:cNvSpPr/>
+          <p:nvPr/>
+        </p:nvSpPr>
+        <p:spPr>
+          <a:xfrm>
+            <a:off x="1481328" y="2523744"/>
+            <a:ext cx="6876288" cy="310896"/>
+          </a:xfrm>
+          <a:prstGeom prst="rect">
+            <a:avLst/>
+          </a:prstGeom>
+          <a:noFill/>
+          <a:ln/>
+        </p:spPr>
+        <p:txBody>
+          <a:bodyPr wrap="square" lIns="0" tIns="0" rIns="0" bIns="0" rtlCol="0" anchor="ctr"/>
+          <a:lstStyle/>
+          <a:p>
+            <a:pPr marL="0" indent="0">
+              <a:buNone/>
+            </a:pPr>
+            <a:r>
+              <a:rPr lang="en-US" sz="1600" b="1" dirty="0">
+                <a:solidFill>
+                  <a:srgbClr val="0E2A47"/>
+                </a:solidFill>
+                <a:latin typeface="Calibri" pitchFamily="34" charset="0"/>
+                <a:ea typeface="Calibri" pitchFamily="34" charset="-122"/>
+                <a:cs typeface="Calibri" pitchFamily="34" charset="-120"/>
+              </a:rPr>
+              <a:t>Flag non-weather</a:t>
+            </a:r>
+            <a:endParaRPr lang="en-US" sz="1600" dirty="0"/>
+          </a:p>
+        </p:txBody>
+      </p:sp>
+      <p:sp>
+        <p:nvSpPr>
+          <p:cNvPr id="14" name="Text 9"/>
+          <p:cNvSpPr/>
+          <p:nvPr/>
+        </p:nvSpPr>
+        <p:spPr>
+          <a:xfrm>
+            <a:off x="1481328" y="2825496"/>
+            <a:ext cx="6876288" cy="365760"/>
+          </a:xfrm>
+          <a:prstGeom prst="rect">
+            <a:avLst/>
+          </a:prstGeom>
+          <a:noFill/>
+          <a:ln/>
+        </p:spPr>
+        <p:txBody>
+          <a:bodyPr wrap="square" lIns="0" tIns="0" rIns="0" bIns="0" rtlCol="0" anchor="t"/>
+          <a:lstStyle/>
+          <a:p>
+            <a:pPr marL="0" indent="0">
+              <a:buNone/>
+            </a:pPr>
+            <a:r>
+              <a:rPr lang="en-US" sz="1250" dirty="0">
+                <a:solidFill>
+                  <a:srgbClr val="5C6B7A"/>
+                </a:solidFill>
+                <a:latin typeface="Calibri" pitchFamily="34" charset="0"/>
+                <a:ea typeface="Calibri" pitchFamily="34" charset="-122"/>
+                <a:cs typeface="Calibri" pitchFamily="34" charset="-120"/>
+              </a:rPr>
+              <a:t>Birds, insects, and ground clutter show very low ρhv — easy to screen out.</a:t>
+            </a:r>
+            <a:endParaRPr lang="en-US" sz="1250" dirty="0"/>
+          </a:p>
+        </p:txBody>
+      </p:sp>
+      <p:sp>
+        <p:nvSpPr>
+          <p:cNvPr id="15" name="Shape 10"/>
+          <p:cNvSpPr/>
+          <p:nvPr/>
+        </p:nvSpPr>
+        <p:spPr>
+          <a:xfrm>
+            <a:off x="548640" y="3419856"/>
+            <a:ext cx="8046720" cy="914400"/>
+          </a:xfrm>
+          <a:prstGeom prst="roundRect">
+            <a:avLst>
+              <a:gd name="adj" fmla="val 8000"/>
+            </a:avLst>
+          </a:prstGeom>
+          <a:solidFill>
+            <a:srgbClr val="F1F6F8"/>
+          </a:solidFill>
+          <a:ln/>
+          <a:effectLst>
+            <a:outerShdw blurRad="88900" dist="38100" dir="5400000" algn="bl" rotWithShape="0">
+              <a:srgbClr val="1A2433">
+                <a:alpha val="16000"/>
+              </a:srgbClr>
+            </a:outerShdw>
+          </a:effectLst>
+        </p:spPr>
+        <p:txBody>
+          <a:bodyPr/>
+          <a:lstStyle/>
+          <a:p>
+            <a:endParaRPr lang="en-US"/>
+          </a:p>
+        </p:txBody>
+      </p:sp>
+      <p:sp>
+        <p:nvSpPr>
+          <p:cNvPr id="16" name="Shape 11"/>
+          <p:cNvSpPr/>
+          <p:nvPr/>
+        </p:nvSpPr>
+        <p:spPr>
+          <a:xfrm>
+            <a:off x="786384" y="3625596"/>
+            <a:ext cx="502920" cy="502920"/>
+          </a:xfrm>
+          <a:prstGeom prst="ellipse">
+            <a:avLst/>
+          </a:prstGeom>
+          <a:solidFill>
+            <a:srgbClr val="1C7293"/>
+          </a:solidFill>
+          <a:ln/>
+        </p:spPr>
+        <p:txBody>
+          <a:bodyPr/>
+          <a:lstStyle/>
+          <a:p>
+            <a:endParaRPr lang="en-US"/>
+          </a:p>
+        </p:txBody>
+      </p:sp>
+      <p:pic>
+        <p:nvPicPr>
+          <p:cNvPr id="17" name="Image 3" descr="preencoded.png"/>
+          <p:cNvPicPr>
+            <a:picLocks noChangeAspect="1"/>
+          </p:cNvPicPr>
+          <p:nvPr/>
+        </p:nvPicPr>
+        <p:blipFill>
+          <a:blip r:embed="rId5"/>
+          <a:stretch>
+            <a:fillRect/>
+          </a:stretch>
+        </p:blipFill>
+        <p:spPr>
+          <a:xfrm>
+            <a:off x="912114" y="3751326"/>
+            <a:ext cx="251460" cy="251460"/>
+          </a:xfrm>
+          <a:prstGeom prst="rect">
+            <a:avLst/>
+          </a:prstGeom>
+        </p:spPr>
+      </p:pic>
+      <p:sp>
+        <p:nvSpPr>
+          <p:cNvPr id="18" name="Text 12"/>
+          <p:cNvSpPr/>
+          <p:nvPr/>
+        </p:nvSpPr>
+        <p:spPr>
+          <a:xfrm>
+            <a:off x="1481328" y="3547872"/>
+            <a:ext cx="6876288" cy="310896"/>
+          </a:xfrm>
+          <a:prstGeom prst="rect">
+            <a:avLst/>
+          </a:prstGeom>
+          <a:noFill/>
+          <a:ln/>
+        </p:spPr>
+        <p:txBody>
+          <a:bodyPr wrap="square" lIns="0" tIns="0" rIns="0" bIns="0" rtlCol="0" anchor="ctr"/>
+          <a:lstStyle/>
+          <a:p>
+            <a:pPr marL="0" indent="0">
+              <a:buNone/>
+            </a:pPr>
+            <a:r>
+              <a:rPr lang="en-US" sz="1600" b="1" dirty="0">
+                <a:solidFill>
+                  <a:srgbClr val="0E2A47"/>
+                </a:solidFill>
+                <a:latin typeface="Calibri" pitchFamily="34" charset="0"/>
+                <a:ea typeface="Calibri" pitchFamily="34" charset="-122"/>
+                <a:cs typeface="Calibri" pitchFamily="34" charset="-120"/>
+              </a:rPr>
+              <a:t>Rescue rainfall</a:t>
+            </a:r>
+            <a:endParaRPr lang="en-US" sz="1600" dirty="0"/>
+          </a:p>
+        </p:txBody>
+      </p:sp>
+      <p:sp>
+        <p:nvSpPr>
+          <p:cNvPr id="19" name="Text 13"/>
+          <p:cNvSpPr/>
+          <p:nvPr/>
+        </p:nvSpPr>
+        <p:spPr>
+          <a:xfrm>
+            <a:off x="1481328" y="3849624"/>
+            <a:ext cx="6876288" cy="365760"/>
+          </a:xfrm>
+          <a:prstGeom prst="rect">
+            <a:avLst/>
+          </a:prstGeom>
+          <a:noFill/>
+          <a:ln/>
+        </p:spPr>
+        <p:txBody>
+          <a:bodyPr wrap="square" lIns="0" tIns="0" rIns="0" bIns="0" rtlCol="0" anchor="t"/>
+          <a:lstStyle/>
+          <a:p>
+            <a:pPr marL="0" indent="0">
+              <a:buNone/>
+            </a:pPr>
+            <a:r>
+              <a:rPr lang="en-US" sz="1250" dirty="0">
+                <a:solidFill>
+                  <a:srgbClr val="5C6B7A"/>
+                </a:solidFill>
+                <a:latin typeface="Calibri" pitchFamily="34" charset="0"/>
+                <a:ea typeface="Calibri" pitchFamily="34" charset="-122"/>
+                <a:cs typeface="Calibri" pitchFamily="34" charset="-120"/>
+              </a:rPr>
+              <a:t>KDP measures rain through a phase that attenuation can't touch — the fix for Block 4's shadow.</a:t>
+            </a:r>
+            <a:endParaRPr lang="en-US" sz="1250" dirty="0"/>
+          </a:p>
+        </p:txBody>
+      </p:sp>
+      <p:sp>
+        <p:nvSpPr>
+          <p:cNvPr id="20" name="Shape 14"/>
+          <p:cNvSpPr/>
+          <p:nvPr/>
+        </p:nvSpPr>
+        <p:spPr>
+          <a:xfrm>
+            <a:off x="548640" y="4498848"/>
+            <a:ext cx="8046720" cy="548640"/>
+          </a:xfrm>
+          <a:prstGeom prst="roundRect">
+            <a:avLst>
+              <a:gd name="adj" fmla="val 15000"/>
+            </a:avLst>
+          </a:prstGeom>
+          <a:solidFill>
+            <a:srgbClr val="FBEFD7"/>
+          </a:solidFill>
+          <a:ln/>
+          <a:effectLst>
+            <a:outerShdw blurRad="88900" dist="38100" dir="5400000" algn="bl" rotWithShape="0">
+              <a:srgbClr val="1A2433">
+                <a:alpha val="16000"/>
+              </a:srgbClr>
+            </a:outerShdw>
+          </a:effectLst>
+        </p:spPr>
+        <p:txBody>
+          <a:bodyPr/>
+          <a:lstStyle/>
+          <a:p>
+            <a:endParaRPr lang="en-US"/>
+          </a:p>
+        </p:txBody>
+      </p:sp>
+      <p:sp>
+        <p:nvSpPr>
+          <p:cNvPr id="21" name="Text 15"/>
+          <p:cNvSpPr/>
+          <p:nvPr/>
+        </p:nvSpPr>
+        <p:spPr>
+          <a:xfrm>
+            <a:off x="822960" y="4498848"/>
+            <a:ext cx="7498080" cy="548640"/>
+          </a:xfrm>
+          <a:prstGeom prst="rect">
+            <a:avLst/>
+          </a:prstGeom>
+          <a:noFill/>
+          <a:ln/>
+        </p:spPr>
+        <p:txBody>
+          <a:bodyPr wrap="square" lIns="0" tIns="0" rIns="0" bIns="0" rtlCol="0" anchor="ctr"/>
+          <a:lstStyle/>
+          <a:p>
+            <a:pPr marL="0" indent="0" algn="ctr">
+              <a:buNone/>
+            </a:pPr>
+            <a:r>
+              <a:rPr lang="en-US" sz="1800" b="1" i="1" dirty="0">
+                <a:solidFill>
+                  <a:srgbClr val="9A6A12"/>
+                </a:solidFill>
+                <a:latin typeface="Cambria" pitchFamily="34" charset="0"/>
+                <a:ea typeface="Cambria" pitchFamily="34" charset="-122"/>
+                <a:cs typeface="Cambria" pitchFamily="34" charset="-120"/>
+              </a:rPr>
+              <a:t>Z says how much. Dual-pol says what it is.</a:t>
+            </a:r>
+            <a:endParaRPr lang="en-US" sz="1800" dirty="0"/>
+          </a:p>
+        </p:txBody>
+      </p:sp>
+    </p:spTree>
+  </p:cSld>
+  <p:clrMapOvr>
+    <a:masterClrMapping/>
+  </p:clrMapOvr>
+</p:sld>
+</file>
+
+<file path=ppt/slides/slide31.xml><?xml version="1.0" encoding="utf-8"?>
+<p:sld xmlns:a="http://schemas.openxmlformats.org/drawingml/2006/main" xmlns:r="http://schemas.openxmlformats.org/officeDocument/2006/relationships" xmlns:p="http://schemas.openxmlformats.org/presentationml/2006/main">
+  <p:cSld>
+    <p:spTree>
+      <p:nvGrpSpPr>
+        <p:cNvPr id="1" name=""/>
+        <p:cNvGrpSpPr/>
+        <p:nvPr/>
+      </p:nvGrpSpPr>
+      <p:grpSpPr>
+        <a:xfrm>
+          <a:off x="0" y="0"/>
+          <a:ext cx="0" cy="0"/>
+          <a:chOff x="0" y="0"/>
+          <a:chExt cx="0" cy="0"/>
+        </a:xfrm>
+      </p:grpSpPr>
+      <p:sp>
+        <p:nvSpPr>
+          <p:cNvPr id="2" name="Shape 0"/>
+          <p:cNvSpPr/>
+          <p:nvPr/>
+        </p:nvSpPr>
+        <p:spPr>
+          <a:xfrm>
+            <a:off x="548640" y="384048"/>
+            <a:ext cx="566928" cy="566928"/>
+          </a:xfrm>
+          <a:prstGeom prst="ellipse">
+            <a:avLst/>
+          </a:prstGeom>
+          <a:solidFill>
+            <a:srgbClr val="1C7293"/>
+          </a:solidFill>
+          <a:ln/>
+        </p:spPr>
+        <p:txBody>
+          <a:bodyPr/>
+          <a:lstStyle/>
+          <a:p>
+            <a:endParaRPr lang="en-US"/>
+          </a:p>
+        </p:txBody>
+      </p:sp>
+      <p:pic>
+        <p:nvPicPr>
+          <p:cNvPr id="3" name="Image 0" descr="preencoded.png"/>
+          <p:cNvPicPr>
+            <a:picLocks noChangeAspect="1"/>
+          </p:cNvPicPr>
+          <p:nvPr/>
+        </p:nvPicPr>
+        <p:blipFill>
+          <a:blip r:embed="rId3"/>
+          <a:stretch>
+            <a:fillRect/>
+          </a:stretch>
+        </p:blipFill>
+        <p:spPr>
+          <a:xfrm>
+            <a:off x="690372" y="525780"/>
+            <a:ext cx="283464" cy="283464"/>
+          </a:xfrm>
+          <a:prstGeom prst="rect">
+            <a:avLst/>
+          </a:prstGeom>
+        </p:spPr>
+      </p:pic>
+      <p:sp>
+        <p:nvSpPr>
+          <p:cNvPr id="4" name="Text 1"/>
+          <p:cNvSpPr/>
+          <p:nvPr/>
+        </p:nvSpPr>
+        <p:spPr>
+          <a:xfrm>
+            <a:off x="1298448" y="384048"/>
+            <a:ext cx="7315200" cy="566928"/>
+          </a:xfrm>
+          <a:prstGeom prst="rect">
+            <a:avLst/>
+          </a:prstGeom>
+          <a:noFill/>
+          <a:ln/>
+        </p:spPr>
+        <p:txBody>
+          <a:bodyPr wrap="square" lIns="0" tIns="0" rIns="0" bIns="0" rtlCol="0" anchor="ctr"/>
+          <a:lstStyle/>
+          <a:p>
+            <a:pPr marL="0" indent="0">
+              <a:buNone/>
+            </a:pPr>
+            <a:r>
+              <a:rPr lang="en-US" sz="2700" b="1" dirty="0">
+                <a:solidFill>
+                  <a:srgbClr val="0E2A47"/>
+                </a:solidFill>
+                <a:latin typeface="Cambria" pitchFamily="34" charset="0"/>
+                <a:ea typeface="Cambria" pitchFamily="34" charset="-122"/>
+                <a:cs typeface="Cambria" pitchFamily="34" charset="-120"/>
+              </a:rPr>
+              <a:t>What you'll do</a:t>
+            </a:r>
+            <a:endParaRPr lang="en-US" sz="2700" dirty="0"/>
+          </a:p>
+        </p:txBody>
+      </p:sp>
+      <p:sp>
+        <p:nvSpPr>
+          <p:cNvPr id="5" name="Shape 2"/>
+          <p:cNvSpPr/>
+          <p:nvPr/>
+        </p:nvSpPr>
+        <p:spPr>
+          <a:xfrm>
+            <a:off x="548640" y="1371600"/>
+            <a:ext cx="8046720" cy="914400"/>
+          </a:xfrm>
+          <a:prstGeom prst="roundRect">
+            <a:avLst>
+              <a:gd name="adj" fmla="val 8000"/>
+            </a:avLst>
+          </a:prstGeom>
+          <a:solidFill>
+            <a:srgbClr val="F1F6F8"/>
+          </a:solidFill>
+          <a:ln/>
+          <a:effectLst>
+            <a:outerShdw blurRad="88900" dist="38100" dir="5400000" algn="bl" rotWithShape="0">
+              <a:srgbClr val="1A2433">
+                <a:alpha val="16000"/>
+              </a:srgbClr>
+            </a:outerShdw>
+          </a:effectLst>
+        </p:spPr>
+        <p:txBody>
+          <a:bodyPr/>
+          <a:lstStyle/>
+          <a:p>
+            <a:endParaRPr lang="en-US"/>
+          </a:p>
+        </p:txBody>
+      </p:sp>
+      <p:sp>
+        <p:nvSpPr>
+          <p:cNvPr id="6" name="Shape 3"/>
+          <p:cNvSpPr/>
+          <p:nvPr/>
+        </p:nvSpPr>
+        <p:spPr>
+          <a:xfrm>
+            <a:off x="786384" y="1577340"/>
+            <a:ext cx="502920" cy="502920"/>
+          </a:xfrm>
+          <a:prstGeom prst="ellipse">
+            <a:avLst/>
+          </a:prstGeom>
+          <a:solidFill>
+            <a:srgbClr val="1C7293"/>
+          </a:solidFill>
+          <a:ln/>
+        </p:spPr>
+        <p:txBody>
+          <a:bodyPr/>
+          <a:lstStyle/>
+          <a:p>
+            <a:endParaRPr lang="en-US"/>
+          </a:p>
+        </p:txBody>
+      </p:sp>
+      <p:pic>
+        <p:nvPicPr>
+          <p:cNvPr id="7" name="Image 1" descr="preencoded.png"/>
+          <p:cNvPicPr>
+            <a:picLocks noChangeAspect="1"/>
+          </p:cNvPicPr>
+          <p:nvPr/>
+        </p:nvPicPr>
+        <p:blipFill>
+          <a:blip r:embed="rId3"/>
+          <a:stretch>
+            <a:fillRect/>
+          </a:stretch>
+        </p:blipFill>
+        <p:spPr>
+          <a:xfrm>
+            <a:off x="912114" y="1703070"/>
+            <a:ext cx="251460" cy="251460"/>
+          </a:xfrm>
+          <a:prstGeom prst="rect">
+            <a:avLst/>
+          </a:prstGeom>
+        </p:spPr>
+      </p:pic>
+      <p:sp>
+        <p:nvSpPr>
+          <p:cNvPr id="8" name="Text 4"/>
+          <p:cNvSpPr/>
+          <p:nvPr/>
+        </p:nvSpPr>
+        <p:spPr>
+          <a:xfrm>
+            <a:off x="1481328" y="1499616"/>
+            <a:ext cx="6876288" cy="310896"/>
+          </a:xfrm>
+          <a:prstGeom prst="rect">
+            <a:avLst/>
+          </a:prstGeom>
+          <a:noFill/>
+          <a:ln/>
+        </p:spPr>
+        <p:txBody>
+          <a:bodyPr wrap="square" lIns="0" tIns="0" rIns="0" bIns="0" rtlCol="0" anchor="ctr"/>
+          <a:lstStyle/>
+          <a:p>
+            <a:pPr marL="0" indent="0">
+              <a:buNone/>
+            </a:pPr>
+            <a:r>
+              <a:rPr lang="en-US" sz="1600" b="1" dirty="0">
+                <a:solidFill>
+                  <a:srgbClr val="0E2A47"/>
+                </a:solidFill>
+                <a:latin typeface="Calibri" pitchFamily="34" charset="0"/>
+                <a:ea typeface="Calibri" pitchFamily="34" charset="-122"/>
+                <a:cs typeface="Calibri" pitchFamily="34" charset="-120"/>
+              </a:rPr>
+              <a:t>Three widgets</a:t>
+            </a:r>
+            <a:endParaRPr lang="en-US" sz="1600" dirty="0"/>
+          </a:p>
+        </p:txBody>
+      </p:sp>
+      <p:sp>
+        <p:nvSpPr>
+          <p:cNvPr id="9" name="Text 5"/>
+          <p:cNvSpPr/>
+          <p:nvPr/>
+        </p:nvSpPr>
+        <p:spPr>
+          <a:xfrm>
+            <a:off x="1481328" y="1801368"/>
+            <a:ext cx="6876288" cy="365760"/>
+          </a:xfrm>
+          <a:prstGeom prst="rect">
+            <a:avLst/>
+          </a:prstGeom>
+          <a:noFill/>
+          <a:ln/>
+        </p:spPr>
+        <p:txBody>
+          <a:bodyPr wrap="square" lIns="0" tIns="0" rIns="0" bIns="0" rtlCol="0" anchor="t"/>
+          <a:lstStyle/>
+          <a:p>
+            <a:pPr marL="0" indent="0">
+              <a:buNone/>
+            </a:pPr>
+            <a:r>
+              <a:rPr lang="en-US" sz="1250" dirty="0">
+                <a:solidFill>
+                  <a:srgbClr val="5C6B7A"/>
+                </a:solidFill>
+                <a:latin typeface="Calibri" pitchFamily="34" charset="0"/>
+                <a:ea typeface="Calibri" pitchFamily="34" charset="-122"/>
+                <a:cs typeface="Calibri" pitchFamily="34" charset="-120"/>
+              </a:rPr>
+              <a:t>ZDR &amp; drop shape · ρhv &amp; particle variety · KDP &amp; attenuation-proof rainfall.</a:t>
+            </a:r>
+            <a:endParaRPr lang="en-US" sz="1250" dirty="0"/>
+          </a:p>
+        </p:txBody>
+      </p:sp>
+      <p:sp>
+        <p:nvSpPr>
+          <p:cNvPr id="10" name="Shape 6"/>
+          <p:cNvSpPr/>
+          <p:nvPr/>
+        </p:nvSpPr>
+        <p:spPr>
+          <a:xfrm>
+            <a:off x="548640" y="2395728"/>
+            <a:ext cx="8046720" cy="914400"/>
+          </a:xfrm>
+          <a:prstGeom prst="roundRect">
+            <a:avLst>
+              <a:gd name="adj" fmla="val 8000"/>
+            </a:avLst>
+          </a:prstGeom>
+          <a:solidFill>
+            <a:srgbClr val="F1F6F8"/>
+          </a:solidFill>
+          <a:ln/>
+          <a:effectLst>
+            <a:outerShdw blurRad="88900" dist="38100" dir="5400000" algn="bl" rotWithShape="0">
+              <a:srgbClr val="1A2433">
+                <a:alpha val="16000"/>
+              </a:srgbClr>
+            </a:outerShdw>
+          </a:effectLst>
+        </p:spPr>
+        <p:txBody>
+          <a:bodyPr/>
+          <a:lstStyle/>
+          <a:p>
+            <a:endParaRPr lang="en-US"/>
+          </a:p>
+        </p:txBody>
+      </p:sp>
+      <p:sp>
+        <p:nvSpPr>
+          <p:cNvPr id="11" name="Shape 7"/>
+          <p:cNvSpPr/>
+          <p:nvPr/>
+        </p:nvSpPr>
+        <p:spPr>
+          <a:xfrm>
+            <a:off x="786384" y="2601468"/>
+            <a:ext cx="502920" cy="502920"/>
+          </a:xfrm>
+          <a:prstGeom prst="ellipse">
+            <a:avLst/>
+          </a:prstGeom>
+          <a:solidFill>
+            <a:srgbClr val="1C7293"/>
+          </a:solidFill>
+          <a:ln/>
+        </p:spPr>
+        <p:txBody>
+          <a:bodyPr/>
+          <a:lstStyle/>
+          <a:p>
+            <a:endParaRPr lang="en-US"/>
+          </a:p>
+        </p:txBody>
+      </p:sp>
+      <p:pic>
+        <p:nvPicPr>
+          <p:cNvPr id="12" name="Image 2" descr="preencoded.png"/>
+          <p:cNvPicPr>
+            <a:picLocks noChangeAspect="1"/>
+          </p:cNvPicPr>
+          <p:nvPr/>
+        </p:nvPicPr>
+        <p:blipFill>
+          <a:blip r:embed="rId4"/>
+          <a:stretch>
+            <a:fillRect/>
+          </a:stretch>
+        </p:blipFill>
+        <p:spPr>
+          <a:xfrm>
+            <a:off x="912114" y="2727198"/>
+            <a:ext cx="251460" cy="251460"/>
+          </a:xfrm>
+          <a:prstGeom prst="rect">
+            <a:avLst/>
+          </a:prstGeom>
+        </p:spPr>
+      </p:pic>
+      <p:sp>
+        <p:nvSpPr>
+          <p:cNvPr id="13" name="Text 8"/>
+          <p:cNvSpPr/>
+          <p:nvPr/>
+        </p:nvSpPr>
+        <p:spPr>
+          <a:xfrm>
+            <a:off x="1481328" y="2523744"/>
+            <a:ext cx="6876288" cy="310896"/>
+          </a:xfrm>
+          <a:prstGeom prst="rect">
+            <a:avLst/>
+          </a:prstGeom>
+          <a:noFill/>
+          <a:ln/>
+        </p:spPr>
+        <p:txBody>
+          <a:bodyPr wrap="square" lIns="0" tIns="0" rIns="0" bIns="0" rtlCol="0" anchor="ctr"/>
+          <a:lstStyle/>
+          <a:p>
+            <a:pPr marL="0" indent="0">
+              <a:buNone/>
+            </a:pPr>
+            <a:r>
+              <a:rPr lang="en-US" sz="1600" b="1" dirty="0">
+                <a:solidFill>
+                  <a:srgbClr val="0E2A47"/>
+                </a:solidFill>
+                <a:latin typeface="Calibri" pitchFamily="34" charset="0"/>
+                <a:ea typeface="Calibri" pitchFamily="34" charset="-122"/>
+                <a:cs typeface="Calibri" pitchFamily="34" charset="-120"/>
+              </a:rPr>
+              <a:t>Real data</a:t>
+            </a:r>
+            <a:endParaRPr lang="en-US" sz="1600" dirty="0"/>
+          </a:p>
+        </p:txBody>
+      </p:sp>
+      <p:sp>
+        <p:nvSpPr>
+          <p:cNvPr id="14" name="Text 9"/>
+          <p:cNvSpPr/>
+          <p:nvPr/>
+        </p:nvSpPr>
+        <p:spPr>
+          <a:xfrm>
+            <a:off x="1481328" y="2825496"/>
+            <a:ext cx="6876288" cy="365760"/>
+          </a:xfrm>
+          <a:prstGeom prst="rect">
+            <a:avLst/>
+          </a:prstGeom>
+          <a:noFill/>
+          <a:ln/>
+        </p:spPr>
+        <p:txBody>
+          <a:bodyPr wrap="square" lIns="0" tIns="0" rIns="0" bIns="0" rtlCol="0" anchor="t"/>
+          <a:lstStyle/>
+          <a:p>
+            <a:pPr marL="0" indent="0">
+              <a:buNone/>
+            </a:pPr>
+            <a:r>
+              <a:rPr lang="en-US" sz="1250" dirty="0">
+                <a:solidFill>
+                  <a:srgbClr val="5C6B7A"/>
+                </a:solidFill>
+                <a:latin typeface="Calibri" pitchFamily="34" charset="0"/>
+                <a:ea typeface="Calibri" pitchFamily="34" charset="-122"/>
+                <a:cs typeface="Calibri" pitchFamily="34" charset="-120"/>
+              </a:rPr>
+              <a:t>KTLX (Moore, 20 May 2013) — Z, ZDR, ρhv, and ΦDP of one storm, side by side.</a:t>
+            </a:r>
+            <a:endParaRPr lang="en-US" sz="1250" dirty="0"/>
+          </a:p>
+        </p:txBody>
+      </p:sp>
+      <p:sp>
+        <p:nvSpPr>
+          <p:cNvPr id="15" name="Shape 10"/>
+          <p:cNvSpPr/>
+          <p:nvPr/>
+        </p:nvSpPr>
+        <p:spPr>
+          <a:xfrm>
+            <a:off x="548640" y="3529584"/>
+            <a:ext cx="8046720" cy="914400"/>
+          </a:xfrm>
+          <a:prstGeom prst="roundRect">
+            <a:avLst>
+              <a:gd name="adj" fmla="val 9000"/>
+            </a:avLst>
+          </a:prstGeom>
+          <a:solidFill>
+            <a:srgbClr val="0E2A47"/>
+          </a:solidFill>
+          <a:ln/>
+          <a:effectLst>
+            <a:outerShdw blurRad="88900" dist="38100" dir="5400000" algn="bl" rotWithShape="0">
+              <a:srgbClr val="1A2433">
+                <a:alpha val="16000"/>
+              </a:srgbClr>
+            </a:outerShdw>
+          </a:effectLst>
+        </p:spPr>
+        <p:txBody>
+          <a:bodyPr/>
+          <a:lstStyle/>
+          <a:p>
+            <a:endParaRPr lang="en-US"/>
+          </a:p>
+        </p:txBody>
+      </p:sp>
+      <p:sp>
+        <p:nvSpPr>
+          <p:cNvPr id="16" name="Shape 11"/>
+          <p:cNvSpPr/>
+          <p:nvPr/>
+        </p:nvSpPr>
+        <p:spPr>
+          <a:xfrm>
+            <a:off x="822960" y="3712464"/>
+            <a:ext cx="548640" cy="548640"/>
+          </a:xfrm>
+          <a:prstGeom prst="ellipse">
+            <a:avLst/>
+          </a:prstGeom>
+          <a:solidFill>
+            <a:srgbClr val="E0A33E"/>
+          </a:solidFill>
+          <a:ln/>
+        </p:spPr>
+        <p:txBody>
+          <a:bodyPr/>
+          <a:lstStyle/>
+          <a:p>
+            <a:endParaRPr lang="en-US"/>
+          </a:p>
+        </p:txBody>
+      </p:sp>
+      <p:pic>
+        <p:nvPicPr>
+          <p:cNvPr id="17" name="Image 3" descr="preencoded.png"/>
+          <p:cNvPicPr>
+            <a:picLocks noChangeAspect="1"/>
+          </p:cNvPicPr>
+          <p:nvPr/>
+        </p:nvPicPr>
+        <p:blipFill>
+          <a:blip r:embed="rId5"/>
+          <a:stretch>
+            <a:fillRect/>
+          </a:stretch>
+        </p:blipFill>
+        <p:spPr>
+          <a:xfrm>
+            <a:off x="960120" y="3849624"/>
+            <a:ext cx="274320" cy="274320"/>
+          </a:xfrm>
+          <a:prstGeom prst="rect">
+            <a:avLst/>
+          </a:prstGeom>
+        </p:spPr>
+      </p:pic>
+      <p:sp>
+        <p:nvSpPr>
+          <p:cNvPr id="18" name="Text 12"/>
+          <p:cNvSpPr/>
+          <p:nvPr/>
+        </p:nvSpPr>
+        <p:spPr>
+          <a:xfrm>
+            <a:off x="1572768" y="3675888"/>
+            <a:ext cx="6748272" cy="621792"/>
+          </a:xfrm>
+          <a:prstGeom prst="rect">
+            <a:avLst/>
+          </a:prstGeom>
+          <a:noFill/>
+          <a:ln/>
+        </p:spPr>
+        <p:txBody>
+          <a:bodyPr wrap="square" lIns="0" tIns="0" rIns="0" bIns="0" rtlCol="0" anchor="ctr"/>
+          <a:lstStyle/>
+          <a:p>
+            <a:pPr marL="0" indent="0">
+              <a:buNone/>
+            </a:pPr>
+            <a:r>
+              <a:rPr lang="en-US" sz="1050" b="1" kern="0" spc="200" dirty="0">
+                <a:solidFill>
+                  <a:srgbClr val="E0A33E"/>
+                </a:solidFill>
+                <a:latin typeface="Calibri" pitchFamily="34" charset="0"/>
+                <a:ea typeface="Calibri" pitchFamily="34" charset="-122"/>
+                <a:cs typeface="Calibri" pitchFamily="34" charset="-120"/>
+              </a:rPr>
+              <a:t>TAKEAWAY</a:t>
+            </a:r>
+            <a:endParaRPr lang="en-US" sz="1050" dirty="0"/>
+          </a:p>
+          <a:p>
+            <a:pPr marL="0" indent="0">
+              <a:buNone/>
+            </a:pPr>
+            <a:r>
+              <a:rPr lang="en-US" sz="1350" dirty="0">
+                <a:solidFill>
+                  <a:srgbClr val="FFFFFF"/>
+                </a:solidFill>
+                <a:latin typeface="Calibri" pitchFamily="34" charset="0"/>
+                <a:ea typeface="Calibri" pitchFamily="34" charset="-122"/>
+                <a:cs typeface="Calibri" pitchFamily="34" charset="-120"/>
+              </a:rPr>
+              <a:t>A single polarization tells you how much; two tell you what it is — ZDR reads shape, ρhv reads variety, KDP measures rain through attenuation.</a:t>
+            </a:r>
+            <a:endParaRPr lang="en-US" sz="1050" dirty="0"/>
+          </a:p>
+        </p:txBody>
+      </p:sp>
+    </p:spTree>
+  </p:cSld>
+  <p:clrMapOvr>
+    <a:masterClrMapping/>
+  </p:clrMapOvr>
+</p:sld>
+</file>
+
+<file path=ppt/slides/slide32.xml><?xml version="1.0" encoding="utf-8"?>
+<p:sld xmlns:a="http://schemas.openxmlformats.org/drawingml/2006/main" xmlns:r="http://schemas.openxmlformats.org/officeDocument/2006/relationships" xmlns:p="http://schemas.openxmlformats.org/presentationml/2006/main">
+  <p:cSld>
+    <p:spTree>
+      <p:nvGrpSpPr>
+        <p:cNvPr id="1" name="">
+          <a:extLst>
+            <a:ext uri="{FF2B5EF4-FFF2-40B4-BE49-F238E27FC236}">
+              <a16:creationId xmlns:a16="http://schemas.microsoft.com/office/drawing/2014/main" id="{23E57054-B722-E850-6D68-6B2933220ABD}"/>
+            </a:ext>
+          </a:extLst>
+        </p:cNvPr>
+        <p:cNvGrpSpPr/>
+        <p:nvPr/>
+      </p:nvGrpSpPr>
+      <p:grpSpPr>
+        <a:xfrm>
+          <a:off x="0" y="0"/>
+          <a:ext cx="0" cy="0"/>
+          <a:chOff x="0" y="0"/>
+          <a:chExt cx="0" cy="0"/>
+        </a:xfrm>
+      </p:grpSpPr>
+      <p:pic>
+        <p:nvPicPr>
+          <p:cNvPr id="3" name="Image 0" descr="preencoded.png">
+            <a:extLst>
+              <a:ext uri="{FF2B5EF4-FFF2-40B4-BE49-F238E27FC236}">
+                <a16:creationId xmlns:a16="http://schemas.microsoft.com/office/drawing/2014/main" id="{9EF7A8EF-277B-A0C6-23FB-93500D0B1731}"/>
+              </a:ext>
+            </a:extLst>
+          </p:cNvPr>
+          <p:cNvPicPr>
+            <a:picLocks noChangeAspect="1"/>
+          </p:cNvPicPr>
+          <p:nvPr/>
+        </p:nvPicPr>
+        <p:blipFill>
+          <a:blip r:embed="rId3"/>
+          <a:stretch>
+            <a:fillRect/>
+          </a:stretch>
+        </p:blipFill>
+        <p:spPr>
+          <a:xfrm>
+            <a:off x="690372" y="525780"/>
+            <a:ext cx="283464" cy="283464"/>
+          </a:xfrm>
+          <a:prstGeom prst="rect">
+            <a:avLst/>
+          </a:prstGeom>
+        </p:spPr>
+      </p:pic>
+      <p:sp>
+        <p:nvSpPr>
+          <p:cNvPr id="4" name="Text 1">
+            <a:extLst>
+              <a:ext uri="{FF2B5EF4-FFF2-40B4-BE49-F238E27FC236}">
+                <a16:creationId xmlns:a16="http://schemas.microsoft.com/office/drawing/2014/main" id="{283DB529-5F25-32C4-D1BA-5760686116FD}"/>
+              </a:ext>
+            </a:extLst>
+          </p:cNvPr>
+          <p:cNvSpPr/>
+          <p:nvPr/>
+        </p:nvSpPr>
+        <p:spPr>
+          <a:xfrm>
+            <a:off x="1389888" y="536448"/>
+            <a:ext cx="7315200" cy="566928"/>
+          </a:xfrm>
+          <a:prstGeom prst="rect">
+            <a:avLst/>
+          </a:prstGeom>
+          <a:noFill/>
+          <a:ln/>
+        </p:spPr>
+        <p:txBody>
+          <a:bodyPr wrap="square" lIns="0" tIns="0" rIns="0" bIns="0" rtlCol="0" anchor="ctr"/>
+          <a:lstStyle/>
+          <a:p>
+            <a:pPr marL="0" indent="0">
+              <a:buNone/>
+            </a:pPr>
+            <a:r>
+              <a:rPr lang="en-US" sz="2700" b="1" dirty="0">
+                <a:solidFill>
+                  <a:srgbClr val="0E2A47"/>
+                </a:solidFill>
+                <a:latin typeface="Cambria" pitchFamily="34" charset="0"/>
+                <a:ea typeface="Cambria" pitchFamily="34" charset="-122"/>
+                <a:cs typeface="Cambria" pitchFamily="34" charset="-120"/>
+              </a:rPr>
+              <a:t>Discussion</a:t>
+            </a:r>
+            <a:endParaRPr lang="en-US" sz="2700" dirty="0"/>
+          </a:p>
+        </p:txBody>
+      </p:sp>
+      <p:sp>
+        <p:nvSpPr>
+          <p:cNvPr id="15" name="Shape 10">
+            <a:extLst>
+              <a:ext uri="{FF2B5EF4-FFF2-40B4-BE49-F238E27FC236}">
+                <a16:creationId xmlns:a16="http://schemas.microsoft.com/office/drawing/2014/main" id="{35C724BD-E510-88F6-7220-2E18E327A482}"/>
+              </a:ext>
+            </a:extLst>
+          </p:cNvPr>
+          <p:cNvSpPr/>
+          <p:nvPr/>
+        </p:nvSpPr>
+        <p:spPr>
+          <a:xfrm>
+            <a:off x="566928" y="1501439"/>
+            <a:ext cx="8046720" cy="914400"/>
+          </a:xfrm>
+          <a:prstGeom prst="roundRect">
+            <a:avLst>
+              <a:gd name="adj" fmla="val 9000"/>
+            </a:avLst>
+          </a:prstGeom>
+          <a:solidFill>
+            <a:srgbClr val="0E2A47"/>
+          </a:solidFill>
+          <a:ln/>
+          <a:effectLst>
+            <a:outerShdw blurRad="88900" dist="38100" dir="5400000" algn="bl" rotWithShape="0">
+              <a:srgbClr val="1A2433">
+                <a:alpha val="16000"/>
+              </a:srgbClr>
+            </a:outerShdw>
+          </a:effectLst>
+        </p:spPr>
+        <p:txBody>
+          <a:bodyPr/>
+          <a:lstStyle/>
+          <a:p>
+            <a:endParaRPr lang="en-US" dirty="0"/>
+          </a:p>
+        </p:txBody>
+      </p:sp>
+      <p:sp>
+        <p:nvSpPr>
+          <p:cNvPr id="16" name="Shape 11">
+            <a:extLst>
+              <a:ext uri="{FF2B5EF4-FFF2-40B4-BE49-F238E27FC236}">
+                <a16:creationId xmlns:a16="http://schemas.microsoft.com/office/drawing/2014/main" id="{19E1DB91-1947-609F-34BE-54E61163B84C}"/>
+              </a:ext>
+            </a:extLst>
+          </p:cNvPr>
+          <p:cNvSpPr/>
+          <p:nvPr/>
+        </p:nvSpPr>
+        <p:spPr>
+          <a:xfrm>
+            <a:off x="841248" y="1684319"/>
+            <a:ext cx="548640" cy="548640"/>
+          </a:xfrm>
+          <a:prstGeom prst="ellipse">
+            <a:avLst/>
+          </a:prstGeom>
+          <a:solidFill>
+            <a:srgbClr val="E0A33E"/>
+          </a:solidFill>
+          <a:ln/>
+        </p:spPr>
+        <p:txBody>
+          <a:bodyPr/>
+          <a:lstStyle/>
+          <a:p>
+            <a:endParaRPr lang="en-US"/>
+          </a:p>
+        </p:txBody>
+      </p:sp>
+      <p:pic>
+        <p:nvPicPr>
+          <p:cNvPr id="17" name="Image 3" descr="preencoded.png">
+            <a:extLst>
+              <a:ext uri="{FF2B5EF4-FFF2-40B4-BE49-F238E27FC236}">
+                <a16:creationId xmlns:a16="http://schemas.microsoft.com/office/drawing/2014/main" id="{F310A550-9D71-26CC-3324-2B1E044229FF}"/>
+              </a:ext>
+            </a:extLst>
+          </p:cNvPr>
+          <p:cNvPicPr>
+            <a:picLocks noChangeAspect="1"/>
+          </p:cNvPicPr>
+          <p:nvPr/>
+        </p:nvPicPr>
+        <p:blipFill>
+          <a:blip r:embed="rId4"/>
+          <a:stretch>
+            <a:fillRect/>
+          </a:stretch>
+        </p:blipFill>
+        <p:spPr>
+          <a:xfrm>
+            <a:off x="982092" y="1821479"/>
+            <a:ext cx="274320" cy="274320"/>
+          </a:xfrm>
+          <a:prstGeom prst="rect">
+            <a:avLst/>
+          </a:prstGeom>
+        </p:spPr>
+      </p:pic>
+      <p:sp>
+        <p:nvSpPr>
+          <p:cNvPr id="18" name="Text 12">
+            <a:extLst>
+              <a:ext uri="{FF2B5EF4-FFF2-40B4-BE49-F238E27FC236}">
+                <a16:creationId xmlns:a16="http://schemas.microsoft.com/office/drawing/2014/main" id="{5265D004-AC59-2583-5DBB-7743D9D58E49}"/>
+              </a:ext>
+            </a:extLst>
+          </p:cNvPr>
+          <p:cNvSpPr/>
+          <p:nvPr/>
+        </p:nvSpPr>
+        <p:spPr>
+          <a:xfrm>
+            <a:off x="1591056" y="1647743"/>
+            <a:ext cx="6748272" cy="621792"/>
+          </a:xfrm>
+          <a:prstGeom prst="rect">
+            <a:avLst/>
+          </a:prstGeom>
+          <a:noFill/>
+          <a:ln/>
+        </p:spPr>
+        <p:txBody>
+          <a:bodyPr wrap="square" lIns="0" tIns="0" rIns="0" bIns="0" rtlCol="0" anchor="ctr"/>
+          <a:lstStyle/>
+          <a:p>
+            <a:pPr marL="0" indent="0">
+              <a:buNone/>
+            </a:pPr>
+            <a:r>
+              <a:rPr lang="en-US" sz="1350" dirty="0">
+                <a:solidFill>
+                  <a:srgbClr val="FFFFFF"/>
+                </a:solidFill>
+                <a:latin typeface="Calibri" pitchFamily="34" charset="0"/>
+                <a:ea typeface="Calibri" pitchFamily="34" charset="-122"/>
+                <a:cs typeface="Calibri" pitchFamily="34" charset="-120"/>
+              </a:rPr>
+              <a:t>Dual-pol shifts the question from "how much is there" to "what is it." Pick something someone might want to know from radar — is this rain or hail, is this echo even weather, how much rain actually fell — and talk through how adding shape (ZDR), variety (</a:t>
+            </a:r>
+            <a:r>
+              <a:rPr lang="el-GR" sz="1350" dirty="0">
+                <a:solidFill>
+                  <a:srgbClr val="FFFFFF"/>
+                </a:solidFill>
+                <a:latin typeface="Calibri" pitchFamily="34" charset="0"/>
+                <a:ea typeface="Calibri" pitchFamily="34" charset="-122"/>
+                <a:cs typeface="Calibri" pitchFamily="34" charset="-120"/>
+              </a:rPr>
+              <a:t>ρ</a:t>
+            </a:r>
+            <a:r>
+              <a:rPr lang="en-US" sz="1350" dirty="0">
+                <a:solidFill>
+                  <a:srgbClr val="FFFFFF"/>
+                </a:solidFill>
+                <a:latin typeface="Calibri" pitchFamily="34" charset="0"/>
+                <a:ea typeface="Calibri" pitchFamily="34" charset="-122"/>
+                <a:cs typeface="Calibri" pitchFamily="34" charset="-120"/>
+              </a:rPr>
+              <a:t>hv), or phase (KDP) gets you closer to the answer than reflectivity alone could.</a:t>
+            </a:r>
+            <a:endParaRPr lang="en-US" sz="1050" dirty="0"/>
+          </a:p>
+        </p:txBody>
+      </p:sp>
+      <p:sp>
+        <p:nvSpPr>
+          <p:cNvPr id="20" name="Shape 10">
+            <a:extLst>
+              <a:ext uri="{FF2B5EF4-FFF2-40B4-BE49-F238E27FC236}">
+                <a16:creationId xmlns:a16="http://schemas.microsoft.com/office/drawing/2014/main" id="{D0B76FD6-A204-2F8F-D58A-6B2EDF45502A}"/>
+              </a:ext>
+            </a:extLst>
+          </p:cNvPr>
+          <p:cNvSpPr/>
+          <p:nvPr/>
+        </p:nvSpPr>
+        <p:spPr>
+          <a:xfrm>
+            <a:off x="566928" y="2598719"/>
+            <a:ext cx="8046720" cy="1206988"/>
+          </a:xfrm>
+          <a:prstGeom prst="roundRect">
+            <a:avLst>
+              <a:gd name="adj" fmla="val 9000"/>
+            </a:avLst>
+          </a:prstGeom>
+          <a:solidFill>
+            <a:srgbClr val="0E2A47"/>
+          </a:solidFill>
+          <a:ln/>
+          <a:effectLst>
+            <a:outerShdw blurRad="88900" dist="38100" dir="5400000" algn="bl" rotWithShape="0">
+              <a:srgbClr val="1A2433">
+                <a:alpha val="16000"/>
+              </a:srgbClr>
+            </a:outerShdw>
+          </a:effectLst>
+        </p:spPr>
+        <p:txBody>
+          <a:bodyPr/>
+          <a:lstStyle/>
+          <a:p>
+            <a:endParaRPr lang="en-US"/>
+          </a:p>
+        </p:txBody>
+      </p:sp>
+      <p:sp>
+        <p:nvSpPr>
+          <p:cNvPr id="21" name="Shape 11">
+            <a:extLst>
+              <a:ext uri="{FF2B5EF4-FFF2-40B4-BE49-F238E27FC236}">
+                <a16:creationId xmlns:a16="http://schemas.microsoft.com/office/drawing/2014/main" id="{0B9F0F3E-9909-540F-C5E6-2BA280C2E0D9}"/>
+              </a:ext>
+            </a:extLst>
+          </p:cNvPr>
+          <p:cNvSpPr/>
+          <p:nvPr/>
+        </p:nvSpPr>
+        <p:spPr>
+          <a:xfrm>
+            <a:off x="841248" y="2910379"/>
+            <a:ext cx="548640" cy="548640"/>
+          </a:xfrm>
+          <a:prstGeom prst="ellipse">
+            <a:avLst/>
+          </a:prstGeom>
+          <a:solidFill>
+            <a:srgbClr val="E0A33E"/>
+          </a:solidFill>
+          <a:ln/>
+        </p:spPr>
+        <p:txBody>
+          <a:bodyPr/>
+          <a:lstStyle/>
+          <a:p>
+            <a:endParaRPr lang="en-US"/>
+          </a:p>
+        </p:txBody>
+      </p:sp>
+      <p:pic>
+        <p:nvPicPr>
+          <p:cNvPr id="22" name="Image 3" descr="preencoded.png">
+            <a:extLst>
+              <a:ext uri="{FF2B5EF4-FFF2-40B4-BE49-F238E27FC236}">
+                <a16:creationId xmlns:a16="http://schemas.microsoft.com/office/drawing/2014/main" id="{D4A3AA07-FE2F-FD3C-7E12-3F10A94BF518}"/>
+              </a:ext>
+            </a:extLst>
+          </p:cNvPr>
+          <p:cNvPicPr>
+            <a:picLocks noChangeAspect="1"/>
+          </p:cNvPicPr>
+          <p:nvPr/>
+        </p:nvPicPr>
+        <p:blipFill>
+          <a:blip r:embed="rId4"/>
+          <a:stretch>
+            <a:fillRect/>
+          </a:stretch>
+        </p:blipFill>
+        <p:spPr>
+          <a:xfrm>
+            <a:off x="982092" y="3047539"/>
+            <a:ext cx="274320" cy="274320"/>
+          </a:xfrm>
+          <a:prstGeom prst="rect">
+            <a:avLst/>
+          </a:prstGeom>
+        </p:spPr>
+      </p:pic>
+      <p:sp>
+        <p:nvSpPr>
+          <p:cNvPr id="23" name="Text 12">
+            <a:extLst>
+              <a:ext uri="{FF2B5EF4-FFF2-40B4-BE49-F238E27FC236}">
+                <a16:creationId xmlns:a16="http://schemas.microsoft.com/office/drawing/2014/main" id="{DDE90F3A-D405-CAE0-80BF-5789611420F3}"/>
+              </a:ext>
+            </a:extLst>
+          </p:cNvPr>
+          <p:cNvSpPr/>
+          <p:nvPr/>
+        </p:nvSpPr>
+        <p:spPr>
+          <a:xfrm>
+            <a:off x="1591056" y="2873803"/>
+            <a:ext cx="6748272" cy="621792"/>
+          </a:xfrm>
+          <a:prstGeom prst="rect">
+            <a:avLst/>
+          </a:prstGeom>
+          <a:noFill/>
+          <a:ln/>
+        </p:spPr>
+        <p:txBody>
+          <a:bodyPr wrap="square" lIns="0" tIns="0" rIns="0" bIns="0" rtlCol="0" anchor="ctr"/>
+          <a:lstStyle/>
+          <a:p>
+            <a:pPr marL="0" indent="0">
+              <a:buNone/>
+            </a:pPr>
+            <a:r>
+              <a:rPr lang="en-US" sz="1350" dirty="0">
+                <a:solidFill>
+                  <a:srgbClr val="FFFFFF"/>
+                </a:solidFill>
+                <a:latin typeface="Calibri" pitchFamily="34" charset="0"/>
+                <a:ea typeface="Calibri" pitchFamily="34" charset="-122"/>
+                <a:cs typeface="Calibri" pitchFamily="34" charset="-120"/>
+              </a:rPr>
+              <a:t>You saw the dual-pol variables dissolve into noise wherever the echo was weak. Why does it matter to know not just what a measurement says but how far to trust it — and looking back across all five blocks, what's the recurring reason a single radar number is never the whole story? (The radar kept needing more information to beat a limit — a higher tilt, a second PRF, a second polarization.)</a:t>
+            </a:r>
+            <a:endParaRPr lang="en-US" sz="1050" dirty="0"/>
+          </a:p>
+        </p:txBody>
+      </p:sp>
+      <p:sp>
+        <p:nvSpPr>
+          <p:cNvPr id="24" name="Shape 0">
+            <a:extLst>
+              <a:ext uri="{FF2B5EF4-FFF2-40B4-BE49-F238E27FC236}">
+                <a16:creationId xmlns:a16="http://schemas.microsoft.com/office/drawing/2014/main" id="{1409A04D-B389-FE2E-A156-CC1184BCC5D7}"/>
+              </a:ext>
+            </a:extLst>
+          </p:cNvPr>
+          <p:cNvSpPr/>
+          <p:nvPr/>
+        </p:nvSpPr>
+        <p:spPr>
+          <a:xfrm>
+            <a:off x="701040" y="536448"/>
+            <a:ext cx="566928" cy="566928"/>
+          </a:xfrm>
+          <a:prstGeom prst="ellipse">
+            <a:avLst/>
+          </a:prstGeom>
+          <a:solidFill>
+            <a:srgbClr val="1C7293"/>
+          </a:solidFill>
+          <a:ln/>
+        </p:spPr>
+        <p:txBody>
+          <a:bodyPr/>
+          <a:lstStyle/>
+          <a:p>
+            <a:endParaRPr lang="en-US"/>
+          </a:p>
+        </p:txBody>
+      </p:sp>
+      <p:pic>
+        <p:nvPicPr>
+          <p:cNvPr id="25" name="Image 0" descr="preencoded.png">
+            <a:extLst>
+              <a:ext uri="{FF2B5EF4-FFF2-40B4-BE49-F238E27FC236}">
+                <a16:creationId xmlns:a16="http://schemas.microsoft.com/office/drawing/2014/main" id="{3A769368-79E9-5979-0D56-5B58032485B6}"/>
+              </a:ext>
+            </a:extLst>
+          </p:cNvPr>
+          <p:cNvPicPr>
+            <a:picLocks noChangeAspect="1"/>
+          </p:cNvPicPr>
+          <p:nvPr/>
+        </p:nvPicPr>
+        <p:blipFill>
+          <a:blip r:embed="rId3"/>
+          <a:stretch>
+            <a:fillRect/>
+          </a:stretch>
+        </p:blipFill>
+        <p:spPr>
+          <a:xfrm>
+            <a:off x="842772" y="678180"/>
+            <a:ext cx="283464" cy="283464"/>
+          </a:xfrm>
+          <a:prstGeom prst="rect">
+            <a:avLst/>
+          </a:prstGeom>
+        </p:spPr>
+      </p:pic>
+    </p:spTree>
+    <p:extLst>
+      <p:ext uri="{BB962C8B-B14F-4D97-AF65-F5344CB8AC3E}">
+        <p14:creationId xmlns:p14="http://schemas.microsoft.com/office/powerpoint/2010/main" val="1043741559"/>
+      </p:ext>
+    </p:extLst>
   </p:cSld>
   <p:clrMapOvr>
     <a:masterClrMapping/>
@@ -12055,6 +16840,13 @@
           </a:solidFill>
           <a:ln/>
         </p:spPr>
+        <p:txBody>
+          <a:bodyPr/>
+          <a:lstStyle/>
+          <a:p>
+            <a:endParaRPr lang="en-US"/>
+          </a:p>
+        </p:txBody>
       </p:sp>
       <p:pic>
         <p:nvPicPr>
@@ -12147,6 +16939,13 @@
             </a:outerShdw>
           </a:effectLst>
         </p:spPr>
+        <p:txBody>
+          <a:bodyPr/>
+          <a:lstStyle/>
+          <a:p>
+            <a:endParaRPr lang="en-US"/>
+          </a:p>
+        </p:txBody>
       </p:sp>
       <p:sp>
         <p:nvSpPr>
@@ -12167,6 +16966,13 @@
           </a:solidFill>
           <a:ln/>
         </p:spPr>
+        <p:txBody>
+          <a:bodyPr/>
+          <a:lstStyle/>
+          <a:p>
+            <a:endParaRPr lang="en-US"/>
+          </a:p>
+        </p:txBody>
       </p:sp>
       <p:pic>
         <p:nvPicPr>
@@ -12298,6 +17104,13 @@
             </a:outerShdw>
           </a:effectLst>
         </p:spPr>
+        <p:txBody>
+          <a:bodyPr/>
+          <a:lstStyle/>
+          <a:p>
+            <a:endParaRPr lang="en-US"/>
+          </a:p>
+        </p:txBody>
       </p:sp>
       <p:sp>
         <p:nvSpPr>
@@ -12318,6 +17131,13 @@
           </a:solidFill>
           <a:ln/>
         </p:spPr>
+        <p:txBody>
+          <a:bodyPr/>
+          <a:lstStyle/>
+          <a:p>
+            <a:endParaRPr lang="en-US"/>
+          </a:p>
+        </p:txBody>
       </p:sp>
       <p:pic>
         <p:nvPicPr>
@@ -12449,6 +17269,13 @@
             </a:outerShdw>
           </a:effectLst>
         </p:spPr>
+        <p:txBody>
+          <a:bodyPr/>
+          <a:lstStyle/>
+          <a:p>
+            <a:endParaRPr lang="en-US"/>
+          </a:p>
+        </p:txBody>
       </p:sp>
       <p:sp>
         <p:nvSpPr>
@@ -12469,6 +17296,13 @@
           </a:solidFill>
           <a:ln/>
         </p:spPr>
+        <p:txBody>
+          <a:bodyPr/>
+          <a:lstStyle/>
+          <a:p>
+            <a:endParaRPr lang="en-US"/>
+          </a:p>
+        </p:txBody>
       </p:sp>
       <p:pic>
         <p:nvPicPr>
@@ -12624,6 +17458,13 @@
           </a:solidFill>
           <a:ln/>
         </p:spPr>
+        <p:txBody>
+          <a:bodyPr/>
+          <a:lstStyle/>
+          <a:p>
+            <a:endParaRPr lang="en-US"/>
+          </a:p>
+        </p:txBody>
       </p:sp>
       <p:pic>
         <p:nvPicPr>
@@ -12716,6 +17557,13 @@
             </a:outerShdw>
           </a:effectLst>
         </p:spPr>
+        <p:txBody>
+          <a:bodyPr/>
+          <a:lstStyle/>
+          <a:p>
+            <a:endParaRPr lang="en-US"/>
+          </a:p>
+        </p:txBody>
       </p:sp>
       <p:sp>
         <p:nvSpPr>
@@ -12736,6 +17584,13 @@
           </a:solidFill>
           <a:ln/>
         </p:spPr>
+        <p:txBody>
+          <a:bodyPr/>
+          <a:lstStyle/>
+          <a:p>
+            <a:endParaRPr lang="en-US"/>
+          </a:p>
+        </p:txBody>
       </p:sp>
       <p:pic>
         <p:nvPicPr>
@@ -12867,6 +17722,13 @@
             </a:outerShdw>
           </a:effectLst>
         </p:spPr>
+        <p:txBody>
+          <a:bodyPr/>
+          <a:lstStyle/>
+          <a:p>
+            <a:endParaRPr lang="en-US"/>
+          </a:p>
+        </p:txBody>
       </p:sp>
       <p:sp>
         <p:nvSpPr>
@@ -12887,6 +17749,13 @@
           </a:solidFill>
           <a:ln/>
         </p:spPr>
+        <p:txBody>
+          <a:bodyPr/>
+          <a:lstStyle/>
+          <a:p>
+            <a:endParaRPr lang="en-US"/>
+          </a:p>
+        </p:txBody>
       </p:sp>
       <p:pic>
         <p:nvPicPr>
@@ -13018,6 +17887,13 @@
             </a:outerShdw>
           </a:effectLst>
         </p:spPr>
+        <p:txBody>
+          <a:bodyPr/>
+          <a:lstStyle/>
+          <a:p>
+            <a:endParaRPr lang="en-US"/>
+          </a:p>
+        </p:txBody>
       </p:sp>
       <p:sp>
         <p:nvSpPr>
@@ -13038,6 +17914,13 @@
           </a:solidFill>
           <a:ln/>
         </p:spPr>
+        <p:txBody>
+          <a:bodyPr/>
+          <a:lstStyle/>
+          <a:p>
+            <a:endParaRPr lang="en-US"/>
+          </a:p>
+        </p:txBody>
       </p:sp>
       <p:pic>
         <p:nvPicPr>
@@ -13169,6 +18052,13 @@
             </a:outerShdw>
           </a:effectLst>
         </p:spPr>
+        <p:txBody>
+          <a:bodyPr/>
+          <a:lstStyle/>
+          <a:p>
+            <a:endParaRPr lang="en-US"/>
+          </a:p>
+        </p:txBody>
       </p:sp>
       <p:sp>
         <p:nvSpPr>
@@ -13189,6 +18079,13 @@
           </a:solidFill>
           <a:ln/>
         </p:spPr>
+        <p:txBody>
+          <a:bodyPr/>
+          <a:lstStyle/>
+          <a:p>
+            <a:endParaRPr lang="en-US"/>
+          </a:p>
+        </p:txBody>
       </p:sp>
       <p:pic>
         <p:nvPicPr>
@@ -13344,6 +18241,13 @@
           </a:solidFill>
           <a:ln/>
         </p:spPr>
+        <p:txBody>
+          <a:bodyPr/>
+          <a:lstStyle/>
+          <a:p>
+            <a:endParaRPr lang="en-US"/>
+          </a:p>
+        </p:txBody>
       </p:sp>
       <p:pic>
         <p:nvPicPr>
@@ -13436,6 +18340,13 @@
             </a:outerShdw>
           </a:effectLst>
         </p:spPr>
+        <p:txBody>
+          <a:bodyPr/>
+          <a:lstStyle/>
+          <a:p>
+            <a:endParaRPr lang="en-US"/>
+          </a:p>
+        </p:txBody>
       </p:sp>
       <p:sp>
         <p:nvSpPr>
@@ -13456,6 +18367,13 @@
           </a:solidFill>
           <a:ln/>
         </p:spPr>
+        <p:txBody>
+          <a:bodyPr/>
+          <a:lstStyle/>
+          <a:p>
+            <a:endParaRPr lang="en-US"/>
+          </a:p>
+        </p:txBody>
       </p:sp>
       <p:pic>
         <p:nvPicPr>
@@ -13587,6 +18505,13 @@
             </a:outerShdw>
           </a:effectLst>
         </p:spPr>
+        <p:txBody>
+          <a:bodyPr/>
+          <a:lstStyle/>
+          <a:p>
+            <a:endParaRPr lang="en-US"/>
+          </a:p>
+        </p:txBody>
       </p:sp>
       <p:sp>
         <p:nvSpPr>
@@ -13607,6 +18532,13 @@
           </a:solidFill>
           <a:ln/>
         </p:spPr>
+        <p:txBody>
+          <a:bodyPr/>
+          <a:lstStyle/>
+          <a:p>
+            <a:endParaRPr lang="en-US"/>
+          </a:p>
+        </p:txBody>
       </p:sp>
       <p:pic>
         <p:nvPicPr>
@@ -13738,6 +18670,13 @@
             </a:outerShdw>
           </a:effectLst>
         </p:spPr>
+        <p:txBody>
+          <a:bodyPr/>
+          <a:lstStyle/>
+          <a:p>
+            <a:endParaRPr lang="en-US"/>
+          </a:p>
+        </p:txBody>
       </p:sp>
       <p:sp>
         <p:nvSpPr>
@@ -13758,6 +18697,13 @@
           </a:solidFill>
           <a:ln/>
         </p:spPr>
+        <p:txBody>
+          <a:bodyPr/>
+          <a:lstStyle/>
+          <a:p>
+            <a:endParaRPr lang="en-US"/>
+          </a:p>
+        </p:txBody>
       </p:sp>
       <p:pic>
         <p:nvPicPr>
@@ -13889,6 +18835,13 @@
             </a:outerShdw>
           </a:effectLst>
         </p:spPr>
+        <p:txBody>
+          <a:bodyPr/>
+          <a:lstStyle/>
+          <a:p>
+            <a:endParaRPr lang="en-US"/>
+          </a:p>
+        </p:txBody>
       </p:sp>
       <p:sp>
         <p:nvSpPr>
@@ -13981,6 +18934,13 @@
           </a:solidFill>
           <a:ln/>
         </p:spPr>
+        <p:txBody>
+          <a:bodyPr/>
+          <a:lstStyle/>
+          <a:p>
+            <a:endParaRPr lang="en-US"/>
+          </a:p>
+        </p:txBody>
       </p:sp>
       <p:pic>
         <p:nvPicPr>
@@ -14073,6 +19033,13 @@
             </a:outerShdw>
           </a:effectLst>
         </p:spPr>
+        <p:txBody>
+          <a:bodyPr/>
+          <a:lstStyle/>
+          <a:p>
+            <a:endParaRPr lang="en-US"/>
+          </a:p>
+        </p:txBody>
       </p:sp>
       <p:sp>
         <p:nvSpPr>
@@ -14093,6 +19060,13 @@
           </a:solidFill>
           <a:ln/>
         </p:spPr>
+        <p:txBody>
+          <a:bodyPr/>
+          <a:lstStyle/>
+          <a:p>
+            <a:endParaRPr lang="en-US"/>
+          </a:p>
+        </p:txBody>
       </p:sp>
       <p:pic>
         <p:nvPicPr>
@@ -14224,6 +19198,13 @@
             </a:outerShdw>
           </a:effectLst>
         </p:spPr>
+        <p:txBody>
+          <a:bodyPr/>
+          <a:lstStyle/>
+          <a:p>
+            <a:endParaRPr lang="en-US"/>
+          </a:p>
+        </p:txBody>
       </p:sp>
       <p:sp>
         <p:nvSpPr>
@@ -14244,6 +19225,13 @@
           </a:solidFill>
           <a:ln/>
         </p:spPr>
+        <p:txBody>
+          <a:bodyPr/>
+          <a:lstStyle/>
+          <a:p>
+            <a:endParaRPr lang="en-US"/>
+          </a:p>
+        </p:txBody>
       </p:sp>
       <p:pic>
         <p:nvPicPr>
@@ -14375,6 +19363,13 @@
             </a:outerShdw>
           </a:effectLst>
         </p:spPr>
+        <p:txBody>
+          <a:bodyPr/>
+          <a:lstStyle/>
+          <a:p>
+            <a:endParaRPr lang="en-US"/>
+          </a:p>
+        </p:txBody>
       </p:sp>
       <p:sp>
         <p:nvSpPr>
@@ -14395,6 +19390,13 @@
           </a:solidFill>
           <a:ln/>
         </p:spPr>
+        <p:txBody>
+          <a:bodyPr/>
+          <a:lstStyle/>
+          <a:p>
+            <a:endParaRPr lang="en-US"/>
+          </a:p>
+        </p:txBody>
       </p:sp>
       <p:pic>
         <p:nvPicPr>
@@ -14592,6 +19594,13 @@
             </a:outerShdw>
           </a:effectLst>
         </p:spPr>
+        <p:txBody>
+          <a:bodyPr/>
+          <a:lstStyle/>
+          <a:p>
+            <a:endParaRPr lang="en-US"/>
+          </a:p>
+        </p:txBody>
       </p:sp>
       <p:sp>
         <p:nvSpPr>
@@ -14612,6 +19621,13 @@
           </a:solidFill>
           <a:ln/>
         </p:spPr>
+        <p:txBody>
+          <a:bodyPr/>
+          <a:lstStyle/>
+          <a:p>
+            <a:endParaRPr lang="en-US"/>
+          </a:p>
+        </p:txBody>
       </p:sp>
       <p:pic>
         <p:nvPicPr>
@@ -14710,6 +19726,13 @@
             </a:outerShdw>
           </a:effectLst>
         </p:spPr>
+        <p:txBody>
+          <a:bodyPr/>
+          <a:lstStyle/>
+          <a:p>
+            <a:endParaRPr lang="en-US"/>
+          </a:p>
+        </p:txBody>
       </p:sp>
       <p:sp>
         <p:nvSpPr>
@@ -14736,6 +19759,13 @@
           </a:solidFill>
           <a:ln/>
         </p:spPr>
+        <p:txBody>
+          <a:bodyPr/>
+          <a:lstStyle/>
+          <a:p>
+            <a:endParaRPr lang="en-US"/>
+          </a:p>
+        </p:txBody>
       </p:sp>
       <p:pic>
         <p:nvPicPr>
@@ -14837,6 +19867,13 @@
           </a:solidFill>
           <a:ln/>
         </p:spPr>
+        <p:txBody>
+          <a:bodyPr/>
+          <a:lstStyle/>
+          <a:p>
+            <a:endParaRPr lang="en-US"/>
+          </a:p>
+        </p:txBody>
       </p:sp>
       <p:pic>
         <p:nvPicPr>
@@ -14964,6 +20001,13 @@
           </a:solidFill>
           <a:ln/>
         </p:spPr>
+        <p:txBody>
+          <a:bodyPr/>
+          <a:lstStyle/>
+          <a:p>
+            <a:endParaRPr lang="en-US"/>
+          </a:p>
+        </p:txBody>
       </p:sp>
       <p:pic>
         <p:nvPicPr>
